--- a/assets/figures-editable/c1-c2/c1-e33.pptx
+++ b/assets/figures-editable/c1-c2/c1-e33.pptx
@@ -7,7 +7,7 @@
   <p:sldIdLst>
     <p:sldId id="256" r:id="rId7"/>
   </p:sldIdLst>
-  <p:sldSz cx="11948160" cy="7924799" type="screen4x3"/>
+  <p:sldSz cx="12191695" cy="6858000" type="screen4x3"/>
   <p:notesSz cx="6858000" cy="9144000"/>
   <p:defaultTextStyle>
     <a:defPPr>
@@ -3098,14 +3098,14 @@
       <p:grpSpPr/>
       <p:sp>
         <p:nvSpPr>
-          <p:cNvPr id="2" name="text1" descr="sci-ppt:C1-E33-001"/>
+          <p:cNvPr id="2" name="C1-E33 text 0" descr="sci-ppt:o000"/>
           <p:cNvSpPr txBox="1"/>
           <p:nvPr/>
         </p:nvSpPr>
         <p:spPr>
           <a:xfrm>
-            <a:off x="316992" y="268224"/>
-            <a:ext cx="11277600" cy="359054"/>
+            <a:off x="274320" y="118872"/>
+            <a:ext cx="11612880" cy="340105"/>
           </a:xfrm>
           <a:prstGeom prst="rect">
             <a:avLst/>
@@ -3114,7 +3114,7 @@
           <a:effectLst/>
         </p:spPr>
         <p:txBody>
-          <a:bodyPr wrap="none" lIns="27432" rIns="27432" tIns="18288" bIns="18288" anchor="ctr">
+          <a:bodyPr wrap="none" lIns="18288" rIns="18288" tIns="18288" bIns="18288" anchor="t">
             <a:spAutoFit/>
           </a:bodyPr>
           <a:lstStyle/>
@@ -3125,83 +3125,115 @@
               </a:spcAft>
             </a:pPr>
             <a:r>
-              <a:rPr sz="1823" b="0" i="0">
+              <a:rPr sz="1900" b="1" i="0">
                 <a:solidFill>
                   <a:srgbClr val="8EDBD4"/>
                 </a:solidFill>
                 <a:latin typeface="Arial"/>
               </a:rPr>
-              <a:t>C1-E33 | Physical-variable diagram</a:t>
-            </a:r>
-          </a:p>
-        </p:txBody>
-      </p:sp>
-      <p:sp>
-        <p:nvSpPr>
-          <p:cNvPr id="3" name="ellipse2" descr="sci-ppt:C1-E33-002"/>
-          <p:cNvSpPr/>
-          <p:nvPr/>
-        </p:nvSpPr>
-        <p:spPr>
-          <a:xfrm>
-            <a:off x="2072640" y="1402080"/>
-            <a:ext cx="2438400" cy="2438400"/>
-          </a:xfrm>
-          <a:prstGeom prst="ellipse">
-            <a:avLst/>
-          </a:prstGeom>
-          <a:solidFill>
-            <a:srgbClr val="213E4B"/>
-          </a:solidFill>
-          <a:ln w="21590">
+              <a:t>C1-E33 · Original formulas quoted for defense 2</a:t>
+            </a:r>
+          </a:p>
+        </p:txBody>
+      </p:sp>
+      <p:cxnSp>
+        <p:nvCxnSpPr>
+          <p:cNvPr id="3" name="C1-E33 line 1" descr="sci-ppt:o001"/>
+          <p:cNvCxnSpPr/>
+          <p:nvPr/>
+        </p:nvCxnSpPr>
+        <p:spPr>
+          <a:xfrm>
+            <a:off x="822960" y="4572000"/>
+            <a:ext cx="3291840" cy="0"/>
+          </a:xfrm>
+          <a:prstGeom prst="line">
+            <a:avLst/>
+          </a:prstGeom>
+          <a:ln w="19050">
             <a:solidFill>
               <a:srgbClr val="B4C7D2"/>
             </a:solidFill>
           </a:ln>
           <a:effectLst/>
         </p:spPr>
-        <p:txBody>
-          <a:bodyPr rtlCol="0" anchor="ctr"/>
-          <a:lstStyle/>
-          <a:p>
-            <a:pPr algn="ctr"/>
-          </a:p>
-        </p:txBody>
-      </p:sp>
+      </p:cxnSp>
       <p:cxnSp>
         <p:nvCxnSpPr>
-          <p:cNvPr id="4" name="arrow3" descr="sci-ppt:C1-E33-003"/>
+          <p:cNvPr id="4" name="C1-E33 line 2" descr="sci-ppt:o002"/>
           <p:cNvCxnSpPr/>
           <p:nvPr/>
         </p:nvCxnSpPr>
         <p:spPr>
           <a:xfrm>
-            <a:off x="3291840" y="2621280"/>
-            <a:ext cx="1219200" cy="0"/>
+            <a:off x="822960" y="1554480"/>
+            <a:ext cx="0" cy="3017520"/>
           </a:xfrm>
           <a:prstGeom prst="line">
             <a:avLst/>
           </a:prstGeom>
-          <a:ln w="25400">
+          <a:ln w="19050">
             <a:solidFill>
-              <a:srgbClr val="8EDBD4"/>
+              <a:srgbClr val="B4C7D2"/>
             </a:solidFill>
-            <a:headEnd type="none" w="med" len="med"/>
-            <a:tailEnd type="triangle" w="med" len="med"/>
           </a:ln>
           <a:effectLst/>
         </p:spPr>
       </p:cxnSp>
-      <p:sp>
-        <p:nvSpPr>
-          <p:cNvPr id="5" name="text4" descr="sci-ppt:C1-E33-004"/>
+      <p:cxnSp>
+        <p:nvCxnSpPr>
+          <p:cNvPr id="5" name="C1-E33 line 3" descr="sci-ppt:o003"/>
+          <p:cNvCxnSpPr/>
+          <p:nvPr/>
+        </p:nvCxnSpPr>
+        <p:spPr>
+          <a:xfrm>
+            <a:off x="822960" y="4572000"/>
+            <a:ext cx="0" cy="64008"/>
+          </a:xfrm>
+          <a:prstGeom prst="line">
+            <a:avLst/>
+          </a:prstGeom>
+          <a:ln w="12700">
+            <a:solidFill>
+              <a:srgbClr val="B4C7D2"/>
+            </a:solidFill>
+          </a:ln>
+          <a:effectLst/>
+        </p:spPr>
+      </p:cxnSp>
+      <p:cxnSp>
+        <p:nvCxnSpPr>
+          <p:cNvPr id="6" name="C1-E33 line 4" descr="sci-ppt:o004"/>
+          <p:cNvCxnSpPr/>
+          <p:nvPr/>
+        </p:nvCxnSpPr>
+        <p:spPr>
+          <a:xfrm>
+            <a:off x="822960" y="1554480"/>
+            <a:ext cx="0" cy="3017520"/>
+          </a:xfrm>
+          <a:prstGeom prst="line">
+            <a:avLst/>
+          </a:prstGeom>
+          <a:ln w="7620">
+            <a:solidFill>
+              <a:srgbClr val="2E4756"/>
+            </a:solidFill>
+          </a:ln>
+          <a:effectLst/>
+        </p:spPr>
+      </p:cxnSp>
+      <p:sp>
+        <p:nvSpPr>
+          <p:cNvPr id="7" name="C1-E33 text 5" descr="sci-ppt:o005"/>
           <p:cNvSpPr txBox="1"/>
           <p:nvPr/>
         </p:nvSpPr>
         <p:spPr>
           <a:xfrm>
-            <a:off x="3474720" y="2133600"/>
-            <a:ext cx="1584960" cy="396849"/>
+            <a:off x="365760" y="4654296"/>
+            <a:ext cx="914400" cy="208407"/>
           </a:xfrm>
           <a:prstGeom prst="rect">
             <a:avLst/>
@@ -3210,7 +3242,613 @@
           <a:effectLst/>
         </p:spPr>
         <p:txBody>
-          <a:bodyPr wrap="none" lIns="27432" rIns="27432" tIns="18288" bIns="18288" anchor="ctr">
+          <a:bodyPr wrap="none" lIns="18288" rIns="18288" tIns="18288" bIns="18288" anchor="t">
+            <a:spAutoFit/>
+          </a:bodyPr>
+          <a:lstStyle/>
+          <a:p>
+            <a:pPr algn="ctr">
+              <a:spcAft>
+                <a:spcPts val="0"/>
+              </a:spcAft>
+            </a:pPr>
+            <a:r>
+              <a:rPr sz="1050" b="0" i="0">
+                <a:solidFill>
+                  <a:srgbClr val="B4C7D2"/>
+                </a:solidFill>
+                <a:latin typeface="Arial"/>
+              </a:rPr>
+              <a:t>0.05</a:t>
+            </a:r>
+          </a:p>
+        </p:txBody>
+      </p:sp>
+      <p:cxnSp>
+        <p:nvCxnSpPr>
+          <p:cNvPr id="8" name="C1-E33 line 6" descr="sci-ppt:o006"/>
+          <p:cNvCxnSpPr/>
+          <p:nvPr/>
+        </p:nvCxnSpPr>
+        <p:spPr>
+          <a:xfrm>
+            <a:off x="1584620" y="4572000"/>
+            <a:ext cx="0" cy="64008"/>
+          </a:xfrm>
+          <a:prstGeom prst="line">
+            <a:avLst/>
+          </a:prstGeom>
+          <a:ln w="12700">
+            <a:solidFill>
+              <a:srgbClr val="B4C7D2"/>
+            </a:solidFill>
+          </a:ln>
+          <a:effectLst/>
+        </p:spPr>
+      </p:cxnSp>
+      <p:cxnSp>
+        <p:nvCxnSpPr>
+          <p:cNvPr id="9" name="C1-E33 line 7" descr="sci-ppt:o007"/>
+          <p:cNvCxnSpPr/>
+          <p:nvPr/>
+        </p:nvCxnSpPr>
+        <p:spPr>
+          <a:xfrm>
+            <a:off x="1584620" y="1554480"/>
+            <a:ext cx="0" cy="3017520"/>
+          </a:xfrm>
+          <a:prstGeom prst="line">
+            <a:avLst/>
+          </a:prstGeom>
+          <a:ln w="7620">
+            <a:solidFill>
+              <a:srgbClr val="2E4756"/>
+            </a:solidFill>
+          </a:ln>
+          <a:effectLst/>
+        </p:spPr>
+      </p:cxnSp>
+      <p:sp>
+        <p:nvSpPr>
+          <p:cNvPr id="10" name="C1-E33 text 8" descr="sci-ppt:o008"/>
+          <p:cNvSpPr txBox="1"/>
+          <p:nvPr/>
+        </p:nvSpPr>
+        <p:spPr>
+          <a:xfrm>
+            <a:off x="1127420" y="4654296"/>
+            <a:ext cx="914400" cy="208407"/>
+          </a:xfrm>
+          <a:prstGeom prst="rect">
+            <a:avLst/>
+          </a:prstGeom>
+          <a:noFill/>
+          <a:effectLst/>
+        </p:spPr>
+        <p:txBody>
+          <a:bodyPr wrap="none" lIns="18288" rIns="18288" tIns="18288" bIns="18288" anchor="t">
+            <a:spAutoFit/>
+          </a:bodyPr>
+          <a:lstStyle/>
+          <a:p>
+            <a:pPr algn="ctr">
+              <a:spcAft>
+                <a:spcPts val="0"/>
+              </a:spcAft>
+            </a:pPr>
+            <a:r>
+              <a:rPr sz="1050" b="0" i="0">
+                <a:solidFill>
+                  <a:srgbClr val="B4C7D2"/>
+                </a:solidFill>
+                <a:latin typeface="Arial"/>
+              </a:rPr>
+              <a:t>0.1</a:t>
+            </a:r>
+          </a:p>
+        </p:txBody>
+      </p:sp>
+      <p:cxnSp>
+        <p:nvCxnSpPr>
+          <p:cNvPr id="11" name="C1-E33 line 9" descr="sci-ppt:o009"/>
+          <p:cNvCxnSpPr/>
+          <p:nvPr/>
+        </p:nvCxnSpPr>
+        <p:spPr>
+          <a:xfrm>
+            <a:off x="3353139" y="4572000"/>
+            <a:ext cx="0" cy="64008"/>
+          </a:xfrm>
+          <a:prstGeom prst="line">
+            <a:avLst/>
+          </a:prstGeom>
+          <a:ln w="12700">
+            <a:solidFill>
+              <a:srgbClr val="B4C7D2"/>
+            </a:solidFill>
+          </a:ln>
+          <a:effectLst/>
+        </p:spPr>
+      </p:cxnSp>
+      <p:cxnSp>
+        <p:nvCxnSpPr>
+          <p:cNvPr id="12" name="C1-E33 line 10" descr="sci-ppt:o010"/>
+          <p:cNvCxnSpPr/>
+          <p:nvPr/>
+        </p:nvCxnSpPr>
+        <p:spPr>
+          <a:xfrm>
+            <a:off x="3353139" y="1554480"/>
+            <a:ext cx="0" cy="3017520"/>
+          </a:xfrm>
+          <a:prstGeom prst="line">
+            <a:avLst/>
+          </a:prstGeom>
+          <a:ln w="7620">
+            <a:solidFill>
+              <a:srgbClr val="2E4756"/>
+            </a:solidFill>
+          </a:ln>
+          <a:effectLst/>
+        </p:spPr>
+      </p:cxnSp>
+      <p:sp>
+        <p:nvSpPr>
+          <p:cNvPr id="13" name="C1-E33 text 11" descr="sci-ppt:o011"/>
+          <p:cNvSpPr txBox="1"/>
+          <p:nvPr/>
+        </p:nvSpPr>
+        <p:spPr>
+          <a:xfrm>
+            <a:off x="2895939" y="4654296"/>
+            <a:ext cx="914400" cy="208407"/>
+          </a:xfrm>
+          <a:prstGeom prst="rect">
+            <a:avLst/>
+          </a:prstGeom>
+          <a:noFill/>
+          <a:effectLst/>
+        </p:spPr>
+        <p:txBody>
+          <a:bodyPr wrap="none" lIns="18288" rIns="18288" tIns="18288" bIns="18288" anchor="t">
+            <a:spAutoFit/>
+          </a:bodyPr>
+          <a:lstStyle/>
+          <a:p>
+            <a:pPr algn="ctr">
+              <a:spcAft>
+                <a:spcPts val="0"/>
+              </a:spcAft>
+            </a:pPr>
+            <a:r>
+              <a:rPr sz="1050" b="0" i="0">
+                <a:solidFill>
+                  <a:srgbClr val="B4C7D2"/>
+                </a:solidFill>
+                <a:latin typeface="Arial"/>
+              </a:rPr>
+              <a:t>0.5</a:t>
+            </a:r>
+          </a:p>
+        </p:txBody>
+      </p:sp>
+      <p:cxnSp>
+        <p:nvCxnSpPr>
+          <p:cNvPr id="14" name="C1-E33 line 12" descr="sci-ppt:o012"/>
+          <p:cNvCxnSpPr/>
+          <p:nvPr/>
+        </p:nvCxnSpPr>
+        <p:spPr>
+          <a:xfrm>
+            <a:off x="4114800" y="4572000"/>
+            <a:ext cx="0" cy="64008"/>
+          </a:xfrm>
+          <a:prstGeom prst="line">
+            <a:avLst/>
+          </a:prstGeom>
+          <a:ln w="12700">
+            <a:solidFill>
+              <a:srgbClr val="B4C7D2"/>
+            </a:solidFill>
+          </a:ln>
+          <a:effectLst/>
+        </p:spPr>
+      </p:cxnSp>
+      <p:cxnSp>
+        <p:nvCxnSpPr>
+          <p:cNvPr id="15" name="C1-E33 line 13" descr="sci-ppt:o013"/>
+          <p:cNvCxnSpPr/>
+          <p:nvPr/>
+        </p:nvCxnSpPr>
+        <p:spPr>
+          <a:xfrm>
+            <a:off x="4114800" y="1554480"/>
+            <a:ext cx="0" cy="3017520"/>
+          </a:xfrm>
+          <a:prstGeom prst="line">
+            <a:avLst/>
+          </a:prstGeom>
+          <a:ln w="7620">
+            <a:solidFill>
+              <a:srgbClr val="2E4756"/>
+            </a:solidFill>
+          </a:ln>
+          <a:effectLst/>
+        </p:spPr>
+      </p:cxnSp>
+      <p:sp>
+        <p:nvSpPr>
+          <p:cNvPr id="16" name="C1-E33 text 14" descr="sci-ppt:o014"/>
+          <p:cNvSpPr txBox="1"/>
+          <p:nvPr/>
+        </p:nvSpPr>
+        <p:spPr>
+          <a:xfrm>
+            <a:off x="3657600" y="4654296"/>
+            <a:ext cx="914400" cy="208407"/>
+          </a:xfrm>
+          <a:prstGeom prst="rect">
+            <a:avLst/>
+          </a:prstGeom>
+          <a:noFill/>
+          <a:effectLst/>
+        </p:spPr>
+        <p:txBody>
+          <a:bodyPr wrap="none" lIns="18288" rIns="18288" tIns="18288" bIns="18288" anchor="t">
+            <a:spAutoFit/>
+          </a:bodyPr>
+          <a:lstStyle/>
+          <a:p>
+            <a:pPr algn="ctr">
+              <a:spcAft>
+                <a:spcPts val="0"/>
+              </a:spcAft>
+            </a:pPr>
+            <a:r>
+              <a:rPr sz="1050" b="0" i="0">
+                <a:solidFill>
+                  <a:srgbClr val="B4C7D2"/>
+                </a:solidFill>
+                <a:latin typeface="Arial"/>
+              </a:rPr>
+              <a:t>1</a:t>
+            </a:r>
+          </a:p>
+        </p:txBody>
+      </p:sp>
+      <p:cxnSp>
+        <p:nvCxnSpPr>
+          <p:cNvPr id="17" name="C1-E33 line 15" descr="sci-ppt:o015"/>
+          <p:cNvCxnSpPr/>
+          <p:nvPr/>
+        </p:nvCxnSpPr>
+        <p:spPr>
+          <a:xfrm>
+            <a:off x="758952" y="4572000"/>
+            <a:ext cx="64008" cy="0"/>
+          </a:xfrm>
+          <a:prstGeom prst="line">
+            <a:avLst/>
+          </a:prstGeom>
+          <a:ln w="12700">
+            <a:solidFill>
+              <a:srgbClr val="B4C7D2"/>
+            </a:solidFill>
+          </a:ln>
+          <a:effectLst/>
+        </p:spPr>
+      </p:cxnSp>
+      <p:cxnSp>
+        <p:nvCxnSpPr>
+          <p:cNvPr id="18" name="C1-E33 line 16" descr="sci-ppt:o016"/>
+          <p:cNvCxnSpPr/>
+          <p:nvPr/>
+        </p:nvCxnSpPr>
+        <p:spPr>
+          <a:xfrm>
+            <a:off x="758952" y="3566160"/>
+            <a:ext cx="64008" cy="0"/>
+          </a:xfrm>
+          <a:prstGeom prst="line">
+            <a:avLst/>
+          </a:prstGeom>
+          <a:ln w="12700">
+            <a:solidFill>
+              <a:srgbClr val="B4C7D2"/>
+            </a:solidFill>
+          </a:ln>
+          <a:effectLst/>
+        </p:spPr>
+      </p:cxnSp>
+      <p:cxnSp>
+        <p:nvCxnSpPr>
+          <p:cNvPr id="19" name="C1-E33 line 17" descr="sci-ppt:o017"/>
+          <p:cNvCxnSpPr/>
+          <p:nvPr/>
+        </p:nvCxnSpPr>
+        <p:spPr>
+          <a:xfrm>
+            <a:off x="822960" y="3566160"/>
+            <a:ext cx="3291840" cy="0"/>
+          </a:xfrm>
+          <a:prstGeom prst="line">
+            <a:avLst/>
+          </a:prstGeom>
+          <a:ln w="7620">
+            <a:solidFill>
+              <a:srgbClr val="2E4756"/>
+            </a:solidFill>
+          </a:ln>
+          <a:effectLst/>
+        </p:spPr>
+      </p:cxnSp>
+      <p:sp>
+        <p:nvSpPr>
+          <p:cNvPr id="20" name="C1-E33 text 18" descr="sci-ppt:o018"/>
+          <p:cNvSpPr txBox="1"/>
+          <p:nvPr/>
+        </p:nvSpPr>
+        <p:spPr>
+          <a:xfrm>
+            <a:off x="-45719" y="3483864"/>
+            <a:ext cx="777240" cy="208407"/>
+          </a:xfrm>
+          <a:prstGeom prst="rect">
+            <a:avLst/>
+          </a:prstGeom>
+          <a:noFill/>
+          <a:effectLst/>
+        </p:spPr>
+        <p:txBody>
+          <a:bodyPr wrap="none" lIns="18288" rIns="18288" tIns="18288" bIns="18288" anchor="t">
+            <a:spAutoFit/>
+          </a:bodyPr>
+          <a:lstStyle/>
+          <a:p>
+            <a:pPr algn="r">
+              <a:spcAft>
+                <a:spcPts val="0"/>
+              </a:spcAft>
+            </a:pPr>
+            <a:r>
+              <a:rPr sz="1050" b="0" i="0">
+                <a:solidFill>
+                  <a:srgbClr val="B4C7D2"/>
+                </a:solidFill>
+                <a:latin typeface="Arial"/>
+              </a:rPr>
+              <a:t>10</a:t>
+            </a:r>
+          </a:p>
+        </p:txBody>
+      </p:sp>
+      <p:cxnSp>
+        <p:nvCxnSpPr>
+          <p:cNvPr id="21" name="C1-E33 line 19" descr="sci-ppt:o019"/>
+          <p:cNvCxnSpPr/>
+          <p:nvPr/>
+        </p:nvCxnSpPr>
+        <p:spPr>
+          <a:xfrm>
+            <a:off x="758952" y="2560320"/>
+            <a:ext cx="64008" cy="0"/>
+          </a:xfrm>
+          <a:prstGeom prst="line">
+            <a:avLst/>
+          </a:prstGeom>
+          <a:ln w="12700">
+            <a:solidFill>
+              <a:srgbClr val="B4C7D2"/>
+            </a:solidFill>
+          </a:ln>
+          <a:effectLst/>
+        </p:spPr>
+      </p:cxnSp>
+      <p:cxnSp>
+        <p:nvCxnSpPr>
+          <p:cNvPr id="22" name="C1-E33 line 20" descr="sci-ppt:o020"/>
+          <p:cNvCxnSpPr/>
+          <p:nvPr/>
+        </p:nvCxnSpPr>
+        <p:spPr>
+          <a:xfrm>
+            <a:off x="822960" y="2560320"/>
+            <a:ext cx="3291840" cy="0"/>
+          </a:xfrm>
+          <a:prstGeom prst="line">
+            <a:avLst/>
+          </a:prstGeom>
+          <a:ln w="7620">
+            <a:solidFill>
+              <a:srgbClr val="2E4756"/>
+            </a:solidFill>
+          </a:ln>
+          <a:effectLst/>
+        </p:spPr>
+      </p:cxnSp>
+      <p:sp>
+        <p:nvSpPr>
+          <p:cNvPr id="23" name="C1-E33 text 21" descr="sci-ppt:o021"/>
+          <p:cNvSpPr txBox="1"/>
+          <p:nvPr/>
+        </p:nvSpPr>
+        <p:spPr>
+          <a:xfrm>
+            <a:off x="-45719" y="2478024"/>
+            <a:ext cx="777240" cy="208407"/>
+          </a:xfrm>
+          <a:prstGeom prst="rect">
+            <a:avLst/>
+          </a:prstGeom>
+          <a:noFill/>
+          <a:effectLst/>
+        </p:spPr>
+        <p:txBody>
+          <a:bodyPr wrap="none" lIns="18288" rIns="18288" tIns="18288" bIns="18288" anchor="t">
+            <a:spAutoFit/>
+          </a:bodyPr>
+          <a:lstStyle/>
+          <a:p>
+            <a:pPr algn="r">
+              <a:spcAft>
+                <a:spcPts val="0"/>
+              </a:spcAft>
+            </a:pPr>
+            <a:r>
+              <a:rPr sz="1050" b="0" i="0">
+                <a:solidFill>
+                  <a:srgbClr val="B4C7D2"/>
+                </a:solidFill>
+                <a:latin typeface="Arial"/>
+              </a:rPr>
+              <a:t>100</a:t>
+            </a:r>
+          </a:p>
+        </p:txBody>
+      </p:sp>
+      <p:cxnSp>
+        <p:nvCxnSpPr>
+          <p:cNvPr id="24" name="C1-E33 line 22" descr="sci-ppt:o022"/>
+          <p:cNvCxnSpPr/>
+          <p:nvPr/>
+        </p:nvCxnSpPr>
+        <p:spPr>
+          <a:xfrm>
+            <a:off x="758952" y="1554480"/>
+            <a:ext cx="64008" cy="0"/>
+          </a:xfrm>
+          <a:prstGeom prst="line">
+            <a:avLst/>
+          </a:prstGeom>
+          <a:ln w="12700">
+            <a:solidFill>
+              <a:srgbClr val="B4C7D2"/>
+            </a:solidFill>
+          </a:ln>
+          <a:effectLst/>
+        </p:spPr>
+      </p:cxnSp>
+      <p:cxnSp>
+        <p:nvCxnSpPr>
+          <p:cNvPr id="25" name="C1-E33 line 23" descr="sci-ppt:o023"/>
+          <p:cNvCxnSpPr/>
+          <p:nvPr/>
+        </p:nvCxnSpPr>
+        <p:spPr>
+          <a:xfrm>
+            <a:off x="822960" y="1554480"/>
+            <a:ext cx="3291840" cy="0"/>
+          </a:xfrm>
+          <a:prstGeom prst="line">
+            <a:avLst/>
+          </a:prstGeom>
+          <a:ln w="7620">
+            <a:solidFill>
+              <a:srgbClr val="2E4756"/>
+            </a:solidFill>
+          </a:ln>
+          <a:effectLst/>
+        </p:spPr>
+      </p:cxnSp>
+      <p:sp>
+        <p:nvSpPr>
+          <p:cNvPr id="26" name="C1-E33 text 24" descr="sci-ppt:o024"/>
+          <p:cNvSpPr txBox="1"/>
+          <p:nvPr/>
+        </p:nvSpPr>
+        <p:spPr>
+          <a:xfrm>
+            <a:off x="-45719" y="1472184"/>
+            <a:ext cx="777240" cy="208407"/>
+          </a:xfrm>
+          <a:prstGeom prst="rect">
+            <a:avLst/>
+          </a:prstGeom>
+          <a:noFill/>
+          <a:effectLst/>
+        </p:spPr>
+        <p:txBody>
+          <a:bodyPr wrap="none" lIns="18288" rIns="18288" tIns="18288" bIns="18288" anchor="t">
+            <a:spAutoFit/>
+          </a:bodyPr>
+          <a:lstStyle/>
+          <a:p>
+            <a:pPr algn="r">
+              <a:spcAft>
+                <a:spcPts val="0"/>
+              </a:spcAft>
+            </a:pPr>
+            <a:r>
+              <a:rPr sz="1050" b="0" i="0">
+                <a:solidFill>
+                  <a:srgbClr val="B4C7D2"/>
+                </a:solidFill>
+                <a:latin typeface="Arial"/>
+              </a:rPr>
+              <a:t>1000</a:t>
+            </a:r>
+          </a:p>
+        </p:txBody>
+      </p:sp>
+      <p:sp>
+        <p:nvSpPr>
+          <p:cNvPr id="27" name="C1-E33 text 25" descr="sci-ppt:o025"/>
+          <p:cNvSpPr txBox="1"/>
+          <p:nvPr/>
+        </p:nvSpPr>
+        <p:spPr>
+          <a:xfrm>
+            <a:off x="822960" y="4855464"/>
+            <a:ext cx="3291840" cy="231648"/>
+          </a:xfrm>
+          <a:prstGeom prst="rect">
+            <a:avLst/>
+          </a:prstGeom>
+          <a:noFill/>
+          <a:effectLst/>
+        </p:spPr>
+        <p:txBody>
+          <a:bodyPr wrap="none" lIns="18288" rIns="18288" tIns="18288" bIns="18288" anchor="t">
+            <a:spAutoFit/>
+          </a:bodyPr>
+          <a:lstStyle/>
+          <a:p>
+            <a:pPr algn="ctr">
+              <a:spcAft>
+                <a:spcPts val="0"/>
+              </a:spcAft>
+            </a:pPr>
+            <a:r>
+              <a:rPr sz="1200" b="0" i="0">
+                <a:solidFill>
+                  <a:srgbClr val="E7F0F3"/>
+                </a:solidFill>
+                <a:latin typeface="Arial"/>
+              </a:rPr>
+              <a:t>R / Rₘₐₓ</a:t>
+            </a:r>
+          </a:p>
+        </p:txBody>
+      </p:sp>
+      <p:sp>
+        <p:nvSpPr>
+          <p:cNvPr id="28" name="C1-E33 text 26" descr="sci-ppt:o026"/>
+          <p:cNvSpPr txBox="1"/>
+          <p:nvPr/>
+        </p:nvSpPr>
+        <p:spPr>
+          <a:xfrm>
+            <a:off x="274320" y="1207007"/>
+            <a:ext cx="3291840" cy="231648"/>
+          </a:xfrm>
+          <a:prstGeom prst="rect">
+            <a:avLst/>
+          </a:prstGeom>
+          <a:noFill/>
+          <a:effectLst/>
+        </p:spPr>
+        <p:txBody>
+          <a:bodyPr wrap="none" lIns="18288" rIns="18288" tIns="18288" bIns="18288" anchor="t">
             <a:spAutoFit/>
           </a:bodyPr>
           <a:lstStyle/>
@@ -3221,27 +3859,750 @@
               </a:spcAft>
             </a:pPr>
             <a:r>
-              <a:rPr sz="2016" b="0" i="0">
+              <a:rPr sz="1200" b="0" i="0">
                 <a:solidFill>
                   <a:srgbClr val="E7F0F3"/>
                 </a:solidFill>
                 <a:latin typeface="Arial"/>
               </a:rPr>
-              <a:t>R(t)</a:t>
-            </a:r>
-          </a:p>
-        </p:txBody>
-      </p:sp>
-      <p:sp>
-        <p:nvSpPr>
-          <p:cNvPr id="6" name="text5" descr="sci-ppt:C1-E33-005"/>
+              <a:t>|Ṙ| (m/s)</a:t>
+            </a:r>
+          </a:p>
+        </p:txBody>
+      </p:sp>
+      <p:sp>
+        <p:nvSpPr>
+          <p:cNvPr id="29" name="C1-E33 polygon 27" descr="sci-ppt:o027"/>
+          <p:cNvSpPr/>
+          <p:nvPr/>
+        </p:nvSpPr>
+        <p:spPr>
+          <a:xfrm>
+            <a:off x="825566" y="1693359"/>
+            <a:ext cx="3272705" cy="2633129"/>
+          </a:xfrm>
+          <a:custGeom>
+            <a:avLst/>
+            <a:gdLst/>
+            <a:ahLst/>
+            <a:cxnLst/>
+            <a:rect l="l" t="t" r="r" b="b"/>
+            <a:pathLst>
+              <a:path w="3272705" h="2633129">
+                <a:moveTo>
+                  <a:pt x="0" y="0"/>
+                </a:moveTo>
+                <a:lnTo>
+                  <a:pt x="16528" y="9857"/>
+                </a:lnTo>
+                <a:lnTo>
+                  <a:pt x="33057" y="19715"/>
+                </a:lnTo>
+                <a:lnTo>
+                  <a:pt x="49586" y="29572"/>
+                </a:lnTo>
+                <a:lnTo>
+                  <a:pt x="66115" y="39430"/>
+                </a:lnTo>
+                <a:lnTo>
+                  <a:pt x="82644" y="49288"/>
+                </a:lnTo>
+                <a:lnTo>
+                  <a:pt x="99172" y="59146"/>
+                </a:lnTo>
+                <a:lnTo>
+                  <a:pt x="115701" y="69004"/>
+                </a:lnTo>
+                <a:lnTo>
+                  <a:pt x="132230" y="78862"/>
+                </a:lnTo>
+                <a:lnTo>
+                  <a:pt x="148759" y="88720"/>
+                </a:lnTo>
+                <a:lnTo>
+                  <a:pt x="165288" y="98578"/>
+                </a:lnTo>
+                <a:lnTo>
+                  <a:pt x="181817" y="108436"/>
+                </a:lnTo>
+                <a:lnTo>
+                  <a:pt x="198345" y="118294"/>
+                </a:lnTo>
+                <a:lnTo>
+                  <a:pt x="214874" y="128153"/>
+                </a:lnTo>
+                <a:lnTo>
+                  <a:pt x="231403" y="138011"/>
+                </a:lnTo>
+                <a:lnTo>
+                  <a:pt x="247932" y="147870"/>
+                </a:lnTo>
+                <a:lnTo>
+                  <a:pt x="264461" y="157728"/>
+                </a:lnTo>
+                <a:lnTo>
+                  <a:pt x="280989" y="167587"/>
+                </a:lnTo>
+                <a:lnTo>
+                  <a:pt x="297518" y="177446"/>
+                </a:lnTo>
+                <a:lnTo>
+                  <a:pt x="314047" y="187305"/>
+                </a:lnTo>
+                <a:lnTo>
+                  <a:pt x="330576" y="197165"/>
+                </a:lnTo>
+                <a:lnTo>
+                  <a:pt x="347105" y="207024"/>
+                </a:lnTo>
+                <a:lnTo>
+                  <a:pt x="363633" y="216883"/>
+                </a:lnTo>
+                <a:lnTo>
+                  <a:pt x="380162" y="226743"/>
+                </a:lnTo>
+                <a:lnTo>
+                  <a:pt x="396691" y="236603"/>
+                </a:lnTo>
+                <a:lnTo>
+                  <a:pt x="413220" y="246463"/>
+                </a:lnTo>
+                <a:lnTo>
+                  <a:pt x="429749" y="256323"/>
+                </a:lnTo>
+                <a:lnTo>
+                  <a:pt x="446278" y="266183"/>
+                </a:lnTo>
+                <a:lnTo>
+                  <a:pt x="462806" y="276044"/>
+                </a:lnTo>
+                <a:lnTo>
+                  <a:pt x="479335" y="285905"/>
+                </a:lnTo>
+                <a:lnTo>
+                  <a:pt x="495864" y="295765"/>
+                </a:lnTo>
+                <a:lnTo>
+                  <a:pt x="512393" y="305627"/>
+                </a:lnTo>
+                <a:lnTo>
+                  <a:pt x="528922" y="315488"/>
+                </a:lnTo>
+                <a:lnTo>
+                  <a:pt x="545450" y="325350"/>
+                </a:lnTo>
+                <a:lnTo>
+                  <a:pt x="561979" y="335211"/>
+                </a:lnTo>
+                <a:lnTo>
+                  <a:pt x="578508" y="345074"/>
+                </a:lnTo>
+                <a:lnTo>
+                  <a:pt x="595037" y="354936"/>
+                </a:lnTo>
+                <a:lnTo>
+                  <a:pt x="611566" y="364799"/>
+                </a:lnTo>
+                <a:lnTo>
+                  <a:pt x="628094" y="374662"/>
+                </a:lnTo>
+                <a:lnTo>
+                  <a:pt x="644623" y="384525"/>
+                </a:lnTo>
+                <a:lnTo>
+                  <a:pt x="661152" y="394388"/>
+                </a:lnTo>
+                <a:lnTo>
+                  <a:pt x="677681" y="404252"/>
+                </a:lnTo>
+                <a:lnTo>
+                  <a:pt x="694210" y="414117"/>
+                </a:lnTo>
+                <a:lnTo>
+                  <a:pt x="710739" y="423981"/>
+                </a:lnTo>
+                <a:lnTo>
+                  <a:pt x="727267" y="433846"/>
+                </a:lnTo>
+                <a:lnTo>
+                  <a:pt x="743796" y="443712"/>
+                </a:lnTo>
+                <a:lnTo>
+                  <a:pt x="760325" y="453578"/>
+                </a:lnTo>
+                <a:lnTo>
+                  <a:pt x="776854" y="463444"/>
+                </a:lnTo>
+                <a:lnTo>
+                  <a:pt x="793383" y="473311"/>
+                </a:lnTo>
+                <a:lnTo>
+                  <a:pt x="809911" y="483178"/>
+                </a:lnTo>
+                <a:lnTo>
+                  <a:pt x="826440" y="493046"/>
+                </a:lnTo>
+                <a:lnTo>
+                  <a:pt x="842969" y="502914"/>
+                </a:lnTo>
+                <a:lnTo>
+                  <a:pt x="859498" y="512783"/>
+                </a:lnTo>
+                <a:lnTo>
+                  <a:pt x="876027" y="522653"/>
+                </a:lnTo>
+                <a:lnTo>
+                  <a:pt x="892556" y="532523"/>
+                </a:lnTo>
+                <a:lnTo>
+                  <a:pt x="909084" y="542394"/>
+                </a:lnTo>
+                <a:lnTo>
+                  <a:pt x="925613" y="552265"/>
+                </a:lnTo>
+                <a:lnTo>
+                  <a:pt x="942142" y="562137"/>
+                </a:lnTo>
+                <a:lnTo>
+                  <a:pt x="958671" y="572010"/>
+                </a:lnTo>
+                <a:lnTo>
+                  <a:pt x="975200" y="581884"/>
+                </a:lnTo>
+                <a:lnTo>
+                  <a:pt x="991728" y="591758"/>
+                </a:lnTo>
+                <a:lnTo>
+                  <a:pt x="1008257" y="601634"/>
+                </a:lnTo>
+                <a:lnTo>
+                  <a:pt x="1024786" y="611510"/>
+                </a:lnTo>
+                <a:lnTo>
+                  <a:pt x="1041315" y="621387"/>
+                </a:lnTo>
+                <a:lnTo>
+                  <a:pt x="1057844" y="631265"/>
+                </a:lnTo>
+                <a:lnTo>
+                  <a:pt x="1074372" y="641144"/>
+                </a:lnTo>
+                <a:lnTo>
+                  <a:pt x="1090901" y="651024"/>
+                </a:lnTo>
+                <a:lnTo>
+                  <a:pt x="1107430" y="660905"/>
+                </a:lnTo>
+                <a:lnTo>
+                  <a:pt x="1123959" y="670788"/>
+                </a:lnTo>
+                <a:lnTo>
+                  <a:pt x="1140488" y="680671"/>
+                </a:lnTo>
+                <a:lnTo>
+                  <a:pt x="1157017" y="690556"/>
+                </a:lnTo>
+                <a:lnTo>
+                  <a:pt x="1173545" y="700442"/>
+                </a:lnTo>
+                <a:lnTo>
+                  <a:pt x="1190074" y="710330"/>
+                </a:lnTo>
+                <a:lnTo>
+                  <a:pt x="1206603" y="720219"/>
+                </a:lnTo>
+                <a:lnTo>
+                  <a:pt x="1223132" y="730109"/>
+                </a:lnTo>
+                <a:lnTo>
+                  <a:pt x="1239661" y="740002"/>
+                </a:lnTo>
+                <a:lnTo>
+                  <a:pt x="1256189" y="749895"/>
+                </a:lnTo>
+                <a:lnTo>
+                  <a:pt x="1272718" y="759791"/>
+                </a:lnTo>
+                <a:lnTo>
+                  <a:pt x="1289247" y="769688"/>
+                </a:lnTo>
+                <a:lnTo>
+                  <a:pt x="1305776" y="779588"/>
+                </a:lnTo>
+                <a:lnTo>
+                  <a:pt x="1322305" y="789489"/>
+                </a:lnTo>
+                <a:lnTo>
+                  <a:pt x="1338833" y="799392"/>
+                </a:lnTo>
+                <a:lnTo>
+                  <a:pt x="1355362" y="809298"/>
+                </a:lnTo>
+                <a:lnTo>
+                  <a:pt x="1371891" y="819206"/>
+                </a:lnTo>
+                <a:lnTo>
+                  <a:pt x="1388420" y="829116"/>
+                </a:lnTo>
+                <a:lnTo>
+                  <a:pt x="1404949" y="839029"/>
+                </a:lnTo>
+                <a:lnTo>
+                  <a:pt x="1421478" y="848944"/>
+                </a:lnTo>
+                <a:lnTo>
+                  <a:pt x="1438006" y="858862"/>
+                </a:lnTo>
+                <a:lnTo>
+                  <a:pt x="1454535" y="868783"/>
+                </a:lnTo>
+                <a:lnTo>
+                  <a:pt x="1471064" y="878707"/>
+                </a:lnTo>
+                <a:lnTo>
+                  <a:pt x="1487593" y="888634"/>
+                </a:lnTo>
+                <a:lnTo>
+                  <a:pt x="1504122" y="898565"/>
+                </a:lnTo>
+                <a:lnTo>
+                  <a:pt x="1520650" y="908499"/>
+                </a:lnTo>
+                <a:lnTo>
+                  <a:pt x="1537179" y="918436"/>
+                </a:lnTo>
+                <a:lnTo>
+                  <a:pt x="1553708" y="928378"/>
+                </a:lnTo>
+                <a:lnTo>
+                  <a:pt x="1570237" y="938323"/>
+                </a:lnTo>
+                <a:lnTo>
+                  <a:pt x="1586766" y="948272"/>
+                </a:lnTo>
+                <a:lnTo>
+                  <a:pt x="1603295" y="958226"/>
+                </a:lnTo>
+                <a:lnTo>
+                  <a:pt x="1619823" y="968184"/>
+                </a:lnTo>
+                <a:lnTo>
+                  <a:pt x="1636352" y="978147"/>
+                </a:lnTo>
+                <a:lnTo>
+                  <a:pt x="1652881" y="988116"/>
+                </a:lnTo>
+                <a:lnTo>
+                  <a:pt x="1669410" y="998089"/>
+                </a:lnTo>
+                <a:lnTo>
+                  <a:pt x="1685939" y="1008068"/>
+                </a:lnTo>
+                <a:lnTo>
+                  <a:pt x="1702467" y="1018052"/>
+                </a:lnTo>
+                <a:lnTo>
+                  <a:pt x="1718996" y="1028043"/>
+                </a:lnTo>
+                <a:lnTo>
+                  <a:pt x="1735525" y="1038039"/>
+                </a:lnTo>
+                <a:lnTo>
+                  <a:pt x="1752054" y="1048043"/>
+                </a:lnTo>
+                <a:lnTo>
+                  <a:pt x="1768583" y="1058053"/>
+                </a:lnTo>
+                <a:lnTo>
+                  <a:pt x="1785111" y="1068071"/>
+                </a:lnTo>
+                <a:lnTo>
+                  <a:pt x="1801640" y="1078096"/>
+                </a:lnTo>
+                <a:lnTo>
+                  <a:pt x="1818169" y="1088129"/>
+                </a:lnTo>
+                <a:lnTo>
+                  <a:pt x="1834698" y="1098170"/>
+                </a:lnTo>
+                <a:lnTo>
+                  <a:pt x="1851227" y="1108220"/>
+                </a:lnTo>
+                <a:lnTo>
+                  <a:pt x="1867756" y="1118279"/>
+                </a:lnTo>
+                <a:lnTo>
+                  <a:pt x="1884284" y="1128348"/>
+                </a:lnTo>
+                <a:lnTo>
+                  <a:pt x="1900813" y="1138427"/>
+                </a:lnTo>
+                <a:lnTo>
+                  <a:pt x="1917342" y="1148516"/>
+                </a:lnTo>
+                <a:lnTo>
+                  <a:pt x="1933871" y="1158616"/>
+                </a:lnTo>
+                <a:lnTo>
+                  <a:pt x="1950400" y="1168728"/>
+                </a:lnTo>
+                <a:lnTo>
+                  <a:pt x="1966928" y="1178852"/>
+                </a:lnTo>
+                <a:lnTo>
+                  <a:pt x="1983457" y="1188989"/>
+                </a:lnTo>
+                <a:lnTo>
+                  <a:pt x="1999986" y="1199139"/>
+                </a:lnTo>
+                <a:lnTo>
+                  <a:pt x="2016515" y="1209303"/>
+                </a:lnTo>
+                <a:lnTo>
+                  <a:pt x="2033044" y="1219481"/>
+                </a:lnTo>
+                <a:lnTo>
+                  <a:pt x="2049572" y="1229676"/>
+                </a:lnTo>
+                <a:lnTo>
+                  <a:pt x="2066101" y="1239886"/>
+                </a:lnTo>
+                <a:lnTo>
+                  <a:pt x="2082630" y="1250113"/>
+                </a:lnTo>
+                <a:lnTo>
+                  <a:pt x="2099159" y="1260358"/>
+                </a:lnTo>
+                <a:lnTo>
+                  <a:pt x="2115688" y="1270622"/>
+                </a:lnTo>
+                <a:lnTo>
+                  <a:pt x="2132217" y="1280905"/>
+                </a:lnTo>
+                <a:lnTo>
+                  <a:pt x="2148745" y="1291209"/>
+                </a:lnTo>
+                <a:lnTo>
+                  <a:pt x="2165274" y="1301534"/>
+                </a:lnTo>
+                <a:lnTo>
+                  <a:pt x="2181803" y="1311883"/>
+                </a:lnTo>
+                <a:lnTo>
+                  <a:pt x="2198332" y="1322255"/>
+                </a:lnTo>
+                <a:lnTo>
+                  <a:pt x="2214861" y="1332652"/>
+                </a:lnTo>
+                <a:lnTo>
+                  <a:pt x="2231389" y="1343076"/>
+                </a:lnTo>
+                <a:lnTo>
+                  <a:pt x="2247918" y="1353528"/>
+                </a:lnTo>
+                <a:lnTo>
+                  <a:pt x="2264447" y="1364008"/>
+                </a:lnTo>
+                <a:lnTo>
+                  <a:pt x="2280976" y="1374520"/>
+                </a:lnTo>
+                <a:lnTo>
+                  <a:pt x="2297505" y="1385064"/>
+                </a:lnTo>
+                <a:lnTo>
+                  <a:pt x="2314033" y="1395642"/>
+                </a:lnTo>
+                <a:lnTo>
+                  <a:pt x="2330562" y="1406256"/>
+                </a:lnTo>
+                <a:lnTo>
+                  <a:pt x="2347091" y="1416907"/>
+                </a:lnTo>
+                <a:lnTo>
+                  <a:pt x="2363620" y="1427599"/>
+                </a:lnTo>
+                <a:lnTo>
+                  <a:pt x="2380149" y="1438332"/>
+                </a:lnTo>
+                <a:lnTo>
+                  <a:pt x="2396678" y="1449110"/>
+                </a:lnTo>
+                <a:lnTo>
+                  <a:pt x="2413206" y="1459934"/>
+                </a:lnTo>
+                <a:lnTo>
+                  <a:pt x="2429735" y="1470808"/>
+                </a:lnTo>
+                <a:lnTo>
+                  <a:pt x="2446264" y="1481733"/>
+                </a:lnTo>
+                <a:lnTo>
+                  <a:pt x="2462793" y="1492714"/>
+                </a:lnTo>
+                <a:lnTo>
+                  <a:pt x="2479322" y="1503753"/>
+                </a:lnTo>
+                <a:lnTo>
+                  <a:pt x="2495850" y="1514854"/>
+                </a:lnTo>
+                <a:lnTo>
+                  <a:pt x="2512379" y="1526019"/>
+                </a:lnTo>
+                <a:lnTo>
+                  <a:pt x="2528908" y="1537253"/>
+                </a:lnTo>
+                <a:lnTo>
+                  <a:pt x="2545437" y="1548561"/>
+                </a:lnTo>
+                <a:lnTo>
+                  <a:pt x="2561966" y="1559945"/>
+                </a:lnTo>
+                <a:lnTo>
+                  <a:pt x="2578495" y="1571412"/>
+                </a:lnTo>
+                <a:lnTo>
+                  <a:pt x="2595023" y="1582966"/>
+                </a:lnTo>
+                <a:lnTo>
+                  <a:pt x="2611552" y="1594613"/>
+                </a:lnTo>
+                <a:lnTo>
+                  <a:pt x="2628081" y="1606358"/>
+                </a:lnTo>
+                <a:lnTo>
+                  <a:pt x="2644610" y="1618208"/>
+                </a:lnTo>
+                <a:lnTo>
+                  <a:pt x="2661139" y="1630169"/>
+                </a:lnTo>
+                <a:lnTo>
+                  <a:pt x="2677667" y="1642250"/>
+                </a:lnTo>
+                <a:lnTo>
+                  <a:pt x="2694196" y="1654458"/>
+                </a:lnTo>
+                <a:lnTo>
+                  <a:pt x="2710725" y="1666801"/>
+                </a:lnTo>
+                <a:lnTo>
+                  <a:pt x="2727254" y="1679291"/>
+                </a:lnTo>
+                <a:lnTo>
+                  <a:pt x="2743783" y="1691936"/>
+                </a:lnTo>
+                <a:lnTo>
+                  <a:pt x="2760311" y="1704749"/>
+                </a:lnTo>
+                <a:lnTo>
+                  <a:pt x="2776840" y="1717741"/>
+                </a:lnTo>
+                <a:lnTo>
+                  <a:pt x="2793369" y="1730927"/>
+                </a:lnTo>
+                <a:lnTo>
+                  <a:pt x="2809898" y="1744322"/>
+                </a:lnTo>
+                <a:lnTo>
+                  <a:pt x="2826427" y="1757943"/>
+                </a:lnTo>
+                <a:lnTo>
+                  <a:pt x="2842956" y="1771809"/>
+                </a:lnTo>
+                <a:lnTo>
+                  <a:pt x="2859484" y="1785939"/>
+                </a:lnTo>
+                <a:lnTo>
+                  <a:pt x="2876013" y="1800359"/>
+                </a:lnTo>
+                <a:lnTo>
+                  <a:pt x="2892542" y="1815093"/>
+                </a:lnTo>
+                <a:lnTo>
+                  <a:pt x="2909071" y="1830172"/>
+                </a:lnTo>
+                <a:lnTo>
+                  <a:pt x="2925600" y="1845629"/>
+                </a:lnTo>
+                <a:lnTo>
+                  <a:pt x="2942128" y="1861503"/>
+                </a:lnTo>
+                <a:lnTo>
+                  <a:pt x="2958657" y="1877836"/>
+                </a:lnTo>
+                <a:lnTo>
+                  <a:pt x="2975186" y="1894681"/>
+                </a:lnTo>
+                <a:lnTo>
+                  <a:pt x="2991715" y="1912096"/>
+                </a:lnTo>
+                <a:lnTo>
+                  <a:pt x="3008244" y="1930151"/>
+                </a:lnTo>
+                <a:lnTo>
+                  <a:pt x="3024772" y="1948926"/>
+                </a:lnTo>
+                <a:lnTo>
+                  <a:pt x="3041301" y="1968520"/>
+                </a:lnTo>
+                <a:lnTo>
+                  <a:pt x="3057830" y="1989051"/>
+                </a:lnTo>
+                <a:lnTo>
+                  <a:pt x="3074359" y="2010663"/>
+                </a:lnTo>
+                <a:lnTo>
+                  <a:pt x="3090888" y="2033534"/>
+                </a:lnTo>
+                <a:lnTo>
+                  <a:pt x="3107417" y="2057892"/>
+                </a:lnTo>
+                <a:lnTo>
+                  <a:pt x="3123945" y="2084025"/>
+                </a:lnTo>
+                <a:lnTo>
+                  <a:pt x="3140474" y="2112316"/>
+                </a:lnTo>
+                <a:lnTo>
+                  <a:pt x="3157003" y="2143284"/>
+                </a:lnTo>
+                <a:lnTo>
+                  <a:pt x="3173532" y="2177655"/>
+                </a:lnTo>
+                <a:lnTo>
+                  <a:pt x="3190061" y="2216493"/>
+                </a:lnTo>
+                <a:lnTo>
+                  <a:pt x="3206589" y="2261446"/>
+                </a:lnTo>
+                <a:lnTo>
+                  <a:pt x="3223118" y="2315279"/>
+                </a:lnTo>
+                <a:lnTo>
+                  <a:pt x="3239647" y="2383171"/>
+                </a:lnTo>
+                <a:lnTo>
+                  <a:pt x="3256176" y="2476751"/>
+                </a:lnTo>
+                <a:lnTo>
+                  <a:pt x="3272705" y="2633129"/>
+                </a:lnTo>
+              </a:path>
+            </a:pathLst>
+          </a:custGeom>
+          <a:noFill/>
+          <a:ln w="38100">
+            <a:solidFill>
+              <a:srgbClr val="8EDBD4"/>
+            </a:solidFill>
+          </a:ln>
+          <a:effectLst/>
+        </p:spPr>
+        <p:txBody>
+          <a:bodyPr rtlCol="0" anchor="ctr"/>
+          <a:lstStyle/>
+          <a:p>
+            <a:pPr algn="ctr"/>
+          </a:p>
+        </p:txBody>
+      </p:sp>
+      <p:cxnSp>
+        <p:nvCxnSpPr>
+          <p:cNvPr id="30" name="C1-E33 line 28" descr="sci-ppt:o028"/>
+          <p:cNvCxnSpPr/>
+          <p:nvPr/>
+        </p:nvCxnSpPr>
+        <p:spPr>
+          <a:xfrm>
+            <a:off x="4937760" y="4572000"/>
+            <a:ext cx="3291840" cy="0"/>
+          </a:xfrm>
+          <a:prstGeom prst="line">
+            <a:avLst/>
+          </a:prstGeom>
+          <a:ln w="19050">
+            <a:solidFill>
+              <a:srgbClr val="B4C7D2"/>
+            </a:solidFill>
+          </a:ln>
+          <a:effectLst/>
+        </p:spPr>
+      </p:cxnSp>
+      <p:cxnSp>
+        <p:nvCxnSpPr>
+          <p:cNvPr id="31" name="C1-E33 line 29" descr="sci-ppt:o029"/>
+          <p:cNvCxnSpPr/>
+          <p:nvPr/>
+        </p:nvCxnSpPr>
+        <p:spPr>
+          <a:xfrm>
+            <a:off x="4937760" y="1554480"/>
+            <a:ext cx="0" cy="3017520"/>
+          </a:xfrm>
+          <a:prstGeom prst="line">
+            <a:avLst/>
+          </a:prstGeom>
+          <a:ln w="19050">
+            <a:solidFill>
+              <a:srgbClr val="B4C7D2"/>
+            </a:solidFill>
+          </a:ln>
+          <a:effectLst/>
+        </p:spPr>
+      </p:cxnSp>
+      <p:cxnSp>
+        <p:nvCxnSpPr>
+          <p:cNvPr id="32" name="C1-E33 line 30" descr="sci-ppt:o030"/>
+          <p:cNvCxnSpPr/>
+          <p:nvPr/>
+        </p:nvCxnSpPr>
+        <p:spPr>
+          <a:xfrm>
+            <a:off x="4937760" y="4572000"/>
+            <a:ext cx="0" cy="64008"/>
+          </a:xfrm>
+          <a:prstGeom prst="line">
+            <a:avLst/>
+          </a:prstGeom>
+          <a:ln w="12700">
+            <a:solidFill>
+              <a:srgbClr val="B4C7D2"/>
+            </a:solidFill>
+          </a:ln>
+          <a:effectLst/>
+        </p:spPr>
+      </p:cxnSp>
+      <p:cxnSp>
+        <p:nvCxnSpPr>
+          <p:cNvPr id="33" name="C1-E33 line 31" descr="sci-ppt:o031"/>
+          <p:cNvCxnSpPr/>
+          <p:nvPr/>
+        </p:nvCxnSpPr>
+        <p:spPr>
+          <a:xfrm>
+            <a:off x="4937760" y="1554480"/>
+            <a:ext cx="0" cy="3017520"/>
+          </a:xfrm>
+          <a:prstGeom prst="line">
+            <a:avLst/>
+          </a:prstGeom>
+          <a:ln w="7620">
+            <a:solidFill>
+              <a:srgbClr val="2E4756"/>
+            </a:solidFill>
+          </a:ln>
+          <a:effectLst/>
+        </p:spPr>
+      </p:cxnSp>
+      <p:sp>
+        <p:nvSpPr>
+          <p:cNvPr id="34" name="C1-E33 text 32" descr="sci-ppt:o032"/>
           <p:cNvSpPr txBox="1"/>
           <p:nvPr/>
         </p:nvSpPr>
         <p:spPr>
           <a:xfrm>
-            <a:off x="2682240" y="2804160"/>
-            <a:ext cx="2194560" cy="377952"/>
+            <a:off x="4480560" y="4654296"/>
+            <a:ext cx="914400" cy="208407"/>
           </a:xfrm>
           <a:prstGeom prst="rect">
             <a:avLst/>
@@ -3250,7 +4611,613 @@
           <a:effectLst/>
         </p:spPr>
         <p:txBody>
-          <a:bodyPr wrap="none" lIns="27432" rIns="27432" tIns="18288" bIns="18288" anchor="ctr">
+          <a:bodyPr wrap="none" lIns="18288" rIns="18288" tIns="18288" bIns="18288" anchor="t">
+            <a:spAutoFit/>
+          </a:bodyPr>
+          <a:lstStyle/>
+          <a:p>
+            <a:pPr algn="ctr">
+              <a:spcAft>
+                <a:spcPts val="0"/>
+              </a:spcAft>
+            </a:pPr>
+            <a:r>
+              <a:rPr sz="1050" b="0" i="0">
+                <a:solidFill>
+                  <a:srgbClr val="B4C7D2"/>
+                </a:solidFill>
+                <a:latin typeface="Arial"/>
+              </a:rPr>
+              <a:t>0</a:t>
+            </a:r>
+          </a:p>
+        </p:txBody>
+      </p:sp>
+      <p:cxnSp>
+        <p:nvCxnSpPr>
+          <p:cNvPr id="35" name="C1-E33 line 33" descr="sci-ppt:o033"/>
+          <p:cNvCxnSpPr/>
+          <p:nvPr/>
+        </p:nvCxnSpPr>
+        <p:spPr>
+          <a:xfrm>
+            <a:off x="6035040" y="4572000"/>
+            <a:ext cx="0" cy="64008"/>
+          </a:xfrm>
+          <a:prstGeom prst="line">
+            <a:avLst/>
+          </a:prstGeom>
+          <a:ln w="12700">
+            <a:solidFill>
+              <a:srgbClr val="B4C7D2"/>
+            </a:solidFill>
+          </a:ln>
+          <a:effectLst/>
+        </p:spPr>
+      </p:cxnSp>
+      <p:cxnSp>
+        <p:nvCxnSpPr>
+          <p:cNvPr id="36" name="C1-E33 line 34" descr="sci-ppt:o034"/>
+          <p:cNvCxnSpPr/>
+          <p:nvPr/>
+        </p:nvCxnSpPr>
+        <p:spPr>
+          <a:xfrm>
+            <a:off x="6035040" y="1554480"/>
+            <a:ext cx="0" cy="3017520"/>
+          </a:xfrm>
+          <a:prstGeom prst="line">
+            <a:avLst/>
+          </a:prstGeom>
+          <a:ln w="7620">
+            <a:solidFill>
+              <a:srgbClr val="2E4756"/>
+            </a:solidFill>
+          </a:ln>
+          <a:effectLst/>
+        </p:spPr>
+      </p:cxnSp>
+      <p:sp>
+        <p:nvSpPr>
+          <p:cNvPr id="37" name="C1-E33 text 35" descr="sci-ppt:o035"/>
+          <p:cNvSpPr txBox="1"/>
+          <p:nvPr/>
+        </p:nvSpPr>
+        <p:spPr>
+          <a:xfrm>
+            <a:off x="5577840" y="4654296"/>
+            <a:ext cx="914400" cy="208407"/>
+          </a:xfrm>
+          <a:prstGeom prst="rect">
+            <a:avLst/>
+          </a:prstGeom>
+          <a:noFill/>
+          <a:effectLst/>
+        </p:spPr>
+        <p:txBody>
+          <a:bodyPr wrap="none" lIns="18288" rIns="18288" tIns="18288" bIns="18288" anchor="t">
+            <a:spAutoFit/>
+          </a:bodyPr>
+          <a:lstStyle/>
+          <a:p>
+            <a:pPr algn="ctr">
+              <a:spcAft>
+                <a:spcPts val="0"/>
+              </a:spcAft>
+            </a:pPr>
+            <a:r>
+              <a:rPr sz="1050" b="0" i="0">
+                <a:solidFill>
+                  <a:srgbClr val="B4C7D2"/>
+                </a:solidFill>
+                <a:latin typeface="Arial"/>
+              </a:rPr>
+              <a:t>1</a:t>
+            </a:r>
+          </a:p>
+        </p:txBody>
+      </p:sp>
+      <p:cxnSp>
+        <p:nvCxnSpPr>
+          <p:cNvPr id="38" name="C1-E33 line 36" descr="sci-ppt:o036"/>
+          <p:cNvCxnSpPr/>
+          <p:nvPr/>
+        </p:nvCxnSpPr>
+        <p:spPr>
+          <a:xfrm>
+            <a:off x="7132320" y="4572000"/>
+            <a:ext cx="0" cy="64008"/>
+          </a:xfrm>
+          <a:prstGeom prst="line">
+            <a:avLst/>
+          </a:prstGeom>
+          <a:ln w="12700">
+            <a:solidFill>
+              <a:srgbClr val="B4C7D2"/>
+            </a:solidFill>
+          </a:ln>
+          <a:effectLst/>
+        </p:spPr>
+      </p:cxnSp>
+      <p:cxnSp>
+        <p:nvCxnSpPr>
+          <p:cNvPr id="39" name="C1-E33 line 37" descr="sci-ppt:o037"/>
+          <p:cNvCxnSpPr/>
+          <p:nvPr/>
+        </p:nvCxnSpPr>
+        <p:spPr>
+          <a:xfrm>
+            <a:off x="7132320" y="1554480"/>
+            <a:ext cx="0" cy="3017520"/>
+          </a:xfrm>
+          <a:prstGeom prst="line">
+            <a:avLst/>
+          </a:prstGeom>
+          <a:ln w="7620">
+            <a:solidFill>
+              <a:srgbClr val="2E4756"/>
+            </a:solidFill>
+          </a:ln>
+          <a:effectLst/>
+        </p:spPr>
+      </p:cxnSp>
+      <p:sp>
+        <p:nvSpPr>
+          <p:cNvPr id="40" name="C1-E33 text 38" descr="sci-ppt:o038"/>
+          <p:cNvSpPr txBox="1"/>
+          <p:nvPr/>
+        </p:nvSpPr>
+        <p:spPr>
+          <a:xfrm>
+            <a:off x="6675120" y="4654296"/>
+            <a:ext cx="914400" cy="208407"/>
+          </a:xfrm>
+          <a:prstGeom prst="rect">
+            <a:avLst/>
+          </a:prstGeom>
+          <a:noFill/>
+          <a:effectLst/>
+        </p:spPr>
+        <p:txBody>
+          <a:bodyPr wrap="none" lIns="18288" rIns="18288" tIns="18288" bIns="18288" anchor="t">
+            <a:spAutoFit/>
+          </a:bodyPr>
+          <a:lstStyle/>
+          <a:p>
+            <a:pPr algn="ctr">
+              <a:spcAft>
+                <a:spcPts val="0"/>
+              </a:spcAft>
+            </a:pPr>
+            <a:r>
+              <a:rPr sz="1050" b="0" i="0">
+                <a:solidFill>
+                  <a:srgbClr val="B4C7D2"/>
+                </a:solidFill>
+                <a:latin typeface="Arial"/>
+              </a:rPr>
+              <a:t>2</a:t>
+            </a:r>
+          </a:p>
+        </p:txBody>
+      </p:sp>
+      <p:cxnSp>
+        <p:nvCxnSpPr>
+          <p:cNvPr id="41" name="C1-E33 line 39" descr="sci-ppt:o039"/>
+          <p:cNvCxnSpPr/>
+          <p:nvPr/>
+        </p:nvCxnSpPr>
+        <p:spPr>
+          <a:xfrm>
+            <a:off x="8229600" y="4572000"/>
+            <a:ext cx="0" cy="64008"/>
+          </a:xfrm>
+          <a:prstGeom prst="line">
+            <a:avLst/>
+          </a:prstGeom>
+          <a:ln w="12700">
+            <a:solidFill>
+              <a:srgbClr val="B4C7D2"/>
+            </a:solidFill>
+          </a:ln>
+          <a:effectLst/>
+        </p:spPr>
+      </p:cxnSp>
+      <p:cxnSp>
+        <p:nvCxnSpPr>
+          <p:cNvPr id="42" name="C1-E33 line 40" descr="sci-ppt:o040"/>
+          <p:cNvCxnSpPr/>
+          <p:nvPr/>
+        </p:nvCxnSpPr>
+        <p:spPr>
+          <a:xfrm>
+            <a:off x="8229600" y="1554480"/>
+            <a:ext cx="0" cy="3017520"/>
+          </a:xfrm>
+          <a:prstGeom prst="line">
+            <a:avLst/>
+          </a:prstGeom>
+          <a:ln w="7620">
+            <a:solidFill>
+              <a:srgbClr val="2E4756"/>
+            </a:solidFill>
+          </a:ln>
+          <a:effectLst/>
+        </p:spPr>
+      </p:cxnSp>
+      <p:sp>
+        <p:nvSpPr>
+          <p:cNvPr id="43" name="C1-E33 text 41" descr="sci-ppt:o041"/>
+          <p:cNvSpPr txBox="1"/>
+          <p:nvPr/>
+        </p:nvSpPr>
+        <p:spPr>
+          <a:xfrm>
+            <a:off x="7772400" y="4654296"/>
+            <a:ext cx="914400" cy="208407"/>
+          </a:xfrm>
+          <a:prstGeom prst="rect">
+            <a:avLst/>
+          </a:prstGeom>
+          <a:noFill/>
+          <a:effectLst/>
+        </p:spPr>
+        <p:txBody>
+          <a:bodyPr wrap="none" lIns="18288" rIns="18288" tIns="18288" bIns="18288" anchor="t">
+            <a:spAutoFit/>
+          </a:bodyPr>
+          <a:lstStyle/>
+          <a:p>
+            <a:pPr algn="ctr">
+              <a:spcAft>
+                <a:spcPts val="0"/>
+              </a:spcAft>
+            </a:pPr>
+            <a:r>
+              <a:rPr sz="1050" b="0" i="0">
+                <a:solidFill>
+                  <a:srgbClr val="B4C7D2"/>
+                </a:solidFill>
+                <a:latin typeface="Arial"/>
+              </a:rPr>
+              <a:t>3</a:t>
+            </a:r>
+          </a:p>
+        </p:txBody>
+      </p:sp>
+      <p:cxnSp>
+        <p:nvCxnSpPr>
+          <p:cNvPr id="44" name="C1-E33 line 42" descr="sci-ppt:o042"/>
+          <p:cNvCxnSpPr/>
+          <p:nvPr/>
+        </p:nvCxnSpPr>
+        <p:spPr>
+          <a:xfrm>
+            <a:off x="4873752" y="4572000"/>
+            <a:ext cx="64008" cy="0"/>
+          </a:xfrm>
+          <a:prstGeom prst="line">
+            <a:avLst/>
+          </a:prstGeom>
+          <a:ln w="12700">
+            <a:solidFill>
+              <a:srgbClr val="B4C7D2"/>
+            </a:solidFill>
+          </a:ln>
+          <a:effectLst/>
+        </p:spPr>
+      </p:cxnSp>
+      <p:cxnSp>
+        <p:nvCxnSpPr>
+          <p:cNvPr id="45" name="C1-E33 line 43" descr="sci-ppt:o043"/>
+          <p:cNvCxnSpPr/>
+          <p:nvPr/>
+        </p:nvCxnSpPr>
+        <p:spPr>
+          <a:xfrm>
+            <a:off x="4873752" y="3598606"/>
+            <a:ext cx="64008" cy="0"/>
+          </a:xfrm>
+          <a:prstGeom prst="line">
+            <a:avLst/>
+          </a:prstGeom>
+          <a:ln w="12700">
+            <a:solidFill>
+              <a:srgbClr val="B4C7D2"/>
+            </a:solidFill>
+          </a:ln>
+          <a:effectLst/>
+        </p:spPr>
+      </p:cxnSp>
+      <p:cxnSp>
+        <p:nvCxnSpPr>
+          <p:cNvPr id="46" name="C1-E33 line 44" descr="sci-ppt:o044"/>
+          <p:cNvCxnSpPr/>
+          <p:nvPr/>
+        </p:nvCxnSpPr>
+        <p:spPr>
+          <a:xfrm>
+            <a:off x="4937760" y="3598606"/>
+            <a:ext cx="3291840" cy="0"/>
+          </a:xfrm>
+          <a:prstGeom prst="line">
+            <a:avLst/>
+          </a:prstGeom>
+          <a:ln w="7620">
+            <a:solidFill>
+              <a:srgbClr val="2E4756"/>
+            </a:solidFill>
+          </a:ln>
+          <a:effectLst/>
+        </p:spPr>
+      </p:cxnSp>
+      <p:sp>
+        <p:nvSpPr>
+          <p:cNvPr id="47" name="C1-E33 text 45" descr="sci-ppt:o045"/>
+          <p:cNvSpPr txBox="1"/>
+          <p:nvPr/>
+        </p:nvSpPr>
+        <p:spPr>
+          <a:xfrm>
+            <a:off x="4069080" y="3516310"/>
+            <a:ext cx="777240" cy="208407"/>
+          </a:xfrm>
+          <a:prstGeom prst="rect">
+            <a:avLst/>
+          </a:prstGeom>
+          <a:noFill/>
+          <a:effectLst/>
+        </p:spPr>
+        <p:txBody>
+          <a:bodyPr wrap="none" lIns="18288" rIns="18288" tIns="18288" bIns="18288" anchor="t">
+            <a:spAutoFit/>
+          </a:bodyPr>
+          <a:lstStyle/>
+          <a:p>
+            <a:pPr algn="r">
+              <a:spcAft>
+                <a:spcPts val="0"/>
+              </a:spcAft>
+            </a:pPr>
+            <a:r>
+              <a:rPr sz="1050" b="0" i="0">
+                <a:solidFill>
+                  <a:srgbClr val="B4C7D2"/>
+                </a:solidFill>
+                <a:latin typeface="Arial"/>
+              </a:rPr>
+              <a:t>10</a:t>
+            </a:r>
+          </a:p>
+        </p:txBody>
+      </p:sp>
+      <p:cxnSp>
+        <p:nvCxnSpPr>
+          <p:cNvPr id="48" name="C1-E33 line 46" descr="sci-ppt:o046"/>
+          <p:cNvCxnSpPr/>
+          <p:nvPr/>
+        </p:nvCxnSpPr>
+        <p:spPr>
+          <a:xfrm>
+            <a:off x="4873752" y="2625212"/>
+            <a:ext cx="64008" cy="0"/>
+          </a:xfrm>
+          <a:prstGeom prst="line">
+            <a:avLst/>
+          </a:prstGeom>
+          <a:ln w="12700">
+            <a:solidFill>
+              <a:srgbClr val="B4C7D2"/>
+            </a:solidFill>
+          </a:ln>
+          <a:effectLst/>
+        </p:spPr>
+      </p:cxnSp>
+      <p:cxnSp>
+        <p:nvCxnSpPr>
+          <p:cNvPr id="49" name="C1-E33 line 47" descr="sci-ppt:o047"/>
+          <p:cNvCxnSpPr/>
+          <p:nvPr/>
+        </p:nvCxnSpPr>
+        <p:spPr>
+          <a:xfrm>
+            <a:off x="4937760" y="2625212"/>
+            <a:ext cx="3291840" cy="0"/>
+          </a:xfrm>
+          <a:prstGeom prst="line">
+            <a:avLst/>
+          </a:prstGeom>
+          <a:ln w="7620">
+            <a:solidFill>
+              <a:srgbClr val="2E4756"/>
+            </a:solidFill>
+          </a:ln>
+          <a:effectLst/>
+        </p:spPr>
+      </p:cxnSp>
+      <p:sp>
+        <p:nvSpPr>
+          <p:cNvPr id="50" name="C1-E33 text 48" descr="sci-ppt:o048"/>
+          <p:cNvSpPr txBox="1"/>
+          <p:nvPr/>
+        </p:nvSpPr>
+        <p:spPr>
+          <a:xfrm>
+            <a:off x="4069080" y="2542916"/>
+            <a:ext cx="777240" cy="208407"/>
+          </a:xfrm>
+          <a:prstGeom prst="rect">
+            <a:avLst/>
+          </a:prstGeom>
+          <a:noFill/>
+          <a:effectLst/>
+        </p:spPr>
+        <p:txBody>
+          <a:bodyPr wrap="none" lIns="18288" rIns="18288" tIns="18288" bIns="18288" anchor="t">
+            <a:spAutoFit/>
+          </a:bodyPr>
+          <a:lstStyle/>
+          <a:p>
+            <a:pPr algn="r">
+              <a:spcAft>
+                <a:spcPts val="0"/>
+              </a:spcAft>
+            </a:pPr>
+            <a:r>
+              <a:rPr sz="1050" b="0" i="0">
+                <a:solidFill>
+                  <a:srgbClr val="B4C7D2"/>
+                </a:solidFill>
+                <a:latin typeface="Arial"/>
+              </a:rPr>
+              <a:t>20</a:t>
+            </a:r>
+          </a:p>
+        </p:txBody>
+      </p:sp>
+      <p:cxnSp>
+        <p:nvCxnSpPr>
+          <p:cNvPr id="51" name="C1-E33 line 49" descr="sci-ppt:o049"/>
+          <p:cNvCxnSpPr/>
+          <p:nvPr/>
+        </p:nvCxnSpPr>
+        <p:spPr>
+          <a:xfrm>
+            <a:off x="4873752" y="1651819"/>
+            <a:ext cx="64008" cy="0"/>
+          </a:xfrm>
+          <a:prstGeom prst="line">
+            <a:avLst/>
+          </a:prstGeom>
+          <a:ln w="12700">
+            <a:solidFill>
+              <a:srgbClr val="B4C7D2"/>
+            </a:solidFill>
+          </a:ln>
+          <a:effectLst/>
+        </p:spPr>
+      </p:cxnSp>
+      <p:cxnSp>
+        <p:nvCxnSpPr>
+          <p:cNvPr id="52" name="C1-E33 line 50" descr="sci-ppt:o050"/>
+          <p:cNvCxnSpPr/>
+          <p:nvPr/>
+        </p:nvCxnSpPr>
+        <p:spPr>
+          <a:xfrm>
+            <a:off x="4937760" y="1651819"/>
+            <a:ext cx="3291840" cy="0"/>
+          </a:xfrm>
+          <a:prstGeom prst="line">
+            <a:avLst/>
+          </a:prstGeom>
+          <a:ln w="7620">
+            <a:solidFill>
+              <a:srgbClr val="2E4756"/>
+            </a:solidFill>
+          </a:ln>
+          <a:effectLst/>
+        </p:spPr>
+      </p:cxnSp>
+      <p:sp>
+        <p:nvSpPr>
+          <p:cNvPr id="53" name="C1-E33 text 51" descr="sci-ppt:o051"/>
+          <p:cNvSpPr txBox="1"/>
+          <p:nvPr/>
+        </p:nvSpPr>
+        <p:spPr>
+          <a:xfrm>
+            <a:off x="4069080" y="1569523"/>
+            <a:ext cx="777240" cy="208407"/>
+          </a:xfrm>
+          <a:prstGeom prst="rect">
+            <a:avLst/>
+          </a:prstGeom>
+          <a:noFill/>
+          <a:effectLst/>
+        </p:spPr>
+        <p:txBody>
+          <a:bodyPr wrap="none" lIns="18288" rIns="18288" tIns="18288" bIns="18288" anchor="t">
+            <a:spAutoFit/>
+          </a:bodyPr>
+          <a:lstStyle/>
+          <a:p>
+            <a:pPr algn="r">
+              <a:spcAft>
+                <a:spcPts val="0"/>
+              </a:spcAft>
+            </a:pPr>
+            <a:r>
+              <a:rPr sz="1050" b="0" i="0">
+                <a:solidFill>
+                  <a:srgbClr val="B4C7D2"/>
+                </a:solidFill>
+                <a:latin typeface="Arial"/>
+              </a:rPr>
+              <a:t>30</a:t>
+            </a:r>
+          </a:p>
+        </p:txBody>
+      </p:sp>
+      <p:sp>
+        <p:nvSpPr>
+          <p:cNvPr id="54" name="C1-E33 text 52" descr="sci-ppt:o052"/>
+          <p:cNvSpPr txBox="1"/>
+          <p:nvPr/>
+        </p:nvSpPr>
+        <p:spPr>
+          <a:xfrm>
+            <a:off x="4937760" y="4855464"/>
+            <a:ext cx="3291840" cy="231648"/>
+          </a:xfrm>
+          <a:prstGeom prst="rect">
+            <a:avLst/>
+          </a:prstGeom>
+          <a:noFill/>
+          <a:effectLst/>
+        </p:spPr>
+        <p:txBody>
+          <a:bodyPr wrap="none" lIns="18288" rIns="18288" tIns="18288" bIns="18288" anchor="t">
+            <a:spAutoFit/>
+          </a:bodyPr>
+          <a:lstStyle/>
+          <a:p>
+            <a:pPr algn="ctr">
+              <a:spcAft>
+                <a:spcPts val="0"/>
+              </a:spcAft>
+            </a:pPr>
+            <a:r>
+              <a:rPr sz="1200" b="0" i="0">
+                <a:solidFill>
+                  <a:srgbClr val="E7F0F3"/>
+                </a:solidFill>
+                <a:latin typeface="Arial"/>
+              </a:rPr>
+              <a:t>t (µs)</a:t>
+            </a:r>
+          </a:p>
+        </p:txBody>
+      </p:sp>
+      <p:sp>
+        <p:nvSpPr>
+          <p:cNvPr id="55" name="C1-E33 text 53" descr="sci-ppt:o053"/>
+          <p:cNvSpPr txBox="1"/>
+          <p:nvPr/>
+        </p:nvSpPr>
+        <p:spPr>
+          <a:xfrm>
+            <a:off x="4389120" y="1207007"/>
+            <a:ext cx="3291840" cy="231648"/>
+          </a:xfrm>
+          <a:prstGeom prst="rect">
+            <a:avLst/>
+          </a:prstGeom>
+          <a:noFill/>
+          <a:effectLst/>
+        </p:spPr>
+        <p:txBody>
+          <a:bodyPr wrap="none" lIns="18288" rIns="18288" tIns="18288" bIns="18288" anchor="t">
             <a:spAutoFit/>
           </a:bodyPr>
           <a:lstStyle/>
@@ -3261,27 +5228,629 @@
               </a:spcAft>
             </a:pPr>
             <a:r>
-              <a:rPr sz="1920" b="0" i="0">
+              <a:rPr sz="1200" b="0" i="0">
                 <a:solidFill>
                   <a:srgbClr val="E7F0F3"/>
                 </a:solidFill>
                 <a:latin typeface="Arial"/>
               </a:rPr>
-              <a:t>p_b</a:t>
-            </a:r>
-          </a:p>
-        </p:txBody>
-      </p:sp>
-      <p:sp>
-        <p:nvSpPr>
-          <p:cNvPr id="7" name="text6" descr="sci-ppt:C1-E33-006"/>
+              <a:t>R (µm)</a:t>
+            </a:r>
+          </a:p>
+        </p:txBody>
+      </p:sp>
+      <p:sp>
+        <p:nvSpPr>
+          <p:cNvPr id="56" name="C1-E33 polygon 54" descr="sci-ppt:o054"/>
+          <p:cNvSpPr/>
+          <p:nvPr/>
+        </p:nvSpPr>
+        <p:spPr>
+          <a:xfrm>
+            <a:off x="4937760" y="1651819"/>
+            <a:ext cx="3010984" cy="2919596"/>
+          </a:xfrm>
+          <a:custGeom>
+            <a:avLst/>
+            <a:gdLst/>
+            <a:ahLst/>
+            <a:cxnLst/>
+            <a:rect l="l" t="t" r="r" b="b"/>
+            <a:pathLst>
+              <a:path w="3010984" h="2919596">
+                <a:moveTo>
+                  <a:pt x="0" y="0"/>
+                </a:moveTo>
+                <a:lnTo>
+                  <a:pt x="31083" y="130"/>
+                </a:lnTo>
+                <a:lnTo>
+                  <a:pt x="62165" y="521"/>
+                </a:lnTo>
+                <a:lnTo>
+                  <a:pt x="93240" y="1172"/>
+                </a:lnTo>
+                <a:lnTo>
+                  <a:pt x="124308" y="2083"/>
+                </a:lnTo>
+                <a:lnTo>
+                  <a:pt x="155364" y="3255"/>
+                </a:lnTo>
+                <a:lnTo>
+                  <a:pt x="186406" y="4687"/>
+                </a:lnTo>
+                <a:lnTo>
+                  <a:pt x="217432" y="6379"/>
+                </a:lnTo>
+                <a:lnTo>
+                  <a:pt x="248439" y="8332"/>
+                </a:lnTo>
+                <a:lnTo>
+                  <a:pt x="279423" y="10546"/>
+                </a:lnTo>
+                <a:lnTo>
+                  <a:pt x="310382" y="13019"/>
+                </a:lnTo>
+                <a:lnTo>
+                  <a:pt x="341313" y="15753"/>
+                </a:lnTo>
+                <a:lnTo>
+                  <a:pt x="372214" y="18748"/>
+                </a:lnTo>
+                <a:lnTo>
+                  <a:pt x="403082" y="22003"/>
+                </a:lnTo>
+                <a:lnTo>
+                  <a:pt x="433913" y="25518"/>
+                </a:lnTo>
+                <a:lnTo>
+                  <a:pt x="464706" y="29293"/>
+                </a:lnTo>
+                <a:lnTo>
+                  <a:pt x="495456" y="33329"/>
+                </a:lnTo>
+                <a:lnTo>
+                  <a:pt x="526163" y="37626"/>
+                </a:lnTo>
+                <a:lnTo>
+                  <a:pt x="556822" y="42183"/>
+                </a:lnTo>
+                <a:lnTo>
+                  <a:pt x="587430" y="47000"/>
+                </a:lnTo>
+                <a:lnTo>
+                  <a:pt x="617986" y="52077"/>
+                </a:lnTo>
+                <a:lnTo>
+                  <a:pt x="648486" y="57415"/>
+                </a:lnTo>
+                <a:lnTo>
+                  <a:pt x="678928" y="63013"/>
+                </a:lnTo>
+                <a:lnTo>
+                  <a:pt x="709308" y="68872"/>
+                </a:lnTo>
+                <a:lnTo>
+                  <a:pt x="739624" y="74991"/>
+                </a:lnTo>
+                <a:lnTo>
+                  <a:pt x="769873" y="81371"/>
+                </a:lnTo>
+                <a:lnTo>
+                  <a:pt x="800051" y="88011"/>
+                </a:lnTo>
+                <a:lnTo>
+                  <a:pt x="830158" y="94911"/>
+                </a:lnTo>
+                <a:lnTo>
+                  <a:pt x="860188" y="102072"/>
+                </a:lnTo>
+                <a:lnTo>
+                  <a:pt x="890140" y="109493"/>
+                </a:lnTo>
+                <a:lnTo>
+                  <a:pt x="920010" y="117174"/>
+                </a:lnTo>
+                <a:lnTo>
+                  <a:pt x="949796" y="125116"/>
+                </a:lnTo>
+                <a:lnTo>
+                  <a:pt x="979496" y="133318"/>
+                </a:lnTo>
+                <a:lnTo>
+                  <a:pt x="1009105" y="141781"/>
+                </a:lnTo>
+                <a:lnTo>
+                  <a:pt x="1038621" y="150504"/>
+                </a:lnTo>
+                <a:lnTo>
+                  <a:pt x="1068041" y="159487"/>
+                </a:lnTo>
+                <a:lnTo>
+                  <a:pt x="1097362" y="168731"/>
+                </a:lnTo>
+                <a:lnTo>
+                  <a:pt x="1126582" y="178235"/>
+                </a:lnTo>
+                <a:lnTo>
+                  <a:pt x="1155697" y="187999"/>
+                </a:lnTo>
+                <a:lnTo>
+                  <a:pt x="1184705" y="198024"/>
+                </a:lnTo>
+                <a:lnTo>
+                  <a:pt x="1213602" y="208309"/>
+                </a:lnTo>
+                <a:lnTo>
+                  <a:pt x="1242385" y="218855"/>
+                </a:lnTo>
+                <a:lnTo>
+                  <a:pt x="1271052" y="229661"/>
+                </a:lnTo>
+                <a:lnTo>
+                  <a:pt x="1299600" y="240728"/>
+                </a:lnTo>
+                <a:lnTo>
+                  <a:pt x="1328025" y="252054"/>
+                </a:lnTo>
+                <a:lnTo>
+                  <a:pt x="1356325" y="263642"/>
+                </a:lnTo>
+                <a:lnTo>
+                  <a:pt x="1384496" y="275489"/>
+                </a:lnTo>
+                <a:lnTo>
+                  <a:pt x="1412535" y="287597"/>
+                </a:lnTo>
+                <a:lnTo>
+                  <a:pt x="1440441" y="299966"/>
+                </a:lnTo>
+                <a:lnTo>
+                  <a:pt x="1468208" y="312594"/>
+                </a:lnTo>
+                <a:lnTo>
+                  <a:pt x="1495835" y="325484"/>
+                </a:lnTo>
+                <a:lnTo>
+                  <a:pt x="1523318" y="338633"/>
+                </a:lnTo>
+                <a:lnTo>
+                  <a:pt x="1550655" y="352043"/>
+                </a:lnTo>
+                <a:lnTo>
+                  <a:pt x="1577842" y="365713"/>
+                </a:lnTo>
+                <a:lnTo>
+                  <a:pt x="1604875" y="379644"/>
+                </a:lnTo>
+                <a:lnTo>
+                  <a:pt x="1631753" y="393835"/>
+                </a:lnTo>
+                <a:lnTo>
+                  <a:pt x="1658471" y="408287"/>
+                </a:lnTo>
+                <a:lnTo>
+                  <a:pt x="1685027" y="422998"/>
+                </a:lnTo>
+                <a:lnTo>
+                  <a:pt x="1711417" y="437971"/>
+                </a:lnTo>
+                <a:lnTo>
+                  <a:pt x="1737639" y="453203"/>
+                </a:lnTo>
+                <a:lnTo>
+                  <a:pt x="1763689" y="468696"/>
+                </a:lnTo>
+                <a:lnTo>
+                  <a:pt x="1789564" y="484450"/>
+                </a:lnTo>
+                <a:lnTo>
+                  <a:pt x="1815260" y="500464"/>
+                </a:lnTo>
+                <a:lnTo>
+                  <a:pt x="1840775" y="516738"/>
+                </a:lnTo>
+                <a:lnTo>
+                  <a:pt x="1866106" y="533272"/>
+                </a:lnTo>
+                <a:lnTo>
+                  <a:pt x="1891248" y="550067"/>
+                </a:lnTo>
+                <a:lnTo>
+                  <a:pt x="1916199" y="567123"/>
+                </a:lnTo>
+                <a:lnTo>
+                  <a:pt x="1940956" y="584438"/>
+                </a:lnTo>
+                <a:lnTo>
+                  <a:pt x="1965515" y="602014"/>
+                </a:lnTo>
+                <a:lnTo>
+                  <a:pt x="1989873" y="619851"/>
+                </a:lnTo>
+                <a:lnTo>
+                  <a:pt x="2014026" y="637948"/>
+                </a:lnTo>
+                <a:lnTo>
+                  <a:pt x="2037972" y="656305"/>
+                </a:lnTo>
+                <a:lnTo>
+                  <a:pt x="2061706" y="674923"/>
+                </a:lnTo>
+                <a:lnTo>
+                  <a:pt x="2085227" y="693801"/>
+                </a:lnTo>
+                <a:lnTo>
+                  <a:pt x="2108529" y="712939"/>
+                </a:lnTo>
+                <a:lnTo>
+                  <a:pt x="2131611" y="732338"/>
+                </a:lnTo>
+                <a:lnTo>
+                  <a:pt x="2154468" y="751997"/>
+                </a:lnTo>
+                <a:lnTo>
+                  <a:pt x="2177097" y="771917"/>
+                </a:lnTo>
+                <a:lnTo>
+                  <a:pt x="2199495" y="792097"/>
+                </a:lnTo>
+                <a:lnTo>
+                  <a:pt x="2221658" y="812537"/>
+                </a:lnTo>
+                <a:lnTo>
+                  <a:pt x="2243583" y="833238"/>
+                </a:lnTo>
+                <a:lnTo>
+                  <a:pt x="2265266" y="854199"/>
+                </a:lnTo>
+                <a:lnTo>
+                  <a:pt x="2286704" y="875421"/>
+                </a:lnTo>
+                <a:lnTo>
+                  <a:pt x="2307894" y="896903"/>
+                </a:lnTo>
+                <a:lnTo>
+                  <a:pt x="2328832" y="918645"/>
+                </a:lnTo>
+                <a:lnTo>
+                  <a:pt x="2349515" y="940648"/>
+                </a:lnTo>
+                <a:lnTo>
+                  <a:pt x="2369938" y="962911"/>
+                </a:lnTo>
+                <a:lnTo>
+                  <a:pt x="2390100" y="985434"/>
+                </a:lnTo>
+                <a:lnTo>
+                  <a:pt x="2409995" y="1008218"/>
+                </a:lnTo>
+                <a:lnTo>
+                  <a:pt x="2429622" y="1031262"/>
+                </a:lnTo>
+                <a:lnTo>
+                  <a:pt x="2448975" y="1054567"/>
+                </a:lnTo>
+                <a:lnTo>
+                  <a:pt x="2468052" y="1078132"/>
+                </a:lnTo>
+                <a:lnTo>
+                  <a:pt x="2486850" y="1101957"/>
+                </a:lnTo>
+                <a:lnTo>
+                  <a:pt x="2505364" y="1126043"/>
+                </a:lnTo>
+                <a:lnTo>
+                  <a:pt x="2523591" y="1150389"/>
+                </a:lnTo>
+                <a:lnTo>
+                  <a:pt x="2541528" y="1174996"/>
+                </a:lnTo>
+                <a:lnTo>
+                  <a:pt x="2559172" y="1199863"/>
+                </a:lnTo>
+                <a:lnTo>
+                  <a:pt x="2576519" y="1224990"/>
+                </a:lnTo>
+                <a:lnTo>
+                  <a:pt x="2593565" y="1250378"/>
+                </a:lnTo>
+                <a:lnTo>
+                  <a:pt x="2610307" y="1276026"/>
+                </a:lnTo>
+                <a:lnTo>
+                  <a:pt x="2626741" y="1301935"/>
+                </a:lnTo>
+                <a:lnTo>
+                  <a:pt x="2642866" y="1328103"/>
+                </a:lnTo>
+                <a:lnTo>
+                  <a:pt x="2658675" y="1354533"/>
+                </a:lnTo>
+                <a:lnTo>
+                  <a:pt x="2674168" y="1381222"/>
+                </a:lnTo>
+                <a:lnTo>
+                  <a:pt x="2689340" y="1408172"/>
+                </a:lnTo>
+                <a:lnTo>
+                  <a:pt x="2704188" y="1435383"/>
+                </a:lnTo>
+                <a:lnTo>
+                  <a:pt x="2718709" y="1462854"/>
+                </a:lnTo>
+                <a:lnTo>
+                  <a:pt x="2732899" y="1490585"/>
+                </a:lnTo>
+                <a:lnTo>
+                  <a:pt x="2746757" y="1518576"/>
+                </a:lnTo>
+                <a:lnTo>
+                  <a:pt x="2760277" y="1546828"/>
+                </a:lnTo>
+                <a:lnTo>
+                  <a:pt x="2773458" y="1575341"/>
+                </a:lnTo>
+                <a:lnTo>
+                  <a:pt x="2786297" y="1604114"/>
+                </a:lnTo>
+                <a:lnTo>
+                  <a:pt x="2798791" y="1633147"/>
+                </a:lnTo>
+                <a:lnTo>
+                  <a:pt x="2810937" y="1662440"/>
+                </a:lnTo>
+                <a:lnTo>
+                  <a:pt x="2822732" y="1691994"/>
+                </a:lnTo>
+                <a:lnTo>
+                  <a:pt x="2834174" y="1721808"/>
+                </a:lnTo>
+                <a:lnTo>
+                  <a:pt x="2845260" y="1751883"/>
+                </a:lnTo>
+                <a:lnTo>
+                  <a:pt x="2855989" y="1782218"/>
+                </a:lnTo>
+                <a:lnTo>
+                  <a:pt x="2866357" y="1812814"/>
+                </a:lnTo>
+                <a:lnTo>
+                  <a:pt x="2876363" y="1843670"/>
+                </a:lnTo>
+                <a:lnTo>
+                  <a:pt x="2886006" y="1874786"/>
+                </a:lnTo>
+                <a:lnTo>
+                  <a:pt x="2895282" y="1906162"/>
+                </a:lnTo>
+                <a:lnTo>
+                  <a:pt x="2904192" y="1937799"/>
+                </a:lnTo>
+                <a:lnTo>
+                  <a:pt x="2912733" y="1969697"/>
+                </a:lnTo>
+                <a:lnTo>
+                  <a:pt x="2920904" y="2001855"/>
+                </a:lnTo>
+                <a:lnTo>
+                  <a:pt x="2928706" y="2034273"/>
+                </a:lnTo>
+                <a:lnTo>
+                  <a:pt x="2936136" y="2066951"/>
+                </a:lnTo>
+                <a:lnTo>
+                  <a:pt x="2943195" y="2099890"/>
+                </a:lnTo>
+                <a:lnTo>
+                  <a:pt x="2949884" y="2133090"/>
+                </a:lnTo>
+                <a:lnTo>
+                  <a:pt x="2956202" y="2166549"/>
+                </a:lnTo>
+                <a:lnTo>
+                  <a:pt x="2962150" y="2200269"/>
+                </a:lnTo>
+                <a:lnTo>
+                  <a:pt x="2967730" y="2234250"/>
+                </a:lnTo>
+                <a:lnTo>
+                  <a:pt x="2972944" y="2268491"/>
+                </a:lnTo>
+                <a:lnTo>
+                  <a:pt x="2977793" y="2302992"/>
+                </a:lnTo>
+                <a:lnTo>
+                  <a:pt x="2982281" y="2337754"/>
+                </a:lnTo>
+                <a:lnTo>
+                  <a:pt x="2986410" y="2372776"/>
+                </a:lnTo>
+                <a:lnTo>
+                  <a:pt x="2990186" y="2408058"/>
+                </a:lnTo>
+                <a:lnTo>
+                  <a:pt x="2993613" y="2443601"/>
+                </a:lnTo>
+                <a:lnTo>
+                  <a:pt x="2996697" y="2479404"/>
+                </a:lnTo>
+                <a:lnTo>
+                  <a:pt x="2999444" y="2515468"/>
+                </a:lnTo>
+                <a:lnTo>
+                  <a:pt x="3001863" y="2551792"/>
+                </a:lnTo>
+                <a:lnTo>
+                  <a:pt x="3003962" y="2588376"/>
+                </a:lnTo>
+                <a:lnTo>
+                  <a:pt x="3005752" y="2625221"/>
+                </a:lnTo>
+                <a:lnTo>
+                  <a:pt x="3007246" y="2662326"/>
+                </a:lnTo>
+                <a:lnTo>
+                  <a:pt x="3008456" y="2699692"/>
+                </a:lnTo>
+                <a:lnTo>
+                  <a:pt x="3009400" y="2737318"/>
+                </a:lnTo>
+                <a:lnTo>
+                  <a:pt x="3010097" y="2775204"/>
+                </a:lnTo>
+                <a:lnTo>
+                  <a:pt x="3010570" y="2813350"/>
+                </a:lnTo>
+                <a:lnTo>
+                  <a:pt x="3010848" y="2851758"/>
+                </a:lnTo>
+                <a:lnTo>
+                  <a:pt x="3010967" y="2890425"/>
+                </a:lnTo>
+                <a:lnTo>
+                  <a:pt x="3010984" y="2919596"/>
+                </a:lnTo>
+              </a:path>
+            </a:pathLst>
+          </a:custGeom>
+          <a:noFill/>
+          <a:ln w="38100">
+            <a:solidFill>
+              <a:srgbClr val="F2B880"/>
+            </a:solidFill>
+          </a:ln>
+          <a:effectLst/>
+        </p:spPr>
+        <p:txBody>
+          <a:bodyPr rtlCol="0" anchor="ctr"/>
+          <a:lstStyle/>
+          <a:p>
+            <a:pPr algn="ctr"/>
+          </a:p>
+        </p:txBody>
+      </p:sp>
+      <p:cxnSp>
+        <p:nvCxnSpPr>
+          <p:cNvPr id="57" name="C1-E33 line 55" descr="sci-ppt:o055"/>
+          <p:cNvCxnSpPr/>
+          <p:nvPr/>
+        </p:nvCxnSpPr>
+        <p:spPr>
+          <a:xfrm>
+            <a:off x="7948744" y="1554480"/>
+            <a:ext cx="0" cy="3017520"/>
+          </a:xfrm>
+          <a:prstGeom prst="line">
+            <a:avLst/>
+          </a:prstGeom>
+          <a:ln w="16510">
+            <a:solidFill>
+              <a:srgbClr val="F28BA0"/>
+            </a:solidFill>
+            <a:prstDash val="dash"/>
+          </a:ln>
+          <a:effectLst/>
+        </p:spPr>
+      </p:cxnSp>
+      <p:cxnSp>
+        <p:nvCxnSpPr>
+          <p:cNvPr id="58" name="C1-E33 line 56" descr="sci-ppt:o056"/>
+          <p:cNvCxnSpPr/>
+          <p:nvPr/>
+        </p:nvCxnSpPr>
+        <p:spPr>
+          <a:xfrm>
+            <a:off x="8961120" y="4572000"/>
+            <a:ext cx="2834640" cy="0"/>
+          </a:xfrm>
+          <a:prstGeom prst="line">
+            <a:avLst/>
+          </a:prstGeom>
+          <a:ln w="19050">
+            <a:solidFill>
+              <a:srgbClr val="B4C7D2"/>
+            </a:solidFill>
+          </a:ln>
+          <a:effectLst/>
+        </p:spPr>
+      </p:cxnSp>
+      <p:cxnSp>
+        <p:nvCxnSpPr>
+          <p:cNvPr id="59" name="C1-E33 line 57" descr="sci-ppt:o057"/>
+          <p:cNvCxnSpPr/>
+          <p:nvPr/>
+        </p:nvCxnSpPr>
+        <p:spPr>
+          <a:xfrm>
+            <a:off x="8961120" y="1554480"/>
+            <a:ext cx="0" cy="3017520"/>
+          </a:xfrm>
+          <a:prstGeom prst="line">
+            <a:avLst/>
+          </a:prstGeom>
+          <a:ln w="19050">
+            <a:solidFill>
+              <a:srgbClr val="B4C7D2"/>
+            </a:solidFill>
+          </a:ln>
+          <a:effectLst/>
+        </p:spPr>
+      </p:cxnSp>
+      <p:cxnSp>
+        <p:nvCxnSpPr>
+          <p:cNvPr id="60" name="C1-E33 line 58" descr="sci-ppt:o058"/>
+          <p:cNvCxnSpPr/>
+          <p:nvPr/>
+        </p:nvCxnSpPr>
+        <p:spPr>
+          <a:xfrm>
+            <a:off x="8961120" y="4572000"/>
+            <a:ext cx="0" cy="64008"/>
+          </a:xfrm>
+          <a:prstGeom prst="line">
+            <a:avLst/>
+          </a:prstGeom>
+          <a:ln w="12700">
+            <a:solidFill>
+              <a:srgbClr val="B4C7D2"/>
+            </a:solidFill>
+          </a:ln>
+          <a:effectLst/>
+        </p:spPr>
+      </p:cxnSp>
+      <p:cxnSp>
+        <p:nvCxnSpPr>
+          <p:cNvPr id="61" name="C1-E33 line 59" descr="sci-ppt:o059"/>
+          <p:cNvCxnSpPr/>
+          <p:nvPr/>
+        </p:nvCxnSpPr>
+        <p:spPr>
+          <a:xfrm>
+            <a:off x="8961120" y="1554480"/>
+            <a:ext cx="0" cy="3017520"/>
+          </a:xfrm>
+          <a:prstGeom prst="line">
+            <a:avLst/>
+          </a:prstGeom>
+          <a:ln w="7620">
+            <a:solidFill>
+              <a:srgbClr val="2E4756"/>
+            </a:solidFill>
+          </a:ln>
+          <a:effectLst/>
+        </p:spPr>
+      </p:cxnSp>
+      <p:sp>
+        <p:nvSpPr>
+          <p:cNvPr id="62" name="C1-E33 text 60" descr="sci-ppt:o060"/>
           <p:cNvSpPr txBox="1"/>
           <p:nvPr/>
         </p:nvSpPr>
         <p:spPr>
           <a:xfrm>
-            <a:off x="5242560" y="1524000"/>
-            <a:ext cx="4876800" cy="415747"/>
+            <a:off x="8503920" y="4654296"/>
+            <a:ext cx="914400" cy="208407"/>
           </a:xfrm>
           <a:prstGeom prst="rect">
             <a:avLst/>
@@ -3290,7 +5859,445 @@
           <a:effectLst/>
         </p:spPr>
         <p:txBody>
-          <a:bodyPr wrap="none" lIns="27432" rIns="27432" tIns="18288" bIns="18288" anchor="ctr">
+          <a:bodyPr wrap="none" lIns="18288" rIns="18288" tIns="18288" bIns="18288" anchor="t">
+            <a:spAutoFit/>
+          </a:bodyPr>
+          <a:lstStyle/>
+          <a:p>
+            <a:pPr algn="ctr">
+              <a:spcAft>
+                <a:spcPts val="0"/>
+              </a:spcAft>
+            </a:pPr>
+            <a:r>
+              <a:rPr sz="1050" b="0" i="0">
+                <a:solidFill>
+                  <a:srgbClr val="B4C7D2"/>
+                </a:solidFill>
+                <a:latin typeface="Arial"/>
+              </a:rPr>
+              <a:t>0</a:t>
+            </a:r>
+          </a:p>
+        </p:txBody>
+      </p:sp>
+      <p:cxnSp>
+        <p:nvCxnSpPr>
+          <p:cNvPr id="63" name="C1-E33 line 61" descr="sci-ppt:o061"/>
+          <p:cNvCxnSpPr/>
+          <p:nvPr/>
+        </p:nvCxnSpPr>
+        <p:spPr>
+          <a:xfrm>
+            <a:off x="10378440" y="4572000"/>
+            <a:ext cx="0" cy="64008"/>
+          </a:xfrm>
+          <a:prstGeom prst="line">
+            <a:avLst/>
+          </a:prstGeom>
+          <a:ln w="12700">
+            <a:solidFill>
+              <a:srgbClr val="B4C7D2"/>
+            </a:solidFill>
+          </a:ln>
+          <a:effectLst/>
+        </p:spPr>
+      </p:cxnSp>
+      <p:cxnSp>
+        <p:nvCxnSpPr>
+          <p:cNvPr id="64" name="C1-E33 line 62" descr="sci-ppt:o062"/>
+          <p:cNvCxnSpPr/>
+          <p:nvPr/>
+        </p:nvCxnSpPr>
+        <p:spPr>
+          <a:xfrm>
+            <a:off x="10378440" y="1554480"/>
+            <a:ext cx="0" cy="3017520"/>
+          </a:xfrm>
+          <a:prstGeom prst="line">
+            <a:avLst/>
+          </a:prstGeom>
+          <a:ln w="7620">
+            <a:solidFill>
+              <a:srgbClr val="2E4756"/>
+            </a:solidFill>
+          </a:ln>
+          <a:effectLst/>
+        </p:spPr>
+      </p:cxnSp>
+      <p:sp>
+        <p:nvSpPr>
+          <p:cNvPr id="65" name="C1-E33 text 63" descr="sci-ppt:o063"/>
+          <p:cNvSpPr txBox="1"/>
+          <p:nvPr/>
+        </p:nvSpPr>
+        <p:spPr>
+          <a:xfrm>
+            <a:off x="9921240" y="4654296"/>
+            <a:ext cx="914400" cy="208407"/>
+          </a:xfrm>
+          <a:prstGeom prst="rect">
+            <a:avLst/>
+          </a:prstGeom>
+          <a:noFill/>
+          <a:effectLst/>
+        </p:spPr>
+        <p:txBody>
+          <a:bodyPr wrap="none" lIns="18288" rIns="18288" tIns="18288" bIns="18288" anchor="t">
+            <a:spAutoFit/>
+          </a:bodyPr>
+          <a:lstStyle/>
+          <a:p>
+            <a:pPr algn="ctr">
+              <a:spcAft>
+                <a:spcPts val="0"/>
+              </a:spcAft>
+            </a:pPr>
+            <a:r>
+              <a:rPr sz="1050" b="0" i="0">
+                <a:solidFill>
+                  <a:srgbClr val="B4C7D2"/>
+                </a:solidFill>
+                <a:latin typeface="Arial"/>
+              </a:rPr>
+              <a:t>0.5</a:t>
+            </a:r>
+          </a:p>
+        </p:txBody>
+      </p:sp>
+      <p:cxnSp>
+        <p:nvCxnSpPr>
+          <p:cNvPr id="66" name="C1-E33 line 64" descr="sci-ppt:o064"/>
+          <p:cNvCxnSpPr/>
+          <p:nvPr/>
+        </p:nvCxnSpPr>
+        <p:spPr>
+          <a:xfrm>
+            <a:off x="11795760" y="4572000"/>
+            <a:ext cx="0" cy="64008"/>
+          </a:xfrm>
+          <a:prstGeom prst="line">
+            <a:avLst/>
+          </a:prstGeom>
+          <a:ln w="12700">
+            <a:solidFill>
+              <a:srgbClr val="B4C7D2"/>
+            </a:solidFill>
+          </a:ln>
+          <a:effectLst/>
+        </p:spPr>
+      </p:cxnSp>
+      <p:cxnSp>
+        <p:nvCxnSpPr>
+          <p:cNvPr id="67" name="C1-E33 line 65" descr="sci-ppt:o065"/>
+          <p:cNvCxnSpPr/>
+          <p:nvPr/>
+        </p:nvCxnSpPr>
+        <p:spPr>
+          <a:xfrm>
+            <a:off x="11795760" y="1554480"/>
+            <a:ext cx="0" cy="3017520"/>
+          </a:xfrm>
+          <a:prstGeom prst="line">
+            <a:avLst/>
+          </a:prstGeom>
+          <a:ln w="7620">
+            <a:solidFill>
+              <a:srgbClr val="2E4756"/>
+            </a:solidFill>
+          </a:ln>
+          <a:effectLst/>
+        </p:spPr>
+      </p:cxnSp>
+      <p:sp>
+        <p:nvSpPr>
+          <p:cNvPr id="68" name="C1-E33 text 66" descr="sci-ppt:o066"/>
+          <p:cNvSpPr txBox="1"/>
+          <p:nvPr/>
+        </p:nvSpPr>
+        <p:spPr>
+          <a:xfrm>
+            <a:off x="11338560" y="4654296"/>
+            <a:ext cx="914400" cy="208407"/>
+          </a:xfrm>
+          <a:prstGeom prst="rect">
+            <a:avLst/>
+          </a:prstGeom>
+          <a:noFill/>
+          <a:effectLst/>
+        </p:spPr>
+        <p:txBody>
+          <a:bodyPr wrap="none" lIns="18288" rIns="18288" tIns="18288" bIns="18288" anchor="t">
+            <a:spAutoFit/>
+          </a:bodyPr>
+          <a:lstStyle/>
+          <a:p>
+            <a:pPr algn="ctr">
+              <a:spcAft>
+                <a:spcPts val="0"/>
+              </a:spcAft>
+            </a:pPr>
+            <a:r>
+              <a:rPr sz="1050" b="0" i="0">
+                <a:solidFill>
+                  <a:srgbClr val="B4C7D2"/>
+                </a:solidFill>
+                <a:latin typeface="Arial"/>
+              </a:rPr>
+              <a:t>1</a:t>
+            </a:r>
+          </a:p>
+        </p:txBody>
+      </p:sp>
+      <p:cxnSp>
+        <p:nvCxnSpPr>
+          <p:cNvPr id="69" name="C1-E33 line 67" descr="sci-ppt:o067"/>
+          <p:cNvCxnSpPr/>
+          <p:nvPr/>
+        </p:nvCxnSpPr>
+        <p:spPr>
+          <a:xfrm>
+            <a:off x="8897112" y="4572000"/>
+            <a:ext cx="64008" cy="0"/>
+          </a:xfrm>
+          <a:prstGeom prst="line">
+            <a:avLst/>
+          </a:prstGeom>
+          <a:ln w="12700">
+            <a:solidFill>
+              <a:srgbClr val="B4C7D2"/>
+            </a:solidFill>
+          </a:ln>
+          <a:effectLst/>
+        </p:spPr>
+      </p:cxnSp>
+      <p:cxnSp>
+        <p:nvCxnSpPr>
+          <p:cNvPr id="70" name="C1-E33 line 68" descr="sci-ppt:o068"/>
+          <p:cNvCxnSpPr/>
+          <p:nvPr/>
+        </p:nvCxnSpPr>
+        <p:spPr>
+          <a:xfrm>
+            <a:off x="8897112" y="3135085"/>
+            <a:ext cx="64008" cy="0"/>
+          </a:xfrm>
+          <a:prstGeom prst="line">
+            <a:avLst/>
+          </a:prstGeom>
+          <a:ln w="12700">
+            <a:solidFill>
+              <a:srgbClr val="B4C7D2"/>
+            </a:solidFill>
+          </a:ln>
+          <a:effectLst/>
+        </p:spPr>
+      </p:cxnSp>
+      <p:cxnSp>
+        <p:nvCxnSpPr>
+          <p:cNvPr id="71" name="C1-E33 line 69" descr="sci-ppt:o069"/>
+          <p:cNvCxnSpPr/>
+          <p:nvPr/>
+        </p:nvCxnSpPr>
+        <p:spPr>
+          <a:xfrm>
+            <a:off x="8961120" y="3135085"/>
+            <a:ext cx="2834640" cy="0"/>
+          </a:xfrm>
+          <a:prstGeom prst="line">
+            <a:avLst/>
+          </a:prstGeom>
+          <a:ln w="7620">
+            <a:solidFill>
+              <a:srgbClr val="2E4756"/>
+            </a:solidFill>
+          </a:ln>
+          <a:effectLst/>
+        </p:spPr>
+      </p:cxnSp>
+      <p:sp>
+        <p:nvSpPr>
+          <p:cNvPr id="72" name="C1-E33 text 70" descr="sci-ppt:o070"/>
+          <p:cNvSpPr txBox="1"/>
+          <p:nvPr/>
+        </p:nvSpPr>
+        <p:spPr>
+          <a:xfrm>
+            <a:off x="8092440" y="3052789"/>
+            <a:ext cx="777240" cy="208407"/>
+          </a:xfrm>
+          <a:prstGeom prst="rect">
+            <a:avLst/>
+          </a:prstGeom>
+          <a:noFill/>
+          <a:effectLst/>
+        </p:spPr>
+        <p:txBody>
+          <a:bodyPr wrap="none" lIns="18288" rIns="18288" tIns="18288" bIns="18288" anchor="t">
+            <a:spAutoFit/>
+          </a:bodyPr>
+          <a:lstStyle/>
+          <a:p>
+            <a:pPr algn="r">
+              <a:spcAft>
+                <a:spcPts val="0"/>
+              </a:spcAft>
+            </a:pPr>
+            <a:r>
+              <a:rPr sz="1050" b="0" i="0">
+                <a:solidFill>
+                  <a:srgbClr val="B4C7D2"/>
+                </a:solidFill>
+                <a:latin typeface="Arial"/>
+              </a:rPr>
+              <a:t>0.5</a:t>
+            </a:r>
+          </a:p>
+        </p:txBody>
+      </p:sp>
+      <p:cxnSp>
+        <p:nvCxnSpPr>
+          <p:cNvPr id="73" name="C1-E33 line 71" descr="sci-ppt:o071"/>
+          <p:cNvCxnSpPr/>
+          <p:nvPr/>
+        </p:nvCxnSpPr>
+        <p:spPr>
+          <a:xfrm>
+            <a:off x="8897112" y="1698171"/>
+            <a:ext cx="64008" cy="0"/>
+          </a:xfrm>
+          <a:prstGeom prst="line">
+            <a:avLst/>
+          </a:prstGeom>
+          <a:ln w="12700">
+            <a:solidFill>
+              <a:srgbClr val="B4C7D2"/>
+            </a:solidFill>
+          </a:ln>
+          <a:effectLst/>
+        </p:spPr>
+      </p:cxnSp>
+      <p:cxnSp>
+        <p:nvCxnSpPr>
+          <p:cNvPr id="74" name="C1-E33 line 72" descr="sci-ppt:o072"/>
+          <p:cNvCxnSpPr/>
+          <p:nvPr/>
+        </p:nvCxnSpPr>
+        <p:spPr>
+          <a:xfrm>
+            <a:off x="8961120" y="1698171"/>
+            <a:ext cx="2834640" cy="0"/>
+          </a:xfrm>
+          <a:prstGeom prst="line">
+            <a:avLst/>
+          </a:prstGeom>
+          <a:ln w="7620">
+            <a:solidFill>
+              <a:srgbClr val="2E4756"/>
+            </a:solidFill>
+          </a:ln>
+          <a:effectLst/>
+        </p:spPr>
+      </p:cxnSp>
+      <p:sp>
+        <p:nvSpPr>
+          <p:cNvPr id="75" name="C1-E33 text 73" descr="sci-ppt:o073"/>
+          <p:cNvSpPr txBox="1"/>
+          <p:nvPr/>
+        </p:nvSpPr>
+        <p:spPr>
+          <a:xfrm>
+            <a:off x="8092440" y="1615875"/>
+            <a:ext cx="777240" cy="208407"/>
+          </a:xfrm>
+          <a:prstGeom prst="rect">
+            <a:avLst/>
+          </a:prstGeom>
+          <a:noFill/>
+          <a:effectLst/>
+        </p:spPr>
+        <p:txBody>
+          <a:bodyPr wrap="none" lIns="18288" rIns="18288" tIns="18288" bIns="18288" anchor="t">
+            <a:spAutoFit/>
+          </a:bodyPr>
+          <a:lstStyle/>
+          <a:p>
+            <a:pPr algn="r">
+              <a:spcAft>
+                <a:spcPts val="0"/>
+              </a:spcAft>
+            </a:pPr>
+            <a:r>
+              <a:rPr sz="1050" b="0" i="0">
+                <a:solidFill>
+                  <a:srgbClr val="B4C7D2"/>
+                </a:solidFill>
+                <a:latin typeface="Arial"/>
+              </a:rPr>
+              <a:t>1</a:t>
+            </a:r>
+          </a:p>
+        </p:txBody>
+      </p:sp>
+      <p:sp>
+        <p:nvSpPr>
+          <p:cNvPr id="76" name="C1-E33 text 74" descr="sci-ppt:o074"/>
+          <p:cNvSpPr txBox="1"/>
+          <p:nvPr/>
+        </p:nvSpPr>
+        <p:spPr>
+          <a:xfrm>
+            <a:off x="8961120" y="4855464"/>
+            <a:ext cx="2834640" cy="231648"/>
+          </a:xfrm>
+          <a:prstGeom prst="rect">
+            <a:avLst/>
+          </a:prstGeom>
+          <a:noFill/>
+          <a:effectLst/>
+        </p:spPr>
+        <p:txBody>
+          <a:bodyPr wrap="none" lIns="18288" rIns="18288" tIns="18288" bIns="18288" anchor="t">
+            <a:spAutoFit/>
+          </a:bodyPr>
+          <a:lstStyle/>
+          <a:p>
+            <a:pPr algn="ctr">
+              <a:spcAft>
+                <a:spcPts val="0"/>
+              </a:spcAft>
+            </a:pPr>
+            <a:r>
+              <a:rPr sz="1200" b="0" i="0">
+                <a:solidFill>
+                  <a:srgbClr val="E7F0F3"/>
+                </a:solidFill>
+                <a:latin typeface="Arial"/>
+              </a:rPr>
+              <a:t>R / Rₘₐₓ</a:t>
+            </a:r>
+          </a:p>
+        </p:txBody>
+      </p:sp>
+      <p:sp>
+        <p:nvSpPr>
+          <p:cNvPr id="77" name="C1-E33 text 75" descr="sci-ppt:o075"/>
+          <p:cNvSpPr txBox="1"/>
+          <p:nvPr/>
+        </p:nvSpPr>
+        <p:spPr>
+          <a:xfrm>
+            <a:off x="8412480" y="1207007"/>
+            <a:ext cx="2834640" cy="231648"/>
+          </a:xfrm>
+          <a:prstGeom prst="rect">
+            <a:avLst/>
+          </a:prstGeom>
+          <a:noFill/>
+          <a:effectLst/>
+        </p:spPr>
+        <p:txBody>
+          <a:bodyPr wrap="none" lIns="18288" rIns="18288" tIns="18288" bIns="18288" anchor="t">
             <a:spAutoFit/>
           </a:bodyPr>
           <a:lstStyle/>
@@ -3301,27 +6308,365 @@
               </a:spcAft>
             </a:pPr>
             <a:r>
-              <a:rPr sz="2111" b="0" i="0">
+              <a:rPr sz="1200" b="0" i="0">
                 <a:solidFill>
                   <a:srgbClr val="E7F0F3"/>
                 </a:solidFill>
                 <a:latin typeface="Arial"/>
               </a:rPr>
-              <a:t>Surrounding liquid</a:t>
-            </a:r>
-          </a:p>
-        </p:txBody>
-      </p:sp>
-      <p:sp>
-        <p:nvSpPr>
-          <p:cNvPr id="8" name="text7" descr="sci-ppt:C1-E33-007"/>
+              <a:t>Kₗ / E_B</a:t>
+            </a:r>
+          </a:p>
+        </p:txBody>
+      </p:sp>
+      <p:sp>
+        <p:nvSpPr>
+          <p:cNvPr id="78" name="C1-E33 polygon 76" descr="sci-ppt:o076"/>
+          <p:cNvSpPr/>
+          <p:nvPr/>
+        </p:nvSpPr>
+        <p:spPr>
+          <a:xfrm>
+            <a:off x="8961120" y="1698171"/>
+            <a:ext cx="2834640" cy="2873829"/>
+          </a:xfrm>
+          <a:custGeom>
+            <a:avLst/>
+            <a:gdLst/>
+            <a:ahLst/>
+            <a:cxnLst/>
+            <a:rect l="l" t="t" r="r" b="b"/>
+            <a:pathLst>
+              <a:path w="2834640" h="2873829">
+                <a:moveTo>
+                  <a:pt x="0" y="0"/>
+                </a:moveTo>
+                <a:lnTo>
+                  <a:pt x="28632" y="3"/>
+                </a:lnTo>
+                <a:lnTo>
+                  <a:pt x="57265" y="24"/>
+                </a:lnTo>
+                <a:lnTo>
+                  <a:pt x="85898" y="80"/>
+                </a:lnTo>
+                <a:lnTo>
+                  <a:pt x="114530" y="189"/>
+                </a:lnTo>
+                <a:lnTo>
+                  <a:pt x="143163" y="370"/>
+                </a:lnTo>
+                <a:lnTo>
+                  <a:pt x="171796" y="640"/>
+                </a:lnTo>
+                <a:lnTo>
+                  <a:pt x="200429" y="1016"/>
+                </a:lnTo>
+                <a:lnTo>
+                  <a:pt x="229061" y="1516"/>
+                </a:lnTo>
+                <a:lnTo>
+                  <a:pt x="257694" y="2159"/>
+                </a:lnTo>
+                <a:lnTo>
+                  <a:pt x="286327" y="2962"/>
+                </a:lnTo>
+                <a:lnTo>
+                  <a:pt x="314960" y="3942"/>
+                </a:lnTo>
+                <a:lnTo>
+                  <a:pt x="343592" y="5118"/>
+                </a:lnTo>
+                <a:lnTo>
+                  <a:pt x="372225" y="6507"/>
+                </a:lnTo>
+                <a:lnTo>
+                  <a:pt x="400858" y="8127"/>
+                </a:lnTo>
+                <a:lnTo>
+                  <a:pt x="429490" y="9996"/>
+                </a:lnTo>
+                <a:lnTo>
+                  <a:pt x="458123" y="12131"/>
+                </a:lnTo>
+                <a:lnTo>
+                  <a:pt x="486756" y="14551"/>
+                </a:lnTo>
+                <a:lnTo>
+                  <a:pt x="515389" y="17273"/>
+                </a:lnTo>
+                <a:lnTo>
+                  <a:pt x="544021" y="20315"/>
+                </a:lnTo>
+                <a:lnTo>
+                  <a:pt x="572654" y="23694"/>
+                </a:lnTo>
+                <a:lnTo>
+                  <a:pt x="601287" y="27429"/>
+                </a:lnTo>
+                <a:lnTo>
+                  <a:pt x="629920" y="31537"/>
+                </a:lnTo>
+                <a:lnTo>
+                  <a:pt x="658552" y="36036"/>
+                </a:lnTo>
+                <a:lnTo>
+                  <a:pt x="687185" y="40944"/>
+                </a:lnTo>
+                <a:lnTo>
+                  <a:pt x="715818" y="46278"/>
+                </a:lnTo>
+                <a:lnTo>
+                  <a:pt x="744450" y="52056"/>
+                </a:lnTo>
+                <a:lnTo>
+                  <a:pt x="773083" y="58297"/>
+                </a:lnTo>
+                <a:lnTo>
+                  <a:pt x="801716" y="65017"/>
+                </a:lnTo>
+                <a:lnTo>
+                  <a:pt x="830349" y="72235"/>
+                </a:lnTo>
+                <a:lnTo>
+                  <a:pt x="858981" y="79968"/>
+                </a:lnTo>
+                <a:lnTo>
+                  <a:pt x="887614" y="88235"/>
+                </a:lnTo>
+                <a:lnTo>
+                  <a:pt x="916247" y="97052"/>
+                </a:lnTo>
+                <a:lnTo>
+                  <a:pt x="944880" y="106438"/>
+                </a:lnTo>
+                <a:lnTo>
+                  <a:pt x="973512" y="116410"/>
+                </a:lnTo>
+                <a:lnTo>
+                  <a:pt x="1002145" y="126987"/>
+                </a:lnTo>
+                <a:lnTo>
+                  <a:pt x="1030778" y="138186"/>
+                </a:lnTo>
+                <a:lnTo>
+                  <a:pt x="1059410" y="150024"/>
+                </a:lnTo>
+                <a:lnTo>
+                  <a:pt x="1088043" y="162520"/>
+                </a:lnTo>
+                <a:lnTo>
+                  <a:pt x="1116676" y="175691"/>
+                </a:lnTo>
+                <a:lnTo>
+                  <a:pt x="1145309" y="189555"/>
+                </a:lnTo>
+                <a:lnTo>
+                  <a:pt x="1173941" y="204130"/>
+                </a:lnTo>
+                <a:lnTo>
+                  <a:pt x="1202574" y="219434"/>
+                </a:lnTo>
+                <a:lnTo>
+                  <a:pt x="1231207" y="235484"/>
+                </a:lnTo>
+                <a:lnTo>
+                  <a:pt x="1259840" y="252298"/>
+                </a:lnTo>
+                <a:lnTo>
+                  <a:pt x="1288472" y="269894"/>
+                </a:lnTo>
+                <a:lnTo>
+                  <a:pt x="1317105" y="288289"/>
+                </a:lnTo>
+                <a:lnTo>
+                  <a:pt x="1345738" y="307503"/>
+                </a:lnTo>
+                <a:lnTo>
+                  <a:pt x="1374370" y="327551"/>
+                </a:lnTo>
+                <a:lnTo>
+                  <a:pt x="1403003" y="348452"/>
+                </a:lnTo>
+                <a:lnTo>
+                  <a:pt x="1431636" y="370225"/>
+                </a:lnTo>
+                <a:lnTo>
+                  <a:pt x="1460269" y="392885"/>
+                </a:lnTo>
+                <a:lnTo>
+                  <a:pt x="1488901" y="416452"/>
+                </a:lnTo>
+                <a:lnTo>
+                  <a:pt x="1517534" y="440943"/>
+                </a:lnTo>
+                <a:lnTo>
+                  <a:pt x="1546167" y="466376"/>
+                </a:lnTo>
+                <a:lnTo>
+                  <a:pt x="1574800" y="492769"/>
+                </a:lnTo>
+                <a:lnTo>
+                  <a:pt x="1603432" y="520139"/>
+                </a:lnTo>
+                <a:lnTo>
+                  <a:pt x="1632065" y="548504"/>
+                </a:lnTo>
+                <a:lnTo>
+                  <a:pt x="1660698" y="577882"/>
+                </a:lnTo>
+                <a:lnTo>
+                  <a:pt x="1689330" y="608291"/>
+                </a:lnTo>
+                <a:lnTo>
+                  <a:pt x="1717963" y="639748"/>
+                </a:lnTo>
+                <a:lnTo>
+                  <a:pt x="1746596" y="672272"/>
+                </a:lnTo>
+                <a:lnTo>
+                  <a:pt x="1775229" y="705879"/>
+                </a:lnTo>
+                <a:lnTo>
+                  <a:pt x="1803861" y="740588"/>
+                </a:lnTo>
+                <a:lnTo>
+                  <a:pt x="1832494" y="776417"/>
+                </a:lnTo>
+                <a:lnTo>
+                  <a:pt x="1861127" y="813383"/>
+                </a:lnTo>
+                <a:lnTo>
+                  <a:pt x="1889760" y="851505"/>
+                </a:lnTo>
+                <a:lnTo>
+                  <a:pt x="1918392" y="890799"/>
+                </a:lnTo>
+                <a:lnTo>
+                  <a:pt x="1947025" y="931284"/>
+                </a:lnTo>
+                <a:lnTo>
+                  <a:pt x="1975658" y="972977"/>
+                </a:lnTo>
+                <a:lnTo>
+                  <a:pt x="2004290" y="1015896"/>
+                </a:lnTo>
+                <a:lnTo>
+                  <a:pt x="2032923" y="1060060"/>
+                </a:lnTo>
+                <a:lnTo>
+                  <a:pt x="2061556" y="1105485"/>
+                </a:lnTo>
+                <a:lnTo>
+                  <a:pt x="2090189" y="1152189"/>
+                </a:lnTo>
+                <a:lnTo>
+                  <a:pt x="2118821" y="1200191"/>
+                </a:lnTo>
+                <a:lnTo>
+                  <a:pt x="2147454" y="1249508"/>
+                </a:lnTo>
+                <a:lnTo>
+                  <a:pt x="2176087" y="1300158"/>
+                </a:lnTo>
+                <a:lnTo>
+                  <a:pt x="2204720" y="1352158"/>
+                </a:lnTo>
+                <a:lnTo>
+                  <a:pt x="2233352" y="1405527"/>
+                </a:lnTo>
+                <a:lnTo>
+                  <a:pt x="2261985" y="1460281"/>
+                </a:lnTo>
+                <a:lnTo>
+                  <a:pt x="2290618" y="1516440"/>
+                </a:lnTo>
+                <a:lnTo>
+                  <a:pt x="2319250" y="1574020"/>
+                </a:lnTo>
+                <a:lnTo>
+                  <a:pt x="2347883" y="1633040"/>
+                </a:lnTo>
+                <a:lnTo>
+                  <a:pt x="2376516" y="1693517"/>
+                </a:lnTo>
+                <a:lnTo>
+                  <a:pt x="2405149" y="1755469"/>
+                </a:lnTo>
+                <a:lnTo>
+                  <a:pt x="2433781" y="1818913"/>
+                </a:lnTo>
+                <a:lnTo>
+                  <a:pt x="2462414" y="1883869"/>
+                </a:lnTo>
+                <a:lnTo>
+                  <a:pt x="2491047" y="1950352"/>
+                </a:lnTo>
+                <a:lnTo>
+                  <a:pt x="2519680" y="2018382"/>
+                </a:lnTo>
+                <a:lnTo>
+                  <a:pt x="2548312" y="2087975"/>
+                </a:lnTo>
+                <a:lnTo>
+                  <a:pt x="2576945" y="2159150"/>
+                </a:lnTo>
+                <a:lnTo>
+                  <a:pt x="2605578" y="2231924"/>
+                </a:lnTo>
+                <a:lnTo>
+                  <a:pt x="2634210" y="2306316"/>
+                </a:lnTo>
+                <a:lnTo>
+                  <a:pt x="2662843" y="2382342"/>
+                </a:lnTo>
+                <a:lnTo>
+                  <a:pt x="2691476" y="2460021"/>
+                </a:lnTo>
+                <a:lnTo>
+                  <a:pt x="2720109" y="2539371"/>
+                </a:lnTo>
+                <a:lnTo>
+                  <a:pt x="2748741" y="2620408"/>
+                </a:lnTo>
+                <a:lnTo>
+                  <a:pt x="2777374" y="2703152"/>
+                </a:lnTo>
+                <a:lnTo>
+                  <a:pt x="2806007" y="2787619"/>
+                </a:lnTo>
+                <a:lnTo>
+                  <a:pt x="2834640" y="2873829"/>
+                </a:lnTo>
+              </a:path>
+            </a:pathLst>
+          </a:custGeom>
+          <a:noFill/>
+          <a:ln w="38100">
+            <a:solidFill>
+              <a:srgbClr val="7FC8F8"/>
+            </a:solidFill>
+          </a:ln>
+          <a:effectLst/>
+        </p:spPr>
+        <p:txBody>
+          <a:bodyPr rtlCol="0" anchor="ctr"/>
+          <a:lstStyle/>
+          <a:p>
+            <a:pPr algn="ctr"/>
+          </a:p>
+        </p:txBody>
+      </p:sp>
+      <p:sp>
+        <p:nvSpPr>
+          <p:cNvPr id="79" name="C1-E33 text 77" descr="sci-ppt:o077"/>
           <p:cNvSpPr txBox="1"/>
           <p:nvPr/>
         </p:nvSpPr>
         <p:spPr>
           <a:xfrm>
-            <a:off x="5242560" y="1987296"/>
-            <a:ext cx="5852160" cy="359054"/>
+            <a:off x="822960" y="960120"/>
+            <a:ext cx="3200400" cy="270383"/>
           </a:xfrm>
           <a:prstGeom prst="rect">
             <a:avLst/>
@@ -3330,7 +6675,7 @@
           <a:effectLst/>
         </p:spPr>
         <p:txBody>
-          <a:bodyPr wrap="none" lIns="27432" rIns="27432" tIns="18288" bIns="18288" anchor="ctr">
+          <a:bodyPr wrap="none" lIns="18288" rIns="18288" tIns="18288" bIns="18288" anchor="t">
             <a:spAutoFit/>
           </a:bodyPr>
           <a:lstStyle/>
@@ -3341,51 +6686,67 @@
               </a:spcAft>
             </a:pPr>
             <a:r>
-              <a:rPr sz="1823" b="0" i="0">
+              <a:rPr sz="1450" b="1" i="0">
+                <a:solidFill>
+                  <a:srgbClr val="8EDBD4"/>
+                </a:solidFill>
+                <a:latin typeface="Arial"/>
+              </a:rPr>
+              <a:t>Speed</a:t>
+            </a:r>
+          </a:p>
+        </p:txBody>
+      </p:sp>
+      <p:sp>
+        <p:nvSpPr>
+          <p:cNvPr id="80" name="C1-E33 text 78" descr="sci-ppt:o078"/>
+          <p:cNvSpPr txBox="1"/>
+          <p:nvPr/>
+        </p:nvSpPr>
+        <p:spPr>
+          <a:xfrm>
+            <a:off x="822960" y="5257800"/>
+            <a:ext cx="3383280" cy="223900"/>
+          </a:xfrm>
+          <a:prstGeom prst="rect">
+            <a:avLst/>
+          </a:prstGeom>
+          <a:noFill/>
+          <a:effectLst/>
+        </p:spPr>
+        <p:txBody>
+          <a:bodyPr wrap="none" lIns="18288" rIns="18288" tIns="18288" bIns="18288" anchor="t">
+            <a:spAutoFit/>
+          </a:bodyPr>
+          <a:lstStyle/>
+          <a:p>
+            <a:pPr algn="l">
+              <a:spcAft>
+                <a:spcPts val="0"/>
+              </a:spcAft>
+            </a:pPr>
+            <a:r>
+              <a:rPr sz="1150" b="0" i="0">
                 <a:solidFill>
                   <a:srgbClr val="E7F0F3"/>
                 </a:solidFill>
                 <a:latin typeface="Arial"/>
               </a:rPr>
-              <a:t>p∞, ρ, μ; interface: σ</a:t>
-            </a:r>
-          </a:p>
-        </p:txBody>
-      </p:sp>
-      <p:cxnSp>
-        <p:nvCxnSpPr>
-          <p:cNvPr id="9" name="arrow8" descr="sci-ppt:C1-E33-008"/>
-          <p:cNvCxnSpPr/>
-          <p:nvPr/>
-        </p:nvCxnSpPr>
-        <p:spPr>
-          <a:xfrm>
-            <a:off x="3291840" y="2621280"/>
-            <a:ext cx="1706880" cy="1158240"/>
-          </a:xfrm>
-          <a:prstGeom prst="line">
-            <a:avLst/>
-          </a:prstGeom>
-          <a:ln w="25400">
-            <a:solidFill>
-              <a:srgbClr val="8EDBD4"/>
-            </a:solidFill>
-            <a:headEnd type="none" w="med" len="med"/>
-            <a:tailEnd type="triangle" w="med" len="med"/>
-          </a:ln>
-          <a:effectLst/>
-        </p:spPr>
-      </p:cxnSp>
-      <p:sp>
-        <p:nvSpPr>
-          <p:cNvPr id="10" name="text9" descr="sci-ppt:C1-E33-009"/>
+              <a:t>Ṙ = −√{(2Δp_c/3ρ)[(Rₘₐₓ/R)³ − 1]}</a:t>
+            </a:r>
+          </a:p>
+        </p:txBody>
+      </p:sp>
+      <p:sp>
+        <p:nvSpPr>
+          <p:cNvPr id="81" name="C1-E33 text 79" descr="sci-ppt:o079"/>
           <p:cNvSpPr txBox="1"/>
           <p:nvPr/>
         </p:nvSpPr>
         <p:spPr>
           <a:xfrm>
-            <a:off x="5364480" y="3657600"/>
-            <a:ext cx="1950720" cy="340156"/>
+            <a:off x="4937760" y="960120"/>
+            <a:ext cx="3200400" cy="270383"/>
           </a:xfrm>
           <a:prstGeom prst="rect">
             <a:avLst/>
@@ -3394,7 +6755,7 @@
           <a:effectLst/>
         </p:spPr>
         <p:txBody>
-          <a:bodyPr wrap="none" lIns="27432" rIns="27432" tIns="18288" bIns="18288" anchor="ctr">
+          <a:bodyPr wrap="none" lIns="18288" rIns="18288" tIns="18288" bIns="18288" anchor="t">
             <a:spAutoFit/>
           </a:bodyPr>
           <a:lstStyle/>
@@ -3405,63 +6766,55 @@
               </a:spcAft>
             </a:pPr>
             <a:r>
-              <a:rPr sz="1728" b="0" i="0">
+              <a:rPr sz="1450" b="1" i="0">
+                <a:solidFill>
+                  <a:srgbClr val="F2B880"/>
+                </a:solidFill>
+                <a:latin typeface="Arial"/>
+              </a:rPr>
+              <a:t>Time</a:t>
+            </a:r>
+          </a:p>
+        </p:txBody>
+      </p:sp>
+      <p:sp>
+        <p:nvSpPr>
+          <p:cNvPr id="82" name="C1-E33 text 80" descr="sci-ppt:o080"/>
+          <p:cNvSpPr txBox="1"/>
+          <p:nvPr/>
+        </p:nvSpPr>
+        <p:spPr>
+          <a:xfrm>
+            <a:off x="4937760" y="5257800"/>
+            <a:ext cx="3383280" cy="402081"/>
+          </a:xfrm>
+          <a:prstGeom prst="rect">
+            <a:avLst/>
+          </a:prstGeom>
+          <a:noFill/>
+          <a:effectLst/>
+        </p:spPr>
+        <p:txBody>
+          <a:bodyPr wrap="none" lIns="18288" rIns="18288" tIns="18288" bIns="18288" anchor="t">
+            <a:spAutoFit/>
+          </a:bodyPr>
+          <a:lstStyle/>
+          <a:p>
+            <a:pPr algn="l">
+              <a:spcAft>
+                <a:spcPts val="0"/>
+              </a:spcAft>
+            </a:pPr>
+            <a:r>
+              <a:rPr sz="1150" b="0" i="0">
                 <a:solidFill>
                   <a:srgbClr val="E7F0F3"/>
                 </a:solidFill>
                 <a:latin typeface="Arial"/>
               </a:rPr>
-              <a:t>r ≥ R</a:t>
-            </a:r>
-          </a:p>
-        </p:txBody>
-      </p:sp>
-      <p:cxnSp>
-        <p:nvCxnSpPr>
-          <p:cNvPr id="11" name="arrow10" descr="sci-ppt:C1-E33-010"/>
-          <p:cNvCxnSpPr/>
-          <p:nvPr/>
-        </p:nvCxnSpPr>
-        <p:spPr>
-          <a:xfrm>
-            <a:off x="4998720" y="2621280"/>
-            <a:ext cx="792480" cy="0"/>
-          </a:xfrm>
-          <a:prstGeom prst="line">
-            <a:avLst/>
-          </a:prstGeom>
-          <a:ln w="25400">
-            <a:solidFill>
-              <a:srgbClr val="8EDBD4"/>
-            </a:solidFill>
-            <a:headEnd type="none" w="med" len="med"/>
-            <a:tailEnd type="triangle" w="med" len="med"/>
-          </a:ln>
-          <a:effectLst/>
-        </p:spPr>
-      </p:cxnSp>
-      <p:sp>
-        <p:nvSpPr>
-          <p:cNvPr id="12" name="text11" descr="sci-ppt:C1-E33-011"/>
-          <p:cNvSpPr txBox="1"/>
-          <p:nvPr/>
-        </p:nvSpPr>
-        <p:spPr>
-          <a:xfrm>
-            <a:off x="5059680" y="2865120"/>
-            <a:ext cx="3291840" cy="321259"/>
-          </a:xfrm>
-          <a:prstGeom prst="rect">
-            <a:avLst/>
-          </a:prstGeom>
-          <a:noFill/>
-          <a:effectLst/>
-        </p:spPr>
-        <p:txBody>
-          <a:bodyPr wrap="none" lIns="27432" rIns="27432" tIns="18288" bIns="18288" anchor="ctr">
-            <a:spAutoFit/>
-          </a:bodyPr>
-          <a:lstStyle/>
+              <a:t>t_c = B(5/6,1/2)/√6 · Rₘₐₓ√(ρ/Δp_c) = 2.744</a:t>
+            </a:r>
+          </a:p>
           <a:p>
             <a:pPr algn="l">
               <a:spcAft>
@@ -3469,27 +6822,27 @@
               </a:spcAft>
             </a:pPr>
             <a:r>
-              <a:rPr sz="1632" b="0" i="0">
+              <a:rPr sz="1150" b="0" i="0">
                 <a:solidFill>
                   <a:srgbClr val="E7F0F3"/>
                 </a:solidFill>
                 <a:latin typeface="Arial"/>
               </a:rPr>
-              <a:t>+e_r (coordinate)</a:t>
-            </a:r>
-          </a:p>
-        </p:txBody>
-      </p:sp>
-      <p:sp>
-        <p:nvSpPr>
-          <p:cNvPr id="13" name="text12" descr="sci-ppt:C1-E33-012"/>
+              <a:t>µs</a:t>
+            </a:r>
+          </a:p>
+        </p:txBody>
+      </p:sp>
+      <p:sp>
+        <p:nvSpPr>
+          <p:cNvPr id="83" name="C1-E33 text 81" descr="sci-ppt:o081"/>
           <p:cNvSpPr txBox="1"/>
           <p:nvPr/>
         </p:nvSpPr>
         <p:spPr>
           <a:xfrm>
-            <a:off x="1219200" y="4206240"/>
-            <a:ext cx="9753600" cy="340156"/>
+            <a:off x="8961120" y="960120"/>
+            <a:ext cx="3200400" cy="270383"/>
           </a:xfrm>
           <a:prstGeom prst="rect">
             <a:avLst/>
@@ -3498,7 +6851,7 @@
           <a:effectLst/>
         </p:spPr>
         <p:txBody>
-          <a:bodyPr wrap="none" lIns="27432" rIns="27432" tIns="18288" bIns="18288" anchor="ctr">
+          <a:bodyPr wrap="none" lIns="18288" rIns="18288" tIns="18288" bIns="18288" anchor="t">
             <a:spAutoFit/>
           </a:bodyPr>
           <a:lstStyle/>
@@ -3509,51 +6862,67 @@
               </a:spcAft>
             </a:pPr>
             <a:r>
-              <a:rPr sz="1728" b="0" i="0">
+              <a:rPr sz="1450" b="1" i="0">
+                <a:solidFill>
+                  <a:srgbClr val="7FC8F8"/>
+                </a:solidFill>
+                <a:latin typeface="Arial"/>
+              </a:rPr>
+              <a:t>Energy</a:t>
+            </a:r>
+          </a:p>
+        </p:txBody>
+      </p:sp>
+      <p:sp>
+        <p:nvSpPr>
+          <p:cNvPr id="84" name="C1-E33 text 82" descr="sci-ppt:o082"/>
+          <p:cNvSpPr txBox="1"/>
+          <p:nvPr/>
+        </p:nvSpPr>
+        <p:spPr>
+          <a:xfrm>
+            <a:off x="8961120" y="5257800"/>
+            <a:ext cx="3383280" cy="223900"/>
+          </a:xfrm>
+          <a:prstGeom prst="rect">
+            <a:avLst/>
+          </a:prstGeom>
+          <a:noFill/>
+          <a:effectLst/>
+        </p:spPr>
+        <p:txBody>
+          <a:bodyPr wrap="none" lIns="18288" rIns="18288" tIns="18288" bIns="18288" anchor="t">
+            <a:spAutoFit/>
+          </a:bodyPr>
+          <a:lstStyle/>
+          <a:p>
+            <a:pPr algn="l">
+              <a:spcAft>
+                <a:spcPts val="0"/>
+              </a:spcAft>
+            </a:pPr>
+            <a:r>
+              <a:rPr sz="1150" b="0" i="0">
                 <a:solidFill>
                   <a:srgbClr val="E7F0F3"/>
                 </a:solidFill>
                 <a:latin typeface="Arial"/>
               </a:rPr>
-              <a:t>Signed wall speed: Ṙ; acceleration: R̈</a:t>
-            </a:r>
-          </a:p>
-        </p:txBody>
-      </p:sp>
-      <p:cxnSp>
-        <p:nvCxnSpPr>
-          <p:cNvPr id="14" name="arrow13" descr="sci-ppt:C1-E33-013"/>
-          <p:cNvCxnSpPr/>
-          <p:nvPr/>
-        </p:nvCxnSpPr>
-        <p:spPr>
-          <a:xfrm>
-            <a:off x="1950720" y="2621280"/>
-            <a:ext cx="548640" cy="0"/>
-          </a:xfrm>
-          <a:prstGeom prst="line">
-            <a:avLst/>
-          </a:prstGeom>
-          <a:ln w="25400">
-            <a:solidFill>
-              <a:srgbClr val="F6BC77"/>
-            </a:solidFill>
-            <a:headEnd type="none" w="med" len="med"/>
-            <a:tailEnd type="triangle" w="med" len="med"/>
-          </a:ln>
-          <a:effectLst/>
-        </p:spPr>
-      </p:cxnSp>
-      <p:sp>
-        <p:nvSpPr>
-          <p:cNvPr id="15" name="text14" descr="sci-ppt:C1-E33-014"/>
+              <a:t>Kₗ = (4π/3)Δp_c(Rₘₐₓ³ − R³)</a:t>
+            </a:r>
+          </a:p>
+        </p:txBody>
+      </p:sp>
+      <p:sp>
+        <p:nvSpPr>
+          <p:cNvPr id="85" name="C1-E33 text 83" descr="sci-ppt:o083"/>
           <p:cNvSpPr txBox="1"/>
           <p:nvPr/>
         </p:nvSpPr>
         <p:spPr>
           <a:xfrm>
-            <a:off x="1097280" y="975360"/>
-            <a:ext cx="4267200" cy="340156"/>
+            <a:off x="457200" y="5897880"/>
+            <a:ext cx="11338560" cy="433070"/>
           </a:xfrm>
           <a:prstGeom prst="rect">
             <a:avLst/>
@@ -3562,7 +6931,7 @@
           <a:effectLst/>
         </p:spPr>
         <p:txBody>
-          <a:bodyPr wrap="none" lIns="27432" rIns="27432" tIns="18288" bIns="18288" anchor="ctr">
+          <a:bodyPr wrap="none" lIns="18288" rIns="18288" tIns="18288" bIns="18288" anchor="t">
             <a:spAutoFit/>
           </a:bodyPr>
           <a:lstStyle/>
@@ -3573,39 +6942,15 @@
               </a:spcAft>
             </a:pPr>
             <a:r>
-              <a:rPr sz="1728" b="0" i="0">
+              <a:rPr sz="1250" b="0" i="0">
                 <a:solidFill>
-                  <a:srgbClr val="F6BC77"/>
+                  <a:srgbClr val="F2B880"/>
                 </a:solidFill>
                 <a:latin typeface="Arial"/>
               </a:rPr>
-              <a:t>Collapse: Ṙ &lt; 0</a:t>
-            </a:r>
-          </a:p>
-        </p:txBody>
-      </p:sp>
-      <p:sp>
-        <p:nvSpPr>
-          <p:cNvPr id="16" name="text15" descr="sci-ppt:C1-E33-015"/>
-          <p:cNvSpPr txBox="1"/>
-          <p:nvPr/>
-        </p:nvSpPr>
-        <p:spPr>
-          <a:xfrm>
-            <a:off x="365760" y="4974336"/>
-            <a:ext cx="5547360" cy="321259"/>
-          </a:xfrm>
-          <a:prstGeom prst="rect">
-            <a:avLst/>
-          </a:prstGeom>
-          <a:noFill/>
-          <a:effectLst/>
-        </p:spPr>
-        <p:txBody>
-          <a:bodyPr wrap="none" lIns="27432" rIns="27432" tIns="18288" bIns="18288" anchor="ctr">
-            <a:spAutoFit/>
-          </a:bodyPr>
-          <a:lstStyle/>
+              <a:t>The singular speed belongs to an ideal radial trajectory (no gas, viscosity, tension or compressibility), not to a validated physical</a:t>
+            </a:r>
+          </a:p>
           <a:p>
             <a:pPr algn="l">
               <a:spcAft>
@@ -3613,27 +6958,27 @@
               </a:spcAft>
             </a:pPr>
             <a:r>
-              <a:rPr sz="1632" b="0" i="0">
+              <a:rPr sz="1250" b="0" i="0">
                 <a:solidFill>
-                  <a:srgbClr val="E7F0F3"/>
+                  <a:srgbClr val="F2B880"/>
                 </a:solidFill>
                 <a:latin typeface="Arial"/>
               </a:rPr>
-              <a:t>Rmax</a:t>
-            </a:r>
-          </a:p>
-        </p:txBody>
-      </p:sp>
-      <p:sp>
-        <p:nvSpPr>
-          <p:cNvPr id="17" name="text16" descr="sci-ppt:C1-E33-016"/>
+              <a:t>maximum.</a:t>
+            </a:r>
+          </a:p>
+        </p:txBody>
+      </p:sp>
+      <p:sp>
+        <p:nvSpPr>
+          <p:cNvPr id="86" name="C1-E33 text 84" descr="sci-ppt:o084"/>
           <p:cNvSpPr txBox="1"/>
           <p:nvPr/>
         </p:nvSpPr>
         <p:spPr>
           <a:xfrm>
-            <a:off x="365760" y="5266944"/>
-            <a:ext cx="5547360" cy="321259"/>
+            <a:off x="320040" y="6510528"/>
+            <a:ext cx="11521440" cy="200660"/>
           </a:xfrm>
           <a:prstGeom prst="rect">
             <a:avLst/>
@@ -3642,7 +6987,7 @@
           <a:effectLst/>
         </p:spPr>
         <p:txBody>
-          <a:bodyPr wrap="none" lIns="27432" rIns="27432" tIns="18288" bIns="18288" anchor="ctr">
+          <a:bodyPr wrap="none" lIns="18288" rIns="18288" tIns="18288" bIns="18288" anchor="t">
             <a:spAutoFit/>
           </a:bodyPr>
           <a:lstStyle/>
@@ -3653,293 +6998,13 @@
               </a:spcAft>
             </a:pPr>
             <a:r>
-              <a:rPr sz="1632" b="0" i="0">
-                <a:solidFill>
-                  <a:srgbClr val="E7F0F3"/>
-                </a:solidFill>
-                <a:latin typeface="Arial"/>
-              </a:rPr>
-              <a:t>Ṙ &lt; 0</a:t>
-            </a:r>
-          </a:p>
-        </p:txBody>
-      </p:sp>
-      <p:sp>
-        <p:nvSpPr>
-          <p:cNvPr id="18" name="text17" descr="sci-ppt:C1-E33-017"/>
-          <p:cNvSpPr txBox="1"/>
-          <p:nvPr/>
-        </p:nvSpPr>
-        <p:spPr>
-          <a:xfrm>
-            <a:off x="365760" y="5559552"/>
-            <a:ext cx="5547360" cy="321259"/>
-          </a:xfrm>
-          <a:prstGeom prst="rect">
-            <a:avLst/>
-          </a:prstGeom>
-          <a:noFill/>
-          <a:effectLst/>
-        </p:spPr>
-        <p:txBody>
-          <a:bodyPr wrap="none" lIns="27432" rIns="27432" tIns="18288" bIns="18288" anchor="ctr">
-            <a:spAutoFit/>
-          </a:bodyPr>
-          <a:lstStyle/>
-          <a:p>
-            <a:pPr algn="l">
-              <a:spcAft>
-                <a:spcPts val="0"/>
-              </a:spcAft>
-            </a:pPr>
-            <a:r>
-              <a:rPr sz="1632" b="0" i="0">
-                <a:solidFill>
-                  <a:srgbClr val="E7F0F3"/>
-                </a:solidFill>
-                <a:latin typeface="Arial"/>
-              </a:rPr>
-              <a:t>ρ</a:t>
-            </a:r>
-          </a:p>
-        </p:txBody>
-      </p:sp>
-      <p:sp>
-        <p:nvSpPr>
-          <p:cNvPr id="19" name="text18" descr="sci-ppt:C1-E33-018"/>
-          <p:cNvSpPr txBox="1"/>
-          <p:nvPr/>
-        </p:nvSpPr>
-        <p:spPr>
-          <a:xfrm>
-            <a:off x="365760" y="5852160"/>
-            <a:ext cx="5547360" cy="321259"/>
-          </a:xfrm>
-          <a:prstGeom prst="rect">
-            <a:avLst/>
-          </a:prstGeom>
-          <a:noFill/>
-          <a:effectLst/>
-        </p:spPr>
-        <p:txBody>
-          <a:bodyPr wrap="none" lIns="27432" rIns="27432" tIns="18288" bIns="18288" anchor="ctr">
-            <a:spAutoFit/>
-          </a:bodyPr>
-          <a:lstStyle/>
-          <a:p>
-            <a:pPr algn="l">
-              <a:spcAft>
-                <a:spcPts val="0"/>
-              </a:spcAft>
-            </a:pPr>
-            <a:r>
-              <a:rPr sz="1632" b="0" i="0">
-                <a:solidFill>
-                  <a:srgbClr val="E7F0F3"/>
-                </a:solidFill>
-                <a:latin typeface="Arial"/>
-              </a:rPr>
-              <a:t>B(5/6,1/2)/√6</a:t>
-            </a:r>
-          </a:p>
-        </p:txBody>
-      </p:sp>
-      <p:sp>
-        <p:nvSpPr>
-          <p:cNvPr id="20" name="text19" descr="sci-ppt:C1-E33-019"/>
-          <p:cNvSpPr txBox="1"/>
-          <p:nvPr/>
-        </p:nvSpPr>
-        <p:spPr>
-          <a:xfrm>
-            <a:off x="6156960" y="4974336"/>
-            <a:ext cx="5547360" cy="321259"/>
-          </a:xfrm>
-          <a:prstGeom prst="rect">
-            <a:avLst/>
-          </a:prstGeom>
-          <a:noFill/>
-          <a:effectLst/>
-        </p:spPr>
-        <p:txBody>
-          <a:bodyPr wrap="none" lIns="27432" rIns="27432" tIns="18288" bIns="18288" anchor="ctr">
-            <a:spAutoFit/>
-          </a:bodyPr>
-          <a:lstStyle/>
-          <a:p>
-            <a:pPr algn="l">
-              <a:spcAft>
-                <a:spcPts val="0"/>
-              </a:spcAft>
-            </a:pPr>
-            <a:r>
-              <a:rPr sz="1632" b="0" i="0">
-                <a:solidFill>
-                  <a:srgbClr val="E7F0F3"/>
-                </a:solidFill>
-                <a:latin typeface="Arial"/>
-              </a:rPr>
-              <a:t>R → 0</a:t>
-            </a:r>
-          </a:p>
-        </p:txBody>
-      </p:sp>
-      <p:sp>
-        <p:nvSpPr>
-          <p:cNvPr id="21" name="text20" descr="sci-ppt:C1-E33-020"/>
-          <p:cNvSpPr txBox="1"/>
-          <p:nvPr/>
-        </p:nvSpPr>
-        <p:spPr>
-          <a:xfrm>
-            <a:off x="6156960" y="5266944"/>
-            <a:ext cx="5547360" cy="321259"/>
-          </a:xfrm>
-          <a:prstGeom prst="rect">
-            <a:avLst/>
-          </a:prstGeom>
-          <a:noFill/>
-          <a:effectLst/>
-        </p:spPr>
-        <p:txBody>
-          <a:bodyPr wrap="none" lIns="27432" rIns="27432" tIns="18288" bIns="18288" anchor="ctr">
-            <a:spAutoFit/>
-          </a:bodyPr>
-          <a:lstStyle/>
-          <a:p>
-            <a:pPr algn="l">
-              <a:spcAft>
-                <a:spcPts val="0"/>
-              </a:spcAft>
-            </a:pPr>
-            <a:r>
-              <a:rPr sz="1632" b="0" i="0">
-                <a:solidFill>
-                  <a:srgbClr val="E7F0F3"/>
-                </a:solidFill>
-                <a:latin typeface="Arial"/>
-              </a:rPr>
-              <a:t>Δpc</a:t>
-            </a:r>
-          </a:p>
-        </p:txBody>
-      </p:sp>
-      <p:sp>
-        <p:nvSpPr>
-          <p:cNvPr id="22" name="text21" descr="sci-ppt:C1-E33-021"/>
-          <p:cNvSpPr txBox="1"/>
-          <p:nvPr/>
-        </p:nvSpPr>
-        <p:spPr>
-          <a:xfrm>
-            <a:off x="6156960" y="5559552"/>
-            <a:ext cx="5547360" cy="321259"/>
-          </a:xfrm>
-          <a:prstGeom prst="rect">
-            <a:avLst/>
-          </a:prstGeom>
-          <a:noFill/>
-          <a:effectLst/>
-        </p:spPr>
-        <p:txBody>
-          <a:bodyPr wrap="none" lIns="27432" rIns="27432" tIns="18288" bIns="18288" anchor="ctr">
-            <a:spAutoFit/>
-          </a:bodyPr>
-          <a:lstStyle/>
-          <a:p>
-            <a:pPr algn="l">
-              <a:spcAft>
-                <a:spcPts val="0"/>
-              </a:spcAft>
-            </a:pPr>
-            <a:r>
-              <a:rPr sz="1632" b="0" i="0">
-                <a:solidFill>
-                  <a:srgbClr val="E7F0F3"/>
-                </a:solidFill>
-                <a:latin typeface="Arial"/>
-              </a:rPr>
-              <a:t>tc</a:t>
-            </a:r>
-          </a:p>
-        </p:txBody>
-      </p:sp>
-      <p:sp>
-        <p:nvSpPr>
-          <p:cNvPr id="23" name="text22" descr="sci-ppt:C1-E33-022"/>
-          <p:cNvSpPr txBox="1"/>
-          <p:nvPr/>
-        </p:nvSpPr>
-        <p:spPr>
-          <a:xfrm>
-            <a:off x="6156960" y="5852160"/>
-            <a:ext cx="5547360" cy="321259"/>
-          </a:xfrm>
-          <a:prstGeom prst="rect">
-            <a:avLst/>
-          </a:prstGeom>
-          <a:noFill/>
-          <a:effectLst/>
-        </p:spPr>
-        <p:txBody>
-          <a:bodyPr wrap="none" lIns="27432" rIns="27432" tIns="18288" bIns="18288" anchor="ctr">
-            <a:spAutoFit/>
-          </a:bodyPr>
-          <a:lstStyle/>
-          <a:p>
-            <a:pPr algn="l">
-              <a:spcAft>
-                <a:spcPts val="0"/>
-              </a:spcAft>
-            </a:pPr>
-            <a:r>
-              <a:rPr sz="1632" b="0" i="0">
-                <a:solidFill>
-                  <a:srgbClr val="E7F0F3"/>
-                </a:solidFill>
-                <a:latin typeface="Arial"/>
-              </a:rPr>
-              <a:t>Kl finite</a:t>
-            </a:r>
-          </a:p>
-        </p:txBody>
-      </p:sp>
-      <p:sp>
-        <p:nvSpPr>
-          <p:cNvPr id="24" name="text23" descr="sci-ppt:C1-E33-023"/>
-          <p:cNvSpPr txBox="1"/>
-          <p:nvPr/>
-        </p:nvSpPr>
-        <p:spPr>
-          <a:xfrm>
-            <a:off x="365760" y="6339840"/>
-            <a:ext cx="11277600" cy="302361"/>
-          </a:xfrm>
-          <a:prstGeom prst="rect">
-            <a:avLst/>
-          </a:prstGeom>
-          <a:noFill/>
-          <a:effectLst/>
-        </p:spPr>
-        <p:txBody>
-          <a:bodyPr wrap="none" lIns="27432" rIns="27432" tIns="18288" bIns="18288" anchor="ctr">
-            <a:spAutoFit/>
-          </a:bodyPr>
-          <a:lstStyle/>
-          <a:p>
-            <a:pPr algn="l">
-              <a:spcAft>
-                <a:spcPts val="0"/>
-              </a:spcAft>
-            </a:pPr>
-            <a:r>
-              <a:rPr sz="1536" b="0" i="0">
+              <a:rPr sz="1000" b="0" i="0">
                 <a:solidFill>
                   <a:srgbClr val="B4C7D2"/>
                 </a:solidFill>
                 <a:latin typeface="Arial"/>
               </a:rPr>
-              <a:t>Finite time and finite energy coexist with an excluded wall-speed singularity</a:t>
+              <a:t>Teaching inputs Rₘₐₓ = 30 µm, ρ = 1000 kg/m³, Δp_c = 100 kPa (Eqs. C1-E15, E16, E18).</a:t>
             </a:r>
           </a:p>
         </p:txBody>

--- a/assets/figures-editable/c1-c2/c1-e33.pptx
+++ b/assets/figures-editable/c1-c2/c1-e33.pptx
@@ -3131,7 +3131,7 @@
                 </a:solidFill>
                 <a:latin typeface="Arial"/>
               </a:rPr>
-              <a:t>C1-E33 · Original formulas quoted for defense 2</a:t>
+              <a:t>C1-E33 · Original formulas quoted for defense 3</a:t>
             </a:r>
           </a:p>
         </p:txBody>
@@ -3144,8 +3144,8 @@
         </p:nvCxnSpPr>
         <p:spPr>
           <a:xfrm>
-            <a:off x="822960" y="4572000"/>
-            <a:ext cx="3291840" cy="0"/>
+            <a:off x="914400" y="3840480"/>
+            <a:ext cx="3566160" cy="0"/>
           </a:xfrm>
           <a:prstGeom prst="line">
             <a:avLst/>
@@ -3166,8 +3166,8 @@
         </p:nvCxnSpPr>
         <p:spPr>
           <a:xfrm>
-            <a:off x="822960" y="1554480"/>
-            <a:ext cx="0" cy="3017520"/>
+            <a:off x="914400" y="1554480"/>
+            <a:ext cx="0" cy="2286000"/>
           </a:xfrm>
           <a:prstGeom prst="line">
             <a:avLst/>
@@ -3188,7 +3188,7 @@
         </p:nvCxnSpPr>
         <p:spPr>
           <a:xfrm>
-            <a:off x="822960" y="4572000"/>
+            <a:off x="914400" y="3840480"/>
             <a:ext cx="0" cy="64008"/>
           </a:xfrm>
           <a:prstGeom prst="line">
@@ -3210,8 +3210,8 @@
         </p:nvCxnSpPr>
         <p:spPr>
           <a:xfrm>
-            <a:off x="822960" y="1554480"/>
-            <a:ext cx="0" cy="3017520"/>
+            <a:off x="914400" y="1554480"/>
+            <a:ext cx="0" cy="2286000"/>
           </a:xfrm>
           <a:prstGeom prst="line">
             <a:avLst/>
@@ -3232,7 +3232,7 @@
         </p:nvSpPr>
         <p:spPr>
           <a:xfrm>
-            <a:off x="365760" y="4654296"/>
+            <a:off x="457200" y="3922776"/>
             <a:ext cx="914400" cy="208407"/>
           </a:xfrm>
           <a:prstGeom prst="rect">
@@ -3259,7 +3259,7 @@
                 </a:solidFill>
                 <a:latin typeface="Arial"/>
               </a:rPr>
-              <a:t>0.05</a:t>
+              <a:t>0</a:t>
             </a:r>
           </a:p>
         </p:txBody>
@@ -3272,7 +3272,7 @@
         </p:nvCxnSpPr>
         <p:spPr>
           <a:xfrm>
-            <a:off x="1584620" y="4572000"/>
+            <a:off x="2697480" y="3840480"/>
             <a:ext cx="0" cy="64008"/>
           </a:xfrm>
           <a:prstGeom prst="line">
@@ -3294,8 +3294,8 @@
         </p:nvCxnSpPr>
         <p:spPr>
           <a:xfrm>
-            <a:off x="1584620" y="1554480"/>
-            <a:ext cx="0" cy="3017520"/>
+            <a:off x="2697480" y="1554480"/>
+            <a:ext cx="0" cy="2286000"/>
           </a:xfrm>
           <a:prstGeom prst="line">
             <a:avLst/>
@@ -3316,7 +3316,7 @@
         </p:nvSpPr>
         <p:spPr>
           <a:xfrm>
-            <a:off x="1127420" y="4654296"/>
+            <a:off x="2240280" y="3922776"/>
             <a:ext cx="914400" cy="208407"/>
           </a:xfrm>
           <a:prstGeom prst="rect">
@@ -3343,7 +3343,7 @@
                 </a:solidFill>
                 <a:latin typeface="Arial"/>
               </a:rPr>
-              <a:t>0.1</a:t>
+              <a:t>1</a:t>
             </a:r>
           </a:p>
         </p:txBody>
@@ -3356,7 +3356,7 @@
         </p:nvCxnSpPr>
         <p:spPr>
           <a:xfrm>
-            <a:off x="3353139" y="4572000"/>
+            <a:off x="4480560" y="3840480"/>
             <a:ext cx="0" cy="64008"/>
           </a:xfrm>
           <a:prstGeom prst="line">
@@ -3378,8 +3378,8 @@
         </p:nvCxnSpPr>
         <p:spPr>
           <a:xfrm>
-            <a:off x="3353139" y="1554480"/>
-            <a:ext cx="0" cy="3017520"/>
+            <a:off x="4480560" y="1554480"/>
+            <a:ext cx="0" cy="2286000"/>
           </a:xfrm>
           <a:prstGeom prst="line">
             <a:avLst/>
@@ -3400,7 +3400,7 @@
         </p:nvSpPr>
         <p:spPr>
           <a:xfrm>
-            <a:off x="2895939" y="4654296"/>
+            <a:off x="4023360" y="3922776"/>
             <a:ext cx="914400" cy="208407"/>
           </a:xfrm>
           <a:prstGeom prst="rect">
@@ -3427,7 +3427,7 @@
                 </a:solidFill>
                 <a:latin typeface="Arial"/>
               </a:rPr>
-              <a:t>0.5</a:t>
+              <a:t>2</a:t>
             </a:r>
           </a:p>
         </p:txBody>
@@ -3440,8 +3440,8 @@
         </p:nvCxnSpPr>
         <p:spPr>
           <a:xfrm>
-            <a:off x="4114800" y="4572000"/>
-            <a:ext cx="0" cy="64008"/>
+            <a:off x="850392" y="3840480"/>
+            <a:ext cx="64008" cy="0"/>
           </a:xfrm>
           <a:prstGeom prst="line">
             <a:avLst/>
@@ -3462,69 +3462,7 @@
         </p:nvCxnSpPr>
         <p:spPr>
           <a:xfrm>
-            <a:off x="4114800" y="1554480"/>
-            <a:ext cx="0" cy="3017520"/>
-          </a:xfrm>
-          <a:prstGeom prst="line">
-            <a:avLst/>
-          </a:prstGeom>
-          <a:ln w="7620">
-            <a:solidFill>
-              <a:srgbClr val="2E4756"/>
-            </a:solidFill>
-          </a:ln>
-          <a:effectLst/>
-        </p:spPr>
-      </p:cxnSp>
-      <p:sp>
-        <p:nvSpPr>
-          <p:cNvPr id="16" name="C1-E33 text 14" descr="sci-ppt:o014"/>
-          <p:cNvSpPr txBox="1"/>
-          <p:nvPr/>
-        </p:nvSpPr>
-        <p:spPr>
-          <a:xfrm>
-            <a:off x="3657600" y="4654296"/>
-            <a:ext cx="914400" cy="208407"/>
-          </a:xfrm>
-          <a:prstGeom prst="rect">
-            <a:avLst/>
-          </a:prstGeom>
-          <a:noFill/>
-          <a:effectLst/>
-        </p:spPr>
-        <p:txBody>
-          <a:bodyPr wrap="none" lIns="18288" rIns="18288" tIns="18288" bIns="18288" anchor="t">
-            <a:spAutoFit/>
-          </a:bodyPr>
-          <a:lstStyle/>
-          <a:p>
-            <a:pPr algn="ctr">
-              <a:spcAft>
-                <a:spcPts val="0"/>
-              </a:spcAft>
-            </a:pPr>
-            <a:r>
-              <a:rPr sz="1050" b="0" i="0">
-                <a:solidFill>
-                  <a:srgbClr val="B4C7D2"/>
-                </a:solidFill>
-                <a:latin typeface="Arial"/>
-              </a:rPr>
-              <a:t>1</a:t>
-            </a:r>
-          </a:p>
-        </p:txBody>
-      </p:sp>
-      <p:cxnSp>
-        <p:nvCxnSpPr>
-          <p:cNvPr id="17" name="C1-E33 line 15" descr="sci-ppt:o015"/>
-          <p:cNvCxnSpPr/>
-          <p:nvPr/>
-        </p:nvCxnSpPr>
-        <p:spPr>
-          <a:xfrm>
-            <a:off x="758952" y="4572000"/>
+            <a:off x="850392" y="2926080"/>
             <a:ext cx="64008" cy="0"/>
           </a:xfrm>
           <a:prstGeom prst="line">
@@ -3540,13 +3478,75 @@
       </p:cxnSp>
       <p:cxnSp>
         <p:nvCxnSpPr>
+          <p:cNvPr id="16" name="C1-E33 line 14" descr="sci-ppt:o014"/>
+          <p:cNvCxnSpPr/>
+          <p:nvPr/>
+        </p:nvCxnSpPr>
+        <p:spPr>
+          <a:xfrm>
+            <a:off x="914400" y="2926080"/>
+            <a:ext cx="3566160" cy="0"/>
+          </a:xfrm>
+          <a:prstGeom prst="line">
+            <a:avLst/>
+          </a:prstGeom>
+          <a:ln w="7620">
+            <a:solidFill>
+              <a:srgbClr val="2E4756"/>
+            </a:solidFill>
+          </a:ln>
+          <a:effectLst/>
+        </p:spPr>
+      </p:cxnSp>
+      <p:sp>
+        <p:nvSpPr>
+          <p:cNvPr id="17" name="C1-E33 text 15" descr="sci-ppt:o015"/>
+          <p:cNvSpPr txBox="1"/>
+          <p:nvPr/>
+        </p:nvSpPr>
+        <p:spPr>
+          <a:xfrm>
+            <a:off x="45720" y="2843784"/>
+            <a:ext cx="777240" cy="208407"/>
+          </a:xfrm>
+          <a:prstGeom prst="rect">
+            <a:avLst/>
+          </a:prstGeom>
+          <a:noFill/>
+          <a:effectLst/>
+        </p:spPr>
+        <p:txBody>
+          <a:bodyPr wrap="none" lIns="18288" rIns="18288" tIns="18288" bIns="18288" anchor="t">
+            <a:spAutoFit/>
+          </a:bodyPr>
+          <a:lstStyle/>
+          <a:p>
+            <a:pPr algn="r">
+              <a:spcAft>
+                <a:spcPts val="0"/>
+              </a:spcAft>
+            </a:pPr>
+            <a:r>
+              <a:rPr sz="1050" b="0" i="0">
+                <a:solidFill>
+                  <a:srgbClr val="B4C7D2"/>
+                </a:solidFill>
+                <a:latin typeface="Arial"/>
+              </a:rPr>
+              <a:t>0.3</a:t>
+            </a:r>
+          </a:p>
+        </p:txBody>
+      </p:sp>
+      <p:cxnSp>
+        <p:nvCxnSpPr>
           <p:cNvPr id="18" name="C1-E33 line 16" descr="sci-ppt:o016"/>
           <p:cNvCxnSpPr/>
           <p:nvPr/>
         </p:nvCxnSpPr>
         <p:spPr>
           <a:xfrm>
-            <a:off x="758952" y="3566160"/>
+            <a:off x="850392" y="2011680"/>
             <a:ext cx="64008" cy="0"/>
           </a:xfrm>
           <a:prstGeom prst="line">
@@ -3568,8 +3568,8 @@
         </p:nvCxnSpPr>
         <p:spPr>
           <a:xfrm>
-            <a:off x="822960" y="3566160"/>
-            <a:ext cx="3291840" cy="0"/>
+            <a:off x="914400" y="2011680"/>
+            <a:ext cx="3566160" cy="0"/>
           </a:xfrm>
           <a:prstGeom prst="line">
             <a:avLst/>
@@ -3590,7 +3590,7 @@
         </p:nvSpPr>
         <p:spPr>
           <a:xfrm>
-            <a:off x="-45719" y="3483864"/>
+            <a:off x="45720" y="1929384"/>
             <a:ext cx="777240" cy="208407"/>
           </a:xfrm>
           <a:prstGeom prst="rect">
@@ -3617,65 +3617,21 @@
                 </a:solidFill>
                 <a:latin typeface="Arial"/>
               </a:rPr>
-              <a:t>10</a:t>
-            </a:r>
-          </a:p>
-        </p:txBody>
-      </p:sp>
-      <p:cxnSp>
-        <p:nvCxnSpPr>
-          <p:cNvPr id="21" name="C1-E33 line 19" descr="sci-ppt:o019"/>
-          <p:cNvCxnSpPr/>
+              <a:t>0.6</a:t>
+            </a:r>
+          </a:p>
+        </p:txBody>
+      </p:sp>
+      <p:sp>
+        <p:nvSpPr>
+          <p:cNvPr id="21" name="C1-E33 text 19" descr="sci-ppt:o019"/>
+          <p:cNvSpPr txBox="1"/>
           <p:nvPr/>
-        </p:nvCxnSpPr>
+        </p:nvSpPr>
         <p:spPr>
           <a:xfrm>
-            <a:off x="758952" y="2560320"/>
-            <a:ext cx="64008" cy="0"/>
-          </a:xfrm>
-          <a:prstGeom prst="line">
-            <a:avLst/>
-          </a:prstGeom>
-          <a:ln w="12700">
-            <a:solidFill>
-              <a:srgbClr val="B4C7D2"/>
-            </a:solidFill>
-          </a:ln>
-          <a:effectLst/>
-        </p:spPr>
-      </p:cxnSp>
-      <p:cxnSp>
-        <p:nvCxnSpPr>
-          <p:cNvPr id="22" name="C1-E33 line 20" descr="sci-ppt:o020"/>
-          <p:cNvCxnSpPr/>
-          <p:nvPr/>
-        </p:nvCxnSpPr>
-        <p:spPr>
-          <a:xfrm>
-            <a:off x="822960" y="2560320"/>
-            <a:ext cx="3291840" cy="0"/>
-          </a:xfrm>
-          <a:prstGeom prst="line">
-            <a:avLst/>
-          </a:prstGeom>
-          <a:ln w="7620">
-            <a:solidFill>
-              <a:srgbClr val="2E4756"/>
-            </a:solidFill>
-          </a:ln>
-          <a:effectLst/>
-        </p:spPr>
-      </p:cxnSp>
-      <p:sp>
-        <p:nvSpPr>
-          <p:cNvPr id="23" name="C1-E33 text 21" descr="sci-ppt:o021"/>
-          <p:cNvSpPr txBox="1"/>
-          <p:nvPr/>
-        </p:nvSpPr>
-        <p:spPr>
-          <a:xfrm>
-            <a:off x="-45719" y="2478024"/>
-            <a:ext cx="777240" cy="208407"/>
+            <a:off x="914400" y="4123944"/>
+            <a:ext cx="3566160" cy="231648"/>
           </a:xfrm>
           <a:prstGeom prst="rect">
             <a:avLst/>
@@ -3689,77 +3645,33 @@
           </a:bodyPr>
           <a:lstStyle/>
           <a:p>
-            <a:pPr algn="r">
+            <a:pPr algn="ctr">
               <a:spcAft>
                 <a:spcPts val="0"/>
               </a:spcAft>
             </a:pPr>
             <a:r>
-              <a:rPr sz="1050" b="0" i="0">
+              <a:rPr sz="1200" b="0" i="0">
                 <a:solidFill>
-                  <a:srgbClr val="B4C7D2"/>
+                  <a:srgbClr val="E7F0F3"/>
                 </a:solidFill>
                 <a:latin typeface="Arial"/>
               </a:rPr>
-              <a:t>100</a:t>
-            </a:r>
-          </a:p>
-        </p:txBody>
-      </p:sp>
-      <p:cxnSp>
-        <p:nvCxnSpPr>
-          <p:cNvPr id="24" name="C1-E33 line 22" descr="sci-ppt:o022"/>
-          <p:cNvCxnSpPr/>
+              <a:t>t (µs)</a:t>
+            </a:r>
+          </a:p>
+        </p:txBody>
+      </p:sp>
+      <p:sp>
+        <p:nvSpPr>
+          <p:cNvPr id="22" name="C1-E33 text 20" descr="sci-ppt:o020"/>
+          <p:cNvSpPr txBox="1"/>
           <p:nvPr/>
-        </p:nvCxnSpPr>
+        </p:nvSpPr>
         <p:spPr>
           <a:xfrm>
-            <a:off x="758952" y="1554480"/>
-            <a:ext cx="64008" cy="0"/>
-          </a:xfrm>
-          <a:prstGeom prst="line">
-            <a:avLst/>
-          </a:prstGeom>
-          <a:ln w="12700">
-            <a:solidFill>
-              <a:srgbClr val="B4C7D2"/>
-            </a:solidFill>
-          </a:ln>
-          <a:effectLst/>
-        </p:spPr>
-      </p:cxnSp>
-      <p:cxnSp>
-        <p:nvCxnSpPr>
-          <p:cNvPr id="25" name="C1-E33 line 23" descr="sci-ppt:o023"/>
-          <p:cNvCxnSpPr/>
-          <p:nvPr/>
-        </p:nvCxnSpPr>
-        <p:spPr>
-          <a:xfrm>
-            <a:off x="822960" y="1554480"/>
-            <a:ext cx="3291840" cy="0"/>
-          </a:xfrm>
-          <a:prstGeom prst="line">
-            <a:avLst/>
-          </a:prstGeom>
-          <a:ln w="7620">
-            <a:solidFill>
-              <a:srgbClr val="2E4756"/>
-            </a:solidFill>
-          </a:ln>
-          <a:effectLst/>
-        </p:spPr>
-      </p:cxnSp>
-      <p:sp>
-        <p:nvSpPr>
-          <p:cNvPr id="26" name="C1-E33 text 24" descr="sci-ppt:o024"/>
-          <p:cNvSpPr txBox="1"/>
-          <p:nvPr/>
-        </p:nvSpPr>
-        <p:spPr>
-          <a:xfrm>
-            <a:off x="-45719" y="1472184"/>
-            <a:ext cx="777240" cy="208407"/>
+            <a:off x="365760" y="1207007"/>
+            <a:ext cx="3566160" cy="231648"/>
           </a:xfrm>
           <a:prstGeom prst="rect">
             <a:avLst/>
@@ -3773,47 +3685,7 @@
           </a:bodyPr>
           <a:lstStyle/>
           <a:p>
-            <a:pPr algn="r">
-              <a:spcAft>
-                <a:spcPts val="0"/>
-              </a:spcAft>
-            </a:pPr>
-            <a:r>
-              <a:rPr sz="1050" b="0" i="0">
-                <a:solidFill>
-                  <a:srgbClr val="B4C7D2"/>
-                </a:solidFill>
-                <a:latin typeface="Arial"/>
-              </a:rPr>
-              <a:t>1000</a:t>
-            </a:r>
-          </a:p>
-        </p:txBody>
-      </p:sp>
-      <p:sp>
-        <p:nvSpPr>
-          <p:cNvPr id="27" name="C1-E33 text 25" descr="sci-ppt:o025"/>
-          <p:cNvSpPr txBox="1"/>
-          <p:nvPr/>
-        </p:nvSpPr>
-        <p:spPr>
-          <a:xfrm>
-            <a:off x="822960" y="4855464"/>
-            <a:ext cx="3291840" cy="231648"/>
-          </a:xfrm>
-          <a:prstGeom prst="rect">
-            <a:avLst/>
-          </a:prstGeom>
-          <a:noFill/>
-          <a:effectLst/>
-        </p:spPr>
-        <p:txBody>
-          <a:bodyPr wrap="none" lIns="18288" rIns="18288" tIns="18288" bIns="18288" anchor="t">
-            <a:spAutoFit/>
-          </a:bodyPr>
-          <a:lstStyle/>
-          <a:p>
-            <a:pPr algn="ctr">
+            <a:pPr algn="l">
               <a:spcAft>
                 <a:spcPts val="0"/>
               </a:spcAft>
@@ -3825,61 +3697,21 @@
                 </a:solidFill>
                 <a:latin typeface="Arial"/>
               </a:rPr>
-              <a:t>R / Rₘₐₓ</a:t>
-            </a:r>
-          </a:p>
-        </p:txBody>
-      </p:sp>
-      <p:sp>
-        <p:nvSpPr>
-          <p:cNvPr id="28" name="C1-E33 text 26" descr="sci-ppt:o026"/>
-          <p:cNvSpPr txBox="1"/>
+              <a:t>p − p_ref (MPa)</a:t>
+            </a:r>
+          </a:p>
+        </p:txBody>
+      </p:sp>
+      <p:sp>
+        <p:nvSpPr>
+          <p:cNvPr id="23" name="C1-E33 polygon 21" descr="sci-ppt:o021"/>
+          <p:cNvSpPr/>
           <p:nvPr/>
         </p:nvSpPr>
         <p:spPr>
           <a:xfrm>
-            <a:off x="274320" y="1207007"/>
-            <a:ext cx="3291840" cy="231648"/>
-          </a:xfrm>
-          <a:prstGeom prst="rect">
-            <a:avLst/>
-          </a:prstGeom>
-          <a:noFill/>
-          <a:effectLst/>
-        </p:spPr>
-        <p:txBody>
-          <a:bodyPr wrap="none" lIns="18288" rIns="18288" tIns="18288" bIns="18288" anchor="t">
-            <a:spAutoFit/>
-          </a:bodyPr>
-          <a:lstStyle/>
-          <a:p>
-            <a:pPr algn="l">
-              <a:spcAft>
-                <a:spcPts val="0"/>
-              </a:spcAft>
-            </a:pPr>
-            <a:r>
-              <a:rPr sz="1200" b="0" i="0">
-                <a:solidFill>
-                  <a:srgbClr val="E7F0F3"/>
-                </a:solidFill>
-                <a:latin typeface="Arial"/>
-              </a:rPr>
-              <a:t>|Ṙ| (m/s)</a:t>
-            </a:r>
-          </a:p>
-        </p:txBody>
-      </p:sp>
-      <p:sp>
-        <p:nvSpPr>
-          <p:cNvPr id="29" name="C1-E33 polygon 27" descr="sci-ppt:o027"/>
-          <p:cNvSpPr/>
-          <p:nvPr/>
-        </p:nvSpPr>
-        <p:spPr>
-          <a:xfrm>
-            <a:off x="825566" y="1693359"/>
-            <a:ext cx="3272705" cy="2633129"/>
+            <a:off x="914400" y="2011680"/>
+            <a:ext cx="3566160" cy="1828800"/>
           </a:xfrm>
           <a:custGeom>
             <a:avLst/>
@@ -3888,603 +3720,2466 @@
             <a:cxnLst/>
             <a:rect l="l" t="t" r="r" b="b"/>
             <a:pathLst>
-              <a:path w="3272705" h="2633129">
+              <a:path w="3566160" h="1828800">
                 <a:moveTo>
                   <a:pt x="0" y="0"/>
                 </a:moveTo>
                 <a:lnTo>
-                  <a:pt x="16528" y="9857"/>
-                </a:lnTo>
-                <a:lnTo>
-                  <a:pt x="33057" y="19715"/>
-                </a:lnTo>
-                <a:lnTo>
-                  <a:pt x="49586" y="29572"/>
-                </a:lnTo>
-                <a:lnTo>
-                  <a:pt x="66115" y="39430"/>
-                </a:lnTo>
-                <a:lnTo>
-                  <a:pt x="82644" y="49288"/>
-                </a:lnTo>
-                <a:lnTo>
-                  <a:pt x="99172" y="59146"/>
-                </a:lnTo>
-                <a:lnTo>
-                  <a:pt x="115701" y="69004"/>
-                </a:lnTo>
-                <a:lnTo>
-                  <a:pt x="132230" y="78862"/>
-                </a:lnTo>
-                <a:lnTo>
-                  <a:pt x="148759" y="88720"/>
-                </a:lnTo>
-                <a:lnTo>
-                  <a:pt x="165288" y="98578"/>
-                </a:lnTo>
-                <a:lnTo>
-                  <a:pt x="181817" y="108436"/>
-                </a:lnTo>
-                <a:lnTo>
-                  <a:pt x="198345" y="118294"/>
-                </a:lnTo>
-                <a:lnTo>
-                  <a:pt x="214874" y="128153"/>
-                </a:lnTo>
-                <a:lnTo>
-                  <a:pt x="231403" y="138011"/>
-                </a:lnTo>
-                <a:lnTo>
-                  <a:pt x="247932" y="147870"/>
-                </a:lnTo>
-                <a:lnTo>
-                  <a:pt x="264461" y="157728"/>
-                </a:lnTo>
-                <a:lnTo>
-                  <a:pt x="280989" y="167587"/>
-                </a:lnTo>
-                <a:lnTo>
-                  <a:pt x="297518" y="177446"/>
-                </a:lnTo>
-                <a:lnTo>
-                  <a:pt x="314047" y="187305"/>
-                </a:lnTo>
-                <a:lnTo>
-                  <a:pt x="330576" y="197165"/>
-                </a:lnTo>
-                <a:lnTo>
-                  <a:pt x="347105" y="207024"/>
-                </a:lnTo>
-                <a:lnTo>
-                  <a:pt x="363633" y="216883"/>
-                </a:lnTo>
-                <a:lnTo>
-                  <a:pt x="380162" y="226743"/>
-                </a:lnTo>
-                <a:lnTo>
-                  <a:pt x="396691" y="236603"/>
-                </a:lnTo>
-                <a:lnTo>
-                  <a:pt x="413220" y="246463"/>
-                </a:lnTo>
-                <a:lnTo>
-                  <a:pt x="429749" y="256323"/>
-                </a:lnTo>
-                <a:lnTo>
-                  <a:pt x="446278" y="266183"/>
-                </a:lnTo>
-                <a:lnTo>
-                  <a:pt x="462806" y="276044"/>
-                </a:lnTo>
-                <a:lnTo>
-                  <a:pt x="479335" y="285905"/>
-                </a:lnTo>
-                <a:lnTo>
-                  <a:pt x="495864" y="295765"/>
-                </a:lnTo>
-                <a:lnTo>
-                  <a:pt x="512393" y="305627"/>
-                </a:lnTo>
-                <a:lnTo>
-                  <a:pt x="528922" y="315488"/>
-                </a:lnTo>
-                <a:lnTo>
-                  <a:pt x="545450" y="325350"/>
-                </a:lnTo>
-                <a:lnTo>
-                  <a:pt x="561979" y="335211"/>
-                </a:lnTo>
-                <a:lnTo>
-                  <a:pt x="578508" y="345074"/>
-                </a:lnTo>
-                <a:lnTo>
-                  <a:pt x="595037" y="354936"/>
-                </a:lnTo>
-                <a:lnTo>
-                  <a:pt x="611566" y="364799"/>
-                </a:lnTo>
-                <a:lnTo>
-                  <a:pt x="628094" y="374662"/>
-                </a:lnTo>
-                <a:lnTo>
-                  <a:pt x="644623" y="384525"/>
-                </a:lnTo>
-                <a:lnTo>
-                  <a:pt x="661152" y="394388"/>
-                </a:lnTo>
-                <a:lnTo>
-                  <a:pt x="677681" y="404252"/>
-                </a:lnTo>
-                <a:lnTo>
-                  <a:pt x="694210" y="414117"/>
-                </a:lnTo>
-                <a:lnTo>
-                  <a:pt x="710739" y="423981"/>
-                </a:lnTo>
-                <a:lnTo>
-                  <a:pt x="727267" y="433846"/>
-                </a:lnTo>
-                <a:lnTo>
-                  <a:pt x="743796" y="443712"/>
-                </a:lnTo>
-                <a:lnTo>
-                  <a:pt x="760325" y="453578"/>
-                </a:lnTo>
-                <a:lnTo>
-                  <a:pt x="776854" y="463444"/>
-                </a:lnTo>
-                <a:lnTo>
-                  <a:pt x="793383" y="473311"/>
-                </a:lnTo>
-                <a:lnTo>
-                  <a:pt x="809911" y="483178"/>
-                </a:lnTo>
-                <a:lnTo>
-                  <a:pt x="826440" y="493046"/>
-                </a:lnTo>
-                <a:lnTo>
-                  <a:pt x="842969" y="502914"/>
-                </a:lnTo>
-                <a:lnTo>
-                  <a:pt x="859498" y="512783"/>
-                </a:lnTo>
-                <a:lnTo>
-                  <a:pt x="876027" y="522653"/>
-                </a:lnTo>
-                <a:lnTo>
-                  <a:pt x="892556" y="532523"/>
-                </a:lnTo>
-                <a:lnTo>
-                  <a:pt x="909084" y="542394"/>
-                </a:lnTo>
-                <a:lnTo>
-                  <a:pt x="925613" y="552265"/>
-                </a:lnTo>
-                <a:lnTo>
-                  <a:pt x="942142" y="562137"/>
-                </a:lnTo>
-                <a:lnTo>
-                  <a:pt x="958671" y="572010"/>
-                </a:lnTo>
-                <a:lnTo>
-                  <a:pt x="975200" y="581884"/>
-                </a:lnTo>
-                <a:lnTo>
-                  <a:pt x="991728" y="591758"/>
-                </a:lnTo>
-                <a:lnTo>
-                  <a:pt x="1008257" y="601634"/>
-                </a:lnTo>
-                <a:lnTo>
-                  <a:pt x="1024786" y="611510"/>
-                </a:lnTo>
-                <a:lnTo>
-                  <a:pt x="1041315" y="621387"/>
-                </a:lnTo>
-                <a:lnTo>
-                  <a:pt x="1057844" y="631265"/>
-                </a:lnTo>
-                <a:lnTo>
-                  <a:pt x="1074372" y="641144"/>
-                </a:lnTo>
-                <a:lnTo>
-                  <a:pt x="1090901" y="651024"/>
-                </a:lnTo>
-                <a:lnTo>
-                  <a:pt x="1107430" y="660905"/>
-                </a:lnTo>
-                <a:lnTo>
-                  <a:pt x="1123959" y="670788"/>
-                </a:lnTo>
-                <a:lnTo>
-                  <a:pt x="1140488" y="680671"/>
-                </a:lnTo>
-                <a:lnTo>
-                  <a:pt x="1157017" y="690556"/>
-                </a:lnTo>
-                <a:lnTo>
-                  <a:pt x="1173545" y="700442"/>
-                </a:lnTo>
-                <a:lnTo>
-                  <a:pt x="1190074" y="710330"/>
-                </a:lnTo>
-                <a:lnTo>
-                  <a:pt x="1206603" y="720219"/>
-                </a:lnTo>
-                <a:lnTo>
-                  <a:pt x="1223132" y="730109"/>
-                </a:lnTo>
-                <a:lnTo>
-                  <a:pt x="1239661" y="740002"/>
-                </a:lnTo>
-                <a:lnTo>
-                  <a:pt x="1256189" y="749895"/>
-                </a:lnTo>
-                <a:lnTo>
-                  <a:pt x="1272718" y="759791"/>
-                </a:lnTo>
-                <a:lnTo>
-                  <a:pt x="1289247" y="769688"/>
-                </a:lnTo>
-                <a:lnTo>
-                  <a:pt x="1305776" y="779588"/>
-                </a:lnTo>
-                <a:lnTo>
-                  <a:pt x="1322305" y="789489"/>
-                </a:lnTo>
-                <a:lnTo>
-                  <a:pt x="1338833" y="799392"/>
-                </a:lnTo>
-                <a:lnTo>
-                  <a:pt x="1355362" y="809298"/>
-                </a:lnTo>
-                <a:lnTo>
-                  <a:pt x="1371891" y="819206"/>
-                </a:lnTo>
-                <a:lnTo>
-                  <a:pt x="1388420" y="829116"/>
-                </a:lnTo>
-                <a:lnTo>
-                  <a:pt x="1404949" y="839029"/>
-                </a:lnTo>
-                <a:lnTo>
-                  <a:pt x="1421478" y="848944"/>
-                </a:lnTo>
-                <a:lnTo>
-                  <a:pt x="1438006" y="858862"/>
-                </a:lnTo>
-                <a:lnTo>
-                  <a:pt x="1454535" y="868783"/>
-                </a:lnTo>
-                <a:lnTo>
-                  <a:pt x="1471064" y="878707"/>
-                </a:lnTo>
-                <a:lnTo>
-                  <a:pt x="1487593" y="888634"/>
-                </a:lnTo>
-                <a:lnTo>
-                  <a:pt x="1504122" y="898565"/>
-                </a:lnTo>
-                <a:lnTo>
-                  <a:pt x="1520650" y="908499"/>
-                </a:lnTo>
-                <a:lnTo>
-                  <a:pt x="1537179" y="918436"/>
-                </a:lnTo>
-                <a:lnTo>
-                  <a:pt x="1553708" y="928378"/>
-                </a:lnTo>
-                <a:lnTo>
-                  <a:pt x="1570237" y="938323"/>
-                </a:lnTo>
-                <a:lnTo>
-                  <a:pt x="1586766" y="948272"/>
-                </a:lnTo>
-                <a:lnTo>
-                  <a:pt x="1603295" y="958226"/>
-                </a:lnTo>
-                <a:lnTo>
-                  <a:pt x="1619823" y="968184"/>
-                </a:lnTo>
-                <a:lnTo>
-                  <a:pt x="1636352" y="978147"/>
-                </a:lnTo>
-                <a:lnTo>
-                  <a:pt x="1652881" y="988116"/>
-                </a:lnTo>
-                <a:lnTo>
-                  <a:pt x="1669410" y="998089"/>
-                </a:lnTo>
-                <a:lnTo>
-                  <a:pt x="1685939" y="1008068"/>
-                </a:lnTo>
-                <a:lnTo>
-                  <a:pt x="1702467" y="1018052"/>
-                </a:lnTo>
-                <a:lnTo>
-                  <a:pt x="1718996" y="1028043"/>
-                </a:lnTo>
-                <a:lnTo>
-                  <a:pt x="1735525" y="1038039"/>
-                </a:lnTo>
-                <a:lnTo>
-                  <a:pt x="1752054" y="1048043"/>
-                </a:lnTo>
-                <a:lnTo>
-                  <a:pt x="1768583" y="1058053"/>
-                </a:lnTo>
-                <a:lnTo>
-                  <a:pt x="1785111" y="1068071"/>
-                </a:lnTo>
-                <a:lnTo>
-                  <a:pt x="1801640" y="1078096"/>
-                </a:lnTo>
-                <a:lnTo>
-                  <a:pt x="1818169" y="1088129"/>
-                </a:lnTo>
-                <a:lnTo>
-                  <a:pt x="1834698" y="1098170"/>
-                </a:lnTo>
-                <a:lnTo>
-                  <a:pt x="1851227" y="1108220"/>
-                </a:lnTo>
-                <a:lnTo>
-                  <a:pt x="1867756" y="1118279"/>
-                </a:lnTo>
-                <a:lnTo>
-                  <a:pt x="1884284" y="1128348"/>
-                </a:lnTo>
-                <a:lnTo>
-                  <a:pt x="1900813" y="1138427"/>
-                </a:lnTo>
-                <a:lnTo>
-                  <a:pt x="1917342" y="1148516"/>
-                </a:lnTo>
-                <a:lnTo>
-                  <a:pt x="1933871" y="1158616"/>
-                </a:lnTo>
-                <a:lnTo>
-                  <a:pt x="1950400" y="1168728"/>
-                </a:lnTo>
-                <a:lnTo>
-                  <a:pt x="1966928" y="1178852"/>
-                </a:lnTo>
-                <a:lnTo>
-                  <a:pt x="1983457" y="1188989"/>
-                </a:lnTo>
-                <a:lnTo>
-                  <a:pt x="1999986" y="1199139"/>
-                </a:lnTo>
-                <a:lnTo>
-                  <a:pt x="2016515" y="1209303"/>
-                </a:lnTo>
-                <a:lnTo>
-                  <a:pt x="2033044" y="1219481"/>
-                </a:lnTo>
-                <a:lnTo>
-                  <a:pt x="2049572" y="1229676"/>
-                </a:lnTo>
-                <a:lnTo>
-                  <a:pt x="2066101" y="1239886"/>
-                </a:lnTo>
-                <a:lnTo>
-                  <a:pt x="2082630" y="1250113"/>
-                </a:lnTo>
-                <a:lnTo>
-                  <a:pt x="2099159" y="1260358"/>
-                </a:lnTo>
-                <a:lnTo>
-                  <a:pt x="2115688" y="1270622"/>
-                </a:lnTo>
-                <a:lnTo>
-                  <a:pt x="2132217" y="1280905"/>
-                </a:lnTo>
-                <a:lnTo>
-                  <a:pt x="2148745" y="1291209"/>
-                </a:lnTo>
-                <a:lnTo>
-                  <a:pt x="2165274" y="1301534"/>
-                </a:lnTo>
-                <a:lnTo>
-                  <a:pt x="2181803" y="1311883"/>
-                </a:lnTo>
-                <a:lnTo>
-                  <a:pt x="2198332" y="1322255"/>
-                </a:lnTo>
-                <a:lnTo>
-                  <a:pt x="2214861" y="1332652"/>
-                </a:lnTo>
-                <a:lnTo>
-                  <a:pt x="2231389" y="1343076"/>
-                </a:lnTo>
-                <a:lnTo>
-                  <a:pt x="2247918" y="1353528"/>
-                </a:lnTo>
-                <a:lnTo>
-                  <a:pt x="2264447" y="1364008"/>
-                </a:lnTo>
-                <a:lnTo>
-                  <a:pt x="2280976" y="1374520"/>
-                </a:lnTo>
-                <a:lnTo>
-                  <a:pt x="2297505" y="1385064"/>
-                </a:lnTo>
-                <a:lnTo>
-                  <a:pt x="2314033" y="1395642"/>
-                </a:lnTo>
-                <a:lnTo>
-                  <a:pt x="2330562" y="1406256"/>
-                </a:lnTo>
-                <a:lnTo>
-                  <a:pt x="2347091" y="1416907"/>
-                </a:lnTo>
-                <a:lnTo>
-                  <a:pt x="2363620" y="1427599"/>
-                </a:lnTo>
-                <a:lnTo>
-                  <a:pt x="2380149" y="1438332"/>
-                </a:lnTo>
-                <a:lnTo>
-                  <a:pt x="2396678" y="1449110"/>
-                </a:lnTo>
-                <a:lnTo>
-                  <a:pt x="2413206" y="1459934"/>
-                </a:lnTo>
-                <a:lnTo>
-                  <a:pt x="2429735" y="1470808"/>
-                </a:lnTo>
-                <a:lnTo>
-                  <a:pt x="2446264" y="1481733"/>
-                </a:lnTo>
-                <a:lnTo>
-                  <a:pt x="2462793" y="1492714"/>
-                </a:lnTo>
-                <a:lnTo>
-                  <a:pt x="2479322" y="1503753"/>
-                </a:lnTo>
-                <a:lnTo>
-                  <a:pt x="2495850" y="1514854"/>
-                </a:lnTo>
-                <a:lnTo>
-                  <a:pt x="2512379" y="1526019"/>
-                </a:lnTo>
-                <a:lnTo>
-                  <a:pt x="2528908" y="1537253"/>
-                </a:lnTo>
-                <a:lnTo>
-                  <a:pt x="2545437" y="1548561"/>
-                </a:lnTo>
-                <a:lnTo>
-                  <a:pt x="2561966" y="1559945"/>
-                </a:lnTo>
-                <a:lnTo>
-                  <a:pt x="2578495" y="1571412"/>
-                </a:lnTo>
-                <a:lnTo>
-                  <a:pt x="2595023" y="1582966"/>
-                </a:lnTo>
-                <a:lnTo>
-                  <a:pt x="2611552" y="1594613"/>
-                </a:lnTo>
-                <a:lnTo>
-                  <a:pt x="2628081" y="1606358"/>
-                </a:lnTo>
-                <a:lnTo>
-                  <a:pt x="2644610" y="1618208"/>
-                </a:lnTo>
-                <a:lnTo>
-                  <a:pt x="2661139" y="1630169"/>
-                </a:lnTo>
-                <a:lnTo>
-                  <a:pt x="2677667" y="1642250"/>
-                </a:lnTo>
-                <a:lnTo>
-                  <a:pt x="2694196" y="1654458"/>
-                </a:lnTo>
-                <a:lnTo>
-                  <a:pt x="2710725" y="1666801"/>
-                </a:lnTo>
-                <a:lnTo>
-                  <a:pt x="2727254" y="1679291"/>
-                </a:lnTo>
-                <a:lnTo>
-                  <a:pt x="2743783" y="1691936"/>
-                </a:lnTo>
-                <a:lnTo>
-                  <a:pt x="2760311" y="1704749"/>
-                </a:lnTo>
-                <a:lnTo>
-                  <a:pt x="2776840" y="1717741"/>
-                </a:lnTo>
-                <a:lnTo>
-                  <a:pt x="2793369" y="1730927"/>
-                </a:lnTo>
-                <a:lnTo>
-                  <a:pt x="2809898" y="1744322"/>
-                </a:lnTo>
-                <a:lnTo>
-                  <a:pt x="2826427" y="1757943"/>
-                </a:lnTo>
-                <a:lnTo>
-                  <a:pt x="2842956" y="1771809"/>
-                </a:lnTo>
-                <a:lnTo>
-                  <a:pt x="2859484" y="1785939"/>
-                </a:lnTo>
-                <a:lnTo>
-                  <a:pt x="2876013" y="1800359"/>
-                </a:lnTo>
-                <a:lnTo>
-                  <a:pt x="2892542" y="1815093"/>
-                </a:lnTo>
-                <a:lnTo>
-                  <a:pt x="2909071" y="1830172"/>
-                </a:lnTo>
-                <a:lnTo>
-                  <a:pt x="2925600" y="1845629"/>
-                </a:lnTo>
-                <a:lnTo>
-                  <a:pt x="2942128" y="1861503"/>
-                </a:lnTo>
-                <a:lnTo>
-                  <a:pt x="2958657" y="1877836"/>
-                </a:lnTo>
-                <a:lnTo>
-                  <a:pt x="2975186" y="1894681"/>
-                </a:lnTo>
-                <a:lnTo>
-                  <a:pt x="2991715" y="1912096"/>
-                </a:lnTo>
-                <a:lnTo>
-                  <a:pt x="3008244" y="1930151"/>
-                </a:lnTo>
-                <a:lnTo>
-                  <a:pt x="3024772" y="1948926"/>
-                </a:lnTo>
-                <a:lnTo>
-                  <a:pt x="3041301" y="1968520"/>
-                </a:lnTo>
-                <a:lnTo>
-                  <a:pt x="3057830" y="1989051"/>
-                </a:lnTo>
-                <a:lnTo>
-                  <a:pt x="3074359" y="2010663"/>
-                </a:lnTo>
-                <a:lnTo>
-                  <a:pt x="3090888" y="2033534"/>
-                </a:lnTo>
-                <a:lnTo>
-                  <a:pt x="3107417" y="2057892"/>
-                </a:lnTo>
-                <a:lnTo>
-                  <a:pt x="3123945" y="2084025"/>
-                </a:lnTo>
-                <a:lnTo>
-                  <a:pt x="3140474" y="2112316"/>
-                </a:lnTo>
-                <a:lnTo>
-                  <a:pt x="3157003" y="2143284"/>
-                </a:lnTo>
-                <a:lnTo>
-                  <a:pt x="3173532" y="2177655"/>
-                </a:lnTo>
-                <a:lnTo>
-                  <a:pt x="3190061" y="2216493"/>
-                </a:lnTo>
-                <a:lnTo>
-                  <a:pt x="3206589" y="2261446"/>
-                </a:lnTo>
-                <a:lnTo>
-                  <a:pt x="3223118" y="2315279"/>
-                </a:lnTo>
-                <a:lnTo>
-                  <a:pt x="3239647" y="2383171"/>
-                </a:lnTo>
-                <a:lnTo>
-                  <a:pt x="3256176" y="2476751"/>
-                </a:lnTo>
-                <a:lnTo>
-                  <a:pt x="3272705" y="2633129"/>
+                  <a:pt x="8937" y="0"/>
+                </a:lnTo>
+                <a:lnTo>
+                  <a:pt x="17875" y="0"/>
+                </a:lnTo>
+                <a:lnTo>
+                  <a:pt x="26813" y="0"/>
+                </a:lnTo>
+                <a:lnTo>
+                  <a:pt x="35750" y="0"/>
+                </a:lnTo>
+                <a:lnTo>
+                  <a:pt x="44688" y="0"/>
+                </a:lnTo>
+                <a:lnTo>
+                  <a:pt x="53626" y="0"/>
+                </a:lnTo>
+                <a:lnTo>
+                  <a:pt x="62564" y="0"/>
+                </a:lnTo>
+                <a:lnTo>
+                  <a:pt x="71501" y="0"/>
+                </a:lnTo>
+                <a:lnTo>
+                  <a:pt x="80439" y="0"/>
+                </a:lnTo>
+                <a:lnTo>
+                  <a:pt x="89377" y="0"/>
+                </a:lnTo>
+                <a:lnTo>
+                  <a:pt x="98315" y="0"/>
+                </a:lnTo>
+                <a:lnTo>
+                  <a:pt x="107252" y="0"/>
+                </a:lnTo>
+                <a:lnTo>
+                  <a:pt x="116190" y="0"/>
+                </a:lnTo>
+                <a:lnTo>
+                  <a:pt x="125128" y="0"/>
+                </a:lnTo>
+                <a:lnTo>
+                  <a:pt x="134066" y="0"/>
+                </a:lnTo>
+                <a:lnTo>
+                  <a:pt x="143003" y="0"/>
+                </a:lnTo>
+                <a:lnTo>
+                  <a:pt x="151941" y="0"/>
+                </a:lnTo>
+                <a:lnTo>
+                  <a:pt x="160879" y="0"/>
+                </a:lnTo>
+                <a:lnTo>
+                  <a:pt x="169817" y="0"/>
+                </a:lnTo>
+                <a:lnTo>
+                  <a:pt x="178754" y="0"/>
+                </a:lnTo>
+                <a:lnTo>
+                  <a:pt x="187692" y="0"/>
+                </a:lnTo>
+                <a:lnTo>
+                  <a:pt x="196630" y="0"/>
+                </a:lnTo>
+                <a:lnTo>
+                  <a:pt x="205568" y="0"/>
+                </a:lnTo>
+                <a:lnTo>
+                  <a:pt x="214505" y="0"/>
+                </a:lnTo>
+                <a:lnTo>
+                  <a:pt x="223443" y="0"/>
+                </a:lnTo>
+                <a:lnTo>
+                  <a:pt x="232381" y="0"/>
+                </a:lnTo>
+                <a:lnTo>
+                  <a:pt x="241319" y="0"/>
+                </a:lnTo>
+                <a:lnTo>
+                  <a:pt x="250256" y="0"/>
+                </a:lnTo>
+                <a:lnTo>
+                  <a:pt x="259194" y="0"/>
+                </a:lnTo>
+                <a:lnTo>
+                  <a:pt x="268132" y="0"/>
+                </a:lnTo>
+                <a:lnTo>
+                  <a:pt x="277070" y="0"/>
+                </a:lnTo>
+                <a:lnTo>
+                  <a:pt x="286007" y="0"/>
+                </a:lnTo>
+                <a:lnTo>
+                  <a:pt x="294945" y="0"/>
+                </a:lnTo>
+                <a:lnTo>
+                  <a:pt x="303883" y="0"/>
+                </a:lnTo>
+                <a:lnTo>
+                  <a:pt x="312821" y="0"/>
+                </a:lnTo>
+                <a:lnTo>
+                  <a:pt x="321758" y="0"/>
+                </a:lnTo>
+                <a:lnTo>
+                  <a:pt x="330696" y="0"/>
+                </a:lnTo>
+                <a:lnTo>
+                  <a:pt x="339634" y="0"/>
+                </a:lnTo>
+                <a:lnTo>
+                  <a:pt x="348572" y="0"/>
+                </a:lnTo>
+                <a:lnTo>
+                  <a:pt x="357509" y="0"/>
+                </a:lnTo>
+                <a:lnTo>
+                  <a:pt x="366447" y="0"/>
+                </a:lnTo>
+                <a:lnTo>
+                  <a:pt x="375385" y="0"/>
+                </a:lnTo>
+                <a:lnTo>
+                  <a:pt x="384323" y="0"/>
+                </a:lnTo>
+                <a:lnTo>
+                  <a:pt x="393260" y="0"/>
+                </a:lnTo>
+                <a:lnTo>
+                  <a:pt x="402198" y="0"/>
+                </a:lnTo>
+                <a:lnTo>
+                  <a:pt x="411136" y="0"/>
+                </a:lnTo>
+                <a:lnTo>
+                  <a:pt x="420073" y="0"/>
+                </a:lnTo>
+                <a:lnTo>
+                  <a:pt x="429011" y="0"/>
+                </a:lnTo>
+                <a:lnTo>
+                  <a:pt x="437949" y="0"/>
+                </a:lnTo>
+                <a:lnTo>
+                  <a:pt x="446887" y="0"/>
+                </a:lnTo>
+                <a:lnTo>
+                  <a:pt x="455824" y="0"/>
+                </a:lnTo>
+                <a:lnTo>
+                  <a:pt x="464762" y="0"/>
+                </a:lnTo>
+                <a:lnTo>
+                  <a:pt x="473700" y="0"/>
+                </a:lnTo>
+                <a:lnTo>
+                  <a:pt x="482638" y="0"/>
+                </a:lnTo>
+                <a:lnTo>
+                  <a:pt x="491575" y="0"/>
+                </a:lnTo>
+                <a:lnTo>
+                  <a:pt x="500513" y="0"/>
+                </a:lnTo>
+                <a:lnTo>
+                  <a:pt x="509451" y="0"/>
+                </a:lnTo>
+                <a:lnTo>
+                  <a:pt x="518389" y="0"/>
+                </a:lnTo>
+                <a:lnTo>
+                  <a:pt x="527326" y="0"/>
+                </a:lnTo>
+                <a:lnTo>
+                  <a:pt x="536264" y="0"/>
+                </a:lnTo>
+                <a:lnTo>
+                  <a:pt x="545202" y="0"/>
+                </a:lnTo>
+                <a:lnTo>
+                  <a:pt x="554140" y="0"/>
+                </a:lnTo>
+                <a:lnTo>
+                  <a:pt x="563077" y="0"/>
+                </a:lnTo>
+                <a:lnTo>
+                  <a:pt x="572015" y="0"/>
+                </a:lnTo>
+                <a:lnTo>
+                  <a:pt x="580953" y="0"/>
+                </a:lnTo>
+                <a:lnTo>
+                  <a:pt x="589891" y="0"/>
+                </a:lnTo>
+                <a:lnTo>
+                  <a:pt x="598828" y="0"/>
+                </a:lnTo>
+                <a:lnTo>
+                  <a:pt x="607766" y="0"/>
+                </a:lnTo>
+                <a:lnTo>
+                  <a:pt x="616704" y="0"/>
+                </a:lnTo>
+                <a:lnTo>
+                  <a:pt x="625642" y="0"/>
+                </a:lnTo>
+                <a:lnTo>
+                  <a:pt x="634579" y="0"/>
+                </a:lnTo>
+                <a:lnTo>
+                  <a:pt x="643517" y="0"/>
+                </a:lnTo>
+                <a:lnTo>
+                  <a:pt x="652455" y="0"/>
+                </a:lnTo>
+                <a:lnTo>
+                  <a:pt x="661393" y="0"/>
+                </a:lnTo>
+                <a:lnTo>
+                  <a:pt x="670330" y="0"/>
+                </a:lnTo>
+                <a:lnTo>
+                  <a:pt x="679268" y="0"/>
+                </a:lnTo>
+                <a:lnTo>
+                  <a:pt x="688206" y="0"/>
+                </a:lnTo>
+                <a:lnTo>
+                  <a:pt x="697144" y="0"/>
+                </a:lnTo>
+                <a:lnTo>
+                  <a:pt x="706081" y="0"/>
+                </a:lnTo>
+                <a:lnTo>
+                  <a:pt x="715019" y="0"/>
+                </a:lnTo>
+                <a:lnTo>
+                  <a:pt x="723957" y="0"/>
+                </a:lnTo>
+                <a:lnTo>
+                  <a:pt x="732895" y="0"/>
+                </a:lnTo>
+                <a:lnTo>
+                  <a:pt x="741832" y="0"/>
+                </a:lnTo>
+                <a:lnTo>
+                  <a:pt x="750770" y="0"/>
+                </a:lnTo>
+                <a:lnTo>
+                  <a:pt x="759708" y="0"/>
+                </a:lnTo>
+                <a:lnTo>
+                  <a:pt x="768646" y="0"/>
+                </a:lnTo>
+                <a:lnTo>
+                  <a:pt x="777583" y="0"/>
+                </a:lnTo>
+                <a:lnTo>
+                  <a:pt x="786521" y="0"/>
+                </a:lnTo>
+                <a:lnTo>
+                  <a:pt x="795459" y="0"/>
+                </a:lnTo>
+                <a:lnTo>
+                  <a:pt x="804396" y="0"/>
+                </a:lnTo>
+                <a:lnTo>
+                  <a:pt x="813334" y="0"/>
+                </a:lnTo>
+                <a:lnTo>
+                  <a:pt x="822272" y="0"/>
+                </a:lnTo>
+                <a:lnTo>
+                  <a:pt x="831210" y="0"/>
+                </a:lnTo>
+                <a:lnTo>
+                  <a:pt x="840147" y="0"/>
+                </a:lnTo>
+                <a:lnTo>
+                  <a:pt x="849085" y="0"/>
+                </a:lnTo>
+                <a:lnTo>
+                  <a:pt x="858023" y="0"/>
+                </a:lnTo>
+                <a:lnTo>
+                  <a:pt x="866961" y="0"/>
+                </a:lnTo>
+                <a:lnTo>
+                  <a:pt x="875898" y="0"/>
+                </a:lnTo>
+                <a:lnTo>
+                  <a:pt x="884836" y="0"/>
+                </a:lnTo>
+                <a:lnTo>
+                  <a:pt x="893774" y="1828800"/>
+                </a:lnTo>
+                <a:lnTo>
+                  <a:pt x="902712" y="1828800"/>
+                </a:lnTo>
+                <a:lnTo>
+                  <a:pt x="911649" y="1828800"/>
+                </a:lnTo>
+                <a:lnTo>
+                  <a:pt x="920587" y="1828800"/>
+                </a:lnTo>
+                <a:lnTo>
+                  <a:pt x="929525" y="1828800"/>
+                </a:lnTo>
+                <a:lnTo>
+                  <a:pt x="938463" y="1828800"/>
+                </a:lnTo>
+                <a:lnTo>
+                  <a:pt x="947400" y="1828800"/>
+                </a:lnTo>
+                <a:lnTo>
+                  <a:pt x="956338" y="1828800"/>
+                </a:lnTo>
+                <a:lnTo>
+                  <a:pt x="965276" y="1828800"/>
+                </a:lnTo>
+                <a:lnTo>
+                  <a:pt x="974214" y="1828800"/>
+                </a:lnTo>
+                <a:lnTo>
+                  <a:pt x="983151" y="1828800"/>
+                </a:lnTo>
+                <a:lnTo>
+                  <a:pt x="992089" y="1828800"/>
+                </a:lnTo>
+                <a:lnTo>
+                  <a:pt x="1001027" y="1828800"/>
+                </a:lnTo>
+                <a:lnTo>
+                  <a:pt x="1009965" y="1828800"/>
+                </a:lnTo>
+                <a:lnTo>
+                  <a:pt x="1018902" y="1828800"/>
+                </a:lnTo>
+                <a:lnTo>
+                  <a:pt x="1027840" y="1828800"/>
+                </a:lnTo>
+                <a:lnTo>
+                  <a:pt x="1036778" y="1828800"/>
+                </a:lnTo>
+                <a:lnTo>
+                  <a:pt x="1045716" y="1828800"/>
+                </a:lnTo>
+                <a:lnTo>
+                  <a:pt x="1054653" y="1828800"/>
+                </a:lnTo>
+                <a:lnTo>
+                  <a:pt x="1063591" y="1828800"/>
+                </a:lnTo>
+                <a:lnTo>
+                  <a:pt x="1072529" y="1828800"/>
+                </a:lnTo>
+                <a:lnTo>
+                  <a:pt x="1081467" y="1828800"/>
+                </a:lnTo>
+                <a:lnTo>
+                  <a:pt x="1090404" y="1828800"/>
+                </a:lnTo>
+                <a:lnTo>
+                  <a:pt x="1099342" y="1828800"/>
+                </a:lnTo>
+                <a:lnTo>
+                  <a:pt x="1108280" y="1828800"/>
+                </a:lnTo>
+                <a:lnTo>
+                  <a:pt x="1117218" y="1828800"/>
+                </a:lnTo>
+                <a:lnTo>
+                  <a:pt x="1126155" y="1828800"/>
+                </a:lnTo>
+                <a:lnTo>
+                  <a:pt x="1135093" y="1828800"/>
+                </a:lnTo>
+                <a:lnTo>
+                  <a:pt x="1144031" y="1828800"/>
+                </a:lnTo>
+                <a:lnTo>
+                  <a:pt x="1152969" y="1828800"/>
+                </a:lnTo>
+                <a:lnTo>
+                  <a:pt x="1161906" y="1828800"/>
+                </a:lnTo>
+                <a:lnTo>
+                  <a:pt x="1170844" y="1828800"/>
+                </a:lnTo>
+                <a:lnTo>
+                  <a:pt x="1179782" y="1828800"/>
+                </a:lnTo>
+                <a:lnTo>
+                  <a:pt x="1188720" y="1828800"/>
+                </a:lnTo>
+                <a:lnTo>
+                  <a:pt x="1197657" y="1828800"/>
+                </a:lnTo>
+                <a:lnTo>
+                  <a:pt x="1206595" y="1828800"/>
+                </a:lnTo>
+                <a:lnTo>
+                  <a:pt x="1215533" y="1828800"/>
+                </a:lnTo>
+                <a:lnTo>
+                  <a:pt x="1224470" y="1828800"/>
+                </a:lnTo>
+                <a:lnTo>
+                  <a:pt x="1233408" y="1828800"/>
+                </a:lnTo>
+                <a:lnTo>
+                  <a:pt x="1242346" y="1828800"/>
+                </a:lnTo>
+                <a:lnTo>
+                  <a:pt x="1251284" y="1828800"/>
+                </a:lnTo>
+                <a:lnTo>
+                  <a:pt x="1260221" y="1828800"/>
+                </a:lnTo>
+                <a:lnTo>
+                  <a:pt x="1269159" y="1828800"/>
+                </a:lnTo>
+                <a:lnTo>
+                  <a:pt x="1278097" y="1828800"/>
+                </a:lnTo>
+                <a:lnTo>
+                  <a:pt x="1287035" y="1828800"/>
+                </a:lnTo>
+                <a:lnTo>
+                  <a:pt x="1295972" y="1828800"/>
+                </a:lnTo>
+                <a:lnTo>
+                  <a:pt x="1304910" y="1828800"/>
+                </a:lnTo>
+                <a:lnTo>
+                  <a:pt x="1313848" y="1828800"/>
+                </a:lnTo>
+                <a:lnTo>
+                  <a:pt x="1322786" y="1828800"/>
+                </a:lnTo>
+                <a:lnTo>
+                  <a:pt x="1331723" y="1828800"/>
+                </a:lnTo>
+                <a:lnTo>
+                  <a:pt x="1340661" y="1828800"/>
+                </a:lnTo>
+                <a:lnTo>
+                  <a:pt x="1349599" y="1828800"/>
+                </a:lnTo>
+                <a:lnTo>
+                  <a:pt x="1358537" y="1828800"/>
+                </a:lnTo>
+                <a:lnTo>
+                  <a:pt x="1367474" y="1828800"/>
+                </a:lnTo>
+                <a:lnTo>
+                  <a:pt x="1376412" y="1828800"/>
+                </a:lnTo>
+                <a:lnTo>
+                  <a:pt x="1385350" y="1828800"/>
+                </a:lnTo>
+                <a:lnTo>
+                  <a:pt x="1394288" y="1828800"/>
+                </a:lnTo>
+                <a:lnTo>
+                  <a:pt x="1403225" y="1828800"/>
+                </a:lnTo>
+                <a:lnTo>
+                  <a:pt x="1412163" y="1828800"/>
+                </a:lnTo>
+                <a:lnTo>
+                  <a:pt x="1421101" y="1828800"/>
+                </a:lnTo>
+                <a:lnTo>
+                  <a:pt x="1430039" y="1828800"/>
+                </a:lnTo>
+                <a:lnTo>
+                  <a:pt x="1438976" y="1828800"/>
+                </a:lnTo>
+                <a:lnTo>
+                  <a:pt x="1447914" y="1828800"/>
+                </a:lnTo>
+                <a:lnTo>
+                  <a:pt x="1456852" y="1828800"/>
+                </a:lnTo>
+                <a:lnTo>
+                  <a:pt x="1465790" y="1828800"/>
+                </a:lnTo>
+                <a:lnTo>
+                  <a:pt x="1474727" y="1828800"/>
+                </a:lnTo>
+                <a:lnTo>
+                  <a:pt x="1483665" y="1828800"/>
+                </a:lnTo>
+                <a:lnTo>
+                  <a:pt x="1492603" y="1828800"/>
+                </a:lnTo>
+                <a:lnTo>
+                  <a:pt x="1501541" y="1828800"/>
+                </a:lnTo>
+                <a:lnTo>
+                  <a:pt x="1510478" y="1828800"/>
+                </a:lnTo>
+                <a:lnTo>
+                  <a:pt x="1519416" y="1828800"/>
+                </a:lnTo>
+                <a:lnTo>
+                  <a:pt x="1528354" y="1828800"/>
+                </a:lnTo>
+                <a:lnTo>
+                  <a:pt x="1537292" y="1828800"/>
+                </a:lnTo>
+                <a:lnTo>
+                  <a:pt x="1546229" y="1828800"/>
+                </a:lnTo>
+                <a:lnTo>
+                  <a:pt x="1555167" y="1828800"/>
+                </a:lnTo>
+                <a:lnTo>
+                  <a:pt x="1564105" y="1828800"/>
+                </a:lnTo>
+                <a:lnTo>
+                  <a:pt x="1573043" y="1828800"/>
+                </a:lnTo>
+                <a:lnTo>
+                  <a:pt x="1581980" y="1828800"/>
+                </a:lnTo>
+                <a:lnTo>
+                  <a:pt x="1590918" y="1828800"/>
+                </a:lnTo>
+                <a:lnTo>
+                  <a:pt x="1599856" y="1828800"/>
+                </a:lnTo>
+                <a:lnTo>
+                  <a:pt x="1608793" y="1828800"/>
+                </a:lnTo>
+                <a:lnTo>
+                  <a:pt x="1617731" y="1828800"/>
+                </a:lnTo>
+                <a:lnTo>
+                  <a:pt x="1626669" y="1828800"/>
+                </a:lnTo>
+                <a:lnTo>
+                  <a:pt x="1635607" y="1828800"/>
+                </a:lnTo>
+                <a:lnTo>
+                  <a:pt x="1644544" y="1828800"/>
+                </a:lnTo>
+                <a:lnTo>
+                  <a:pt x="1653482" y="1828800"/>
+                </a:lnTo>
+                <a:lnTo>
+                  <a:pt x="1662420" y="1828800"/>
+                </a:lnTo>
+                <a:lnTo>
+                  <a:pt x="1671358" y="1828800"/>
+                </a:lnTo>
+                <a:lnTo>
+                  <a:pt x="1680295" y="1828800"/>
+                </a:lnTo>
+                <a:lnTo>
+                  <a:pt x="1689233" y="1828800"/>
+                </a:lnTo>
+                <a:lnTo>
+                  <a:pt x="1698171" y="1828800"/>
+                </a:lnTo>
+                <a:lnTo>
+                  <a:pt x="1707109" y="1828800"/>
+                </a:lnTo>
+                <a:lnTo>
+                  <a:pt x="1716046" y="1828800"/>
+                </a:lnTo>
+                <a:lnTo>
+                  <a:pt x="1724984" y="1828800"/>
+                </a:lnTo>
+                <a:lnTo>
+                  <a:pt x="1733922" y="1828800"/>
+                </a:lnTo>
+                <a:lnTo>
+                  <a:pt x="1742860" y="1828800"/>
+                </a:lnTo>
+                <a:lnTo>
+                  <a:pt x="1751797" y="1828800"/>
+                </a:lnTo>
+                <a:lnTo>
+                  <a:pt x="1760735" y="1828800"/>
+                </a:lnTo>
+                <a:lnTo>
+                  <a:pt x="1769673" y="1828800"/>
+                </a:lnTo>
+                <a:lnTo>
+                  <a:pt x="1778611" y="1828800"/>
+                </a:lnTo>
+                <a:lnTo>
+                  <a:pt x="1787548" y="1828800"/>
+                </a:lnTo>
+                <a:lnTo>
+                  <a:pt x="1796486" y="1828800"/>
+                </a:lnTo>
+                <a:lnTo>
+                  <a:pt x="1805424" y="1828800"/>
+                </a:lnTo>
+                <a:lnTo>
+                  <a:pt x="1814362" y="1828800"/>
+                </a:lnTo>
+                <a:lnTo>
+                  <a:pt x="1823299" y="1828800"/>
+                </a:lnTo>
+                <a:lnTo>
+                  <a:pt x="1832237" y="1828800"/>
+                </a:lnTo>
+                <a:lnTo>
+                  <a:pt x="1841175" y="1828800"/>
+                </a:lnTo>
+                <a:lnTo>
+                  <a:pt x="1850113" y="1828800"/>
+                </a:lnTo>
+                <a:lnTo>
+                  <a:pt x="1859050" y="1828800"/>
+                </a:lnTo>
+                <a:lnTo>
+                  <a:pt x="1867988" y="1828800"/>
+                </a:lnTo>
+                <a:lnTo>
+                  <a:pt x="1876926" y="1828800"/>
+                </a:lnTo>
+                <a:lnTo>
+                  <a:pt x="1885864" y="1828800"/>
+                </a:lnTo>
+                <a:lnTo>
+                  <a:pt x="1894801" y="1828800"/>
+                </a:lnTo>
+                <a:lnTo>
+                  <a:pt x="1903739" y="1828800"/>
+                </a:lnTo>
+                <a:lnTo>
+                  <a:pt x="1912677" y="1828800"/>
+                </a:lnTo>
+                <a:lnTo>
+                  <a:pt x="1921615" y="1828800"/>
+                </a:lnTo>
+                <a:lnTo>
+                  <a:pt x="1930552" y="1828800"/>
+                </a:lnTo>
+                <a:lnTo>
+                  <a:pt x="1939490" y="1828800"/>
+                </a:lnTo>
+                <a:lnTo>
+                  <a:pt x="1948428" y="1828800"/>
+                </a:lnTo>
+                <a:lnTo>
+                  <a:pt x="1957366" y="1828800"/>
+                </a:lnTo>
+                <a:lnTo>
+                  <a:pt x="1966303" y="1828800"/>
+                </a:lnTo>
+                <a:lnTo>
+                  <a:pt x="1975241" y="1828800"/>
+                </a:lnTo>
+                <a:lnTo>
+                  <a:pt x="1984179" y="1828800"/>
+                </a:lnTo>
+                <a:lnTo>
+                  <a:pt x="1993116" y="1828800"/>
+                </a:lnTo>
+                <a:lnTo>
+                  <a:pt x="2002054" y="1828800"/>
+                </a:lnTo>
+                <a:lnTo>
+                  <a:pt x="2010992" y="1828800"/>
+                </a:lnTo>
+                <a:lnTo>
+                  <a:pt x="2019930" y="1828800"/>
+                </a:lnTo>
+                <a:lnTo>
+                  <a:pt x="2028867" y="1828800"/>
+                </a:lnTo>
+                <a:lnTo>
+                  <a:pt x="2037805" y="1828800"/>
+                </a:lnTo>
+                <a:lnTo>
+                  <a:pt x="2046743" y="1828800"/>
+                </a:lnTo>
+                <a:lnTo>
+                  <a:pt x="2055681" y="1828800"/>
+                </a:lnTo>
+                <a:lnTo>
+                  <a:pt x="2064618" y="1828800"/>
+                </a:lnTo>
+                <a:lnTo>
+                  <a:pt x="2073556" y="1828800"/>
+                </a:lnTo>
+                <a:lnTo>
+                  <a:pt x="2082494" y="1828800"/>
+                </a:lnTo>
+                <a:lnTo>
+                  <a:pt x="2091432" y="1828800"/>
+                </a:lnTo>
+                <a:lnTo>
+                  <a:pt x="2100369" y="1828800"/>
+                </a:lnTo>
+                <a:lnTo>
+                  <a:pt x="2109307" y="1828800"/>
+                </a:lnTo>
+                <a:lnTo>
+                  <a:pt x="2118245" y="1828800"/>
+                </a:lnTo>
+                <a:lnTo>
+                  <a:pt x="2127183" y="1828800"/>
+                </a:lnTo>
+                <a:lnTo>
+                  <a:pt x="2136120" y="1828800"/>
+                </a:lnTo>
+                <a:lnTo>
+                  <a:pt x="2145058" y="1828800"/>
+                </a:lnTo>
+                <a:lnTo>
+                  <a:pt x="2153996" y="1828800"/>
+                </a:lnTo>
+                <a:lnTo>
+                  <a:pt x="2162934" y="1828800"/>
+                </a:lnTo>
+                <a:lnTo>
+                  <a:pt x="2171871" y="1828800"/>
+                </a:lnTo>
+                <a:lnTo>
+                  <a:pt x="2180809" y="1828800"/>
+                </a:lnTo>
+                <a:lnTo>
+                  <a:pt x="2189747" y="1828800"/>
+                </a:lnTo>
+                <a:lnTo>
+                  <a:pt x="2198685" y="1828800"/>
+                </a:lnTo>
+                <a:lnTo>
+                  <a:pt x="2207622" y="1828800"/>
+                </a:lnTo>
+                <a:lnTo>
+                  <a:pt x="2216560" y="1828800"/>
+                </a:lnTo>
+                <a:lnTo>
+                  <a:pt x="2225498" y="1828800"/>
+                </a:lnTo>
+                <a:lnTo>
+                  <a:pt x="2234436" y="1828800"/>
+                </a:lnTo>
+                <a:lnTo>
+                  <a:pt x="2243373" y="1828800"/>
+                </a:lnTo>
+                <a:lnTo>
+                  <a:pt x="2252311" y="1828800"/>
+                </a:lnTo>
+                <a:lnTo>
+                  <a:pt x="2261249" y="1828800"/>
+                </a:lnTo>
+                <a:lnTo>
+                  <a:pt x="2270187" y="1828800"/>
+                </a:lnTo>
+                <a:lnTo>
+                  <a:pt x="2279124" y="1828800"/>
+                </a:lnTo>
+                <a:lnTo>
+                  <a:pt x="2288062" y="1828800"/>
+                </a:lnTo>
+                <a:lnTo>
+                  <a:pt x="2297000" y="1828800"/>
+                </a:lnTo>
+                <a:lnTo>
+                  <a:pt x="2305938" y="1828800"/>
+                </a:lnTo>
+                <a:lnTo>
+                  <a:pt x="2314875" y="1828800"/>
+                </a:lnTo>
+                <a:lnTo>
+                  <a:pt x="2323813" y="1828800"/>
+                </a:lnTo>
+                <a:lnTo>
+                  <a:pt x="2332751" y="1828800"/>
+                </a:lnTo>
+                <a:lnTo>
+                  <a:pt x="2341689" y="1828800"/>
+                </a:lnTo>
+                <a:lnTo>
+                  <a:pt x="2350626" y="1828800"/>
+                </a:lnTo>
+                <a:lnTo>
+                  <a:pt x="2359564" y="1828800"/>
+                </a:lnTo>
+                <a:lnTo>
+                  <a:pt x="2368502" y="1828800"/>
+                </a:lnTo>
+                <a:lnTo>
+                  <a:pt x="2377439" y="1828800"/>
+                </a:lnTo>
+                <a:lnTo>
+                  <a:pt x="2386377" y="1828800"/>
+                </a:lnTo>
+                <a:lnTo>
+                  <a:pt x="2395315" y="1828800"/>
+                </a:lnTo>
+                <a:lnTo>
+                  <a:pt x="2404253" y="1828800"/>
+                </a:lnTo>
+                <a:lnTo>
+                  <a:pt x="2413190" y="1828800"/>
+                </a:lnTo>
+                <a:lnTo>
+                  <a:pt x="2422128" y="1828800"/>
+                </a:lnTo>
+                <a:lnTo>
+                  <a:pt x="2431066" y="1828800"/>
+                </a:lnTo>
+                <a:lnTo>
+                  <a:pt x="2440004" y="1828800"/>
+                </a:lnTo>
+                <a:lnTo>
+                  <a:pt x="2448941" y="1828800"/>
+                </a:lnTo>
+                <a:lnTo>
+                  <a:pt x="2457879" y="1828800"/>
+                </a:lnTo>
+                <a:lnTo>
+                  <a:pt x="2466817" y="1828800"/>
+                </a:lnTo>
+                <a:lnTo>
+                  <a:pt x="2475755" y="1828800"/>
+                </a:lnTo>
+                <a:lnTo>
+                  <a:pt x="2484692" y="1828800"/>
+                </a:lnTo>
+                <a:lnTo>
+                  <a:pt x="2493630" y="1828800"/>
+                </a:lnTo>
+                <a:lnTo>
+                  <a:pt x="2502568" y="1828800"/>
+                </a:lnTo>
+                <a:lnTo>
+                  <a:pt x="2511506" y="1828800"/>
+                </a:lnTo>
+                <a:lnTo>
+                  <a:pt x="2520443" y="1828800"/>
+                </a:lnTo>
+                <a:lnTo>
+                  <a:pt x="2529381" y="1828800"/>
+                </a:lnTo>
+                <a:lnTo>
+                  <a:pt x="2538319" y="1828800"/>
+                </a:lnTo>
+                <a:lnTo>
+                  <a:pt x="2547257" y="1828800"/>
+                </a:lnTo>
+                <a:lnTo>
+                  <a:pt x="2556194" y="1828800"/>
+                </a:lnTo>
+                <a:lnTo>
+                  <a:pt x="2565132" y="1828800"/>
+                </a:lnTo>
+                <a:lnTo>
+                  <a:pt x="2574070" y="1828800"/>
+                </a:lnTo>
+                <a:lnTo>
+                  <a:pt x="2583008" y="1828800"/>
+                </a:lnTo>
+                <a:lnTo>
+                  <a:pt x="2591945" y="1828800"/>
+                </a:lnTo>
+                <a:lnTo>
+                  <a:pt x="2600883" y="1828800"/>
+                </a:lnTo>
+                <a:lnTo>
+                  <a:pt x="2609821" y="1828800"/>
+                </a:lnTo>
+                <a:lnTo>
+                  <a:pt x="2618759" y="1828800"/>
+                </a:lnTo>
+                <a:lnTo>
+                  <a:pt x="2627696" y="1828800"/>
+                </a:lnTo>
+                <a:lnTo>
+                  <a:pt x="2636634" y="1828800"/>
+                </a:lnTo>
+                <a:lnTo>
+                  <a:pt x="2645572" y="1828800"/>
+                </a:lnTo>
+                <a:lnTo>
+                  <a:pt x="2654510" y="1828800"/>
+                </a:lnTo>
+                <a:lnTo>
+                  <a:pt x="2663447" y="1828800"/>
+                </a:lnTo>
+                <a:lnTo>
+                  <a:pt x="2672385" y="1828800"/>
+                </a:lnTo>
+                <a:lnTo>
+                  <a:pt x="2681323" y="1828800"/>
+                </a:lnTo>
+                <a:lnTo>
+                  <a:pt x="2690261" y="1828800"/>
+                </a:lnTo>
+                <a:lnTo>
+                  <a:pt x="2699198" y="1828800"/>
+                </a:lnTo>
+                <a:lnTo>
+                  <a:pt x="2708136" y="1828800"/>
+                </a:lnTo>
+                <a:lnTo>
+                  <a:pt x="2717074" y="1828800"/>
+                </a:lnTo>
+                <a:lnTo>
+                  <a:pt x="2726012" y="1828800"/>
+                </a:lnTo>
+                <a:lnTo>
+                  <a:pt x="2734949" y="1828800"/>
+                </a:lnTo>
+                <a:lnTo>
+                  <a:pt x="2743887" y="1828800"/>
+                </a:lnTo>
+                <a:lnTo>
+                  <a:pt x="2752825" y="1828800"/>
+                </a:lnTo>
+                <a:lnTo>
+                  <a:pt x="2761763" y="1828800"/>
+                </a:lnTo>
+                <a:lnTo>
+                  <a:pt x="2770700" y="1828800"/>
+                </a:lnTo>
+                <a:lnTo>
+                  <a:pt x="2779638" y="1828800"/>
+                </a:lnTo>
+                <a:lnTo>
+                  <a:pt x="2788576" y="1828800"/>
+                </a:lnTo>
+                <a:lnTo>
+                  <a:pt x="2797513" y="1828800"/>
+                </a:lnTo>
+                <a:lnTo>
+                  <a:pt x="2806451" y="1828800"/>
+                </a:lnTo>
+                <a:lnTo>
+                  <a:pt x="2815389" y="1828800"/>
+                </a:lnTo>
+                <a:lnTo>
+                  <a:pt x="2824327" y="1828800"/>
+                </a:lnTo>
+                <a:lnTo>
+                  <a:pt x="2833264" y="1828800"/>
+                </a:lnTo>
+                <a:lnTo>
+                  <a:pt x="2842202" y="1828800"/>
+                </a:lnTo>
+                <a:lnTo>
+                  <a:pt x="2851140" y="1828800"/>
+                </a:lnTo>
+                <a:lnTo>
+                  <a:pt x="2860078" y="1828800"/>
+                </a:lnTo>
+                <a:lnTo>
+                  <a:pt x="2869015" y="1828800"/>
+                </a:lnTo>
+                <a:lnTo>
+                  <a:pt x="2877953" y="1828800"/>
+                </a:lnTo>
+                <a:lnTo>
+                  <a:pt x="2886891" y="1828800"/>
+                </a:lnTo>
+                <a:lnTo>
+                  <a:pt x="2895829" y="1828800"/>
+                </a:lnTo>
+                <a:lnTo>
+                  <a:pt x="2904766" y="1828800"/>
+                </a:lnTo>
+                <a:lnTo>
+                  <a:pt x="2913704" y="1828800"/>
+                </a:lnTo>
+                <a:lnTo>
+                  <a:pt x="2922642" y="1828800"/>
+                </a:lnTo>
+                <a:lnTo>
+                  <a:pt x="2931580" y="1828800"/>
+                </a:lnTo>
+                <a:lnTo>
+                  <a:pt x="2940517" y="1828800"/>
+                </a:lnTo>
+                <a:lnTo>
+                  <a:pt x="2949455" y="1828800"/>
+                </a:lnTo>
+                <a:lnTo>
+                  <a:pt x="2958393" y="1828800"/>
+                </a:lnTo>
+                <a:lnTo>
+                  <a:pt x="2967331" y="1828800"/>
+                </a:lnTo>
+                <a:lnTo>
+                  <a:pt x="2976268" y="1828800"/>
+                </a:lnTo>
+                <a:lnTo>
+                  <a:pt x="2985206" y="1828800"/>
+                </a:lnTo>
+                <a:lnTo>
+                  <a:pt x="2994144" y="1828800"/>
+                </a:lnTo>
+                <a:lnTo>
+                  <a:pt x="3003082" y="1828800"/>
+                </a:lnTo>
+                <a:lnTo>
+                  <a:pt x="3012019" y="1828800"/>
+                </a:lnTo>
+                <a:lnTo>
+                  <a:pt x="3020957" y="1828800"/>
+                </a:lnTo>
+                <a:lnTo>
+                  <a:pt x="3029895" y="1828800"/>
+                </a:lnTo>
+                <a:lnTo>
+                  <a:pt x="3038833" y="1828800"/>
+                </a:lnTo>
+                <a:lnTo>
+                  <a:pt x="3047770" y="1828800"/>
+                </a:lnTo>
+                <a:lnTo>
+                  <a:pt x="3056708" y="1828800"/>
+                </a:lnTo>
+                <a:lnTo>
+                  <a:pt x="3065646" y="1828800"/>
+                </a:lnTo>
+                <a:lnTo>
+                  <a:pt x="3074584" y="1828800"/>
+                </a:lnTo>
+                <a:lnTo>
+                  <a:pt x="3083521" y="1828800"/>
+                </a:lnTo>
+                <a:lnTo>
+                  <a:pt x="3092459" y="1828800"/>
+                </a:lnTo>
+                <a:lnTo>
+                  <a:pt x="3101397" y="1828800"/>
+                </a:lnTo>
+                <a:lnTo>
+                  <a:pt x="3110335" y="1828800"/>
+                </a:lnTo>
+                <a:lnTo>
+                  <a:pt x="3119272" y="1828800"/>
+                </a:lnTo>
+                <a:lnTo>
+                  <a:pt x="3128210" y="1828800"/>
+                </a:lnTo>
+                <a:lnTo>
+                  <a:pt x="3137148" y="1828800"/>
+                </a:lnTo>
+                <a:lnTo>
+                  <a:pt x="3146086" y="1828800"/>
+                </a:lnTo>
+                <a:lnTo>
+                  <a:pt x="3155023" y="1828800"/>
+                </a:lnTo>
+                <a:lnTo>
+                  <a:pt x="3163961" y="1828800"/>
+                </a:lnTo>
+                <a:lnTo>
+                  <a:pt x="3172899" y="1828800"/>
+                </a:lnTo>
+                <a:lnTo>
+                  <a:pt x="3181836" y="1828800"/>
+                </a:lnTo>
+                <a:lnTo>
+                  <a:pt x="3190774" y="1828800"/>
+                </a:lnTo>
+                <a:lnTo>
+                  <a:pt x="3199712" y="1828800"/>
+                </a:lnTo>
+                <a:lnTo>
+                  <a:pt x="3208650" y="1828800"/>
+                </a:lnTo>
+                <a:lnTo>
+                  <a:pt x="3217587" y="1828800"/>
+                </a:lnTo>
+                <a:lnTo>
+                  <a:pt x="3226525" y="1828800"/>
+                </a:lnTo>
+                <a:lnTo>
+                  <a:pt x="3235463" y="1828800"/>
+                </a:lnTo>
+                <a:lnTo>
+                  <a:pt x="3244401" y="1828800"/>
+                </a:lnTo>
+                <a:lnTo>
+                  <a:pt x="3253338" y="1828800"/>
+                </a:lnTo>
+                <a:lnTo>
+                  <a:pt x="3262276" y="1828800"/>
+                </a:lnTo>
+                <a:lnTo>
+                  <a:pt x="3271214" y="1828800"/>
+                </a:lnTo>
+                <a:lnTo>
+                  <a:pt x="3280152" y="1828800"/>
+                </a:lnTo>
+                <a:lnTo>
+                  <a:pt x="3289089" y="1828800"/>
+                </a:lnTo>
+                <a:lnTo>
+                  <a:pt x="3298027" y="1828800"/>
+                </a:lnTo>
+                <a:lnTo>
+                  <a:pt x="3306965" y="1828800"/>
+                </a:lnTo>
+                <a:lnTo>
+                  <a:pt x="3315903" y="1828800"/>
+                </a:lnTo>
+                <a:lnTo>
+                  <a:pt x="3324840" y="1828800"/>
+                </a:lnTo>
+                <a:lnTo>
+                  <a:pt x="3333778" y="1828800"/>
+                </a:lnTo>
+                <a:lnTo>
+                  <a:pt x="3342716" y="1828800"/>
+                </a:lnTo>
+                <a:lnTo>
+                  <a:pt x="3351654" y="1828800"/>
+                </a:lnTo>
+                <a:lnTo>
+                  <a:pt x="3360591" y="1828800"/>
+                </a:lnTo>
+                <a:lnTo>
+                  <a:pt x="3369529" y="1828800"/>
+                </a:lnTo>
+                <a:lnTo>
+                  <a:pt x="3378467" y="1828800"/>
+                </a:lnTo>
+                <a:lnTo>
+                  <a:pt x="3387405" y="1828800"/>
+                </a:lnTo>
+                <a:lnTo>
+                  <a:pt x="3396342" y="1828800"/>
+                </a:lnTo>
+                <a:lnTo>
+                  <a:pt x="3405280" y="1828800"/>
+                </a:lnTo>
+                <a:lnTo>
+                  <a:pt x="3414218" y="1828800"/>
+                </a:lnTo>
+                <a:lnTo>
+                  <a:pt x="3423156" y="1828800"/>
+                </a:lnTo>
+                <a:lnTo>
+                  <a:pt x="3432093" y="1828800"/>
+                </a:lnTo>
+                <a:lnTo>
+                  <a:pt x="3441031" y="1828800"/>
+                </a:lnTo>
+                <a:lnTo>
+                  <a:pt x="3449969" y="1828800"/>
+                </a:lnTo>
+                <a:lnTo>
+                  <a:pt x="3458907" y="1828800"/>
+                </a:lnTo>
+                <a:lnTo>
+                  <a:pt x="3467844" y="1828800"/>
+                </a:lnTo>
+                <a:lnTo>
+                  <a:pt x="3476782" y="1828800"/>
+                </a:lnTo>
+                <a:lnTo>
+                  <a:pt x="3485720" y="1828800"/>
+                </a:lnTo>
+                <a:lnTo>
+                  <a:pt x="3494658" y="1828800"/>
+                </a:lnTo>
+                <a:lnTo>
+                  <a:pt x="3503595" y="1828800"/>
+                </a:lnTo>
+                <a:lnTo>
+                  <a:pt x="3512533" y="1828800"/>
+                </a:lnTo>
+                <a:lnTo>
+                  <a:pt x="3521471" y="1828800"/>
+                </a:lnTo>
+                <a:lnTo>
+                  <a:pt x="3530409" y="1828800"/>
+                </a:lnTo>
+                <a:lnTo>
+                  <a:pt x="3539346" y="1828800"/>
+                </a:lnTo>
+                <a:lnTo>
+                  <a:pt x="3548284" y="1828800"/>
+                </a:lnTo>
+                <a:lnTo>
+                  <a:pt x="3557222" y="1828800"/>
+                </a:lnTo>
+                <a:lnTo>
+                  <a:pt x="3566160" y="1828800"/>
+                </a:lnTo>
+                <a:lnTo>
+                  <a:pt x="3566160" y="1828800"/>
+                </a:lnTo>
+                <a:lnTo>
+                  <a:pt x="3557222" y="1828800"/>
+                </a:lnTo>
+                <a:lnTo>
+                  <a:pt x="3548284" y="1828800"/>
+                </a:lnTo>
+                <a:lnTo>
+                  <a:pt x="3539346" y="1828800"/>
+                </a:lnTo>
+                <a:lnTo>
+                  <a:pt x="3530409" y="1828800"/>
+                </a:lnTo>
+                <a:lnTo>
+                  <a:pt x="3521471" y="1828800"/>
+                </a:lnTo>
+                <a:lnTo>
+                  <a:pt x="3512533" y="1828800"/>
+                </a:lnTo>
+                <a:lnTo>
+                  <a:pt x="3503595" y="1828800"/>
+                </a:lnTo>
+                <a:lnTo>
+                  <a:pt x="3494658" y="1828800"/>
+                </a:lnTo>
+                <a:lnTo>
+                  <a:pt x="3485720" y="1828800"/>
+                </a:lnTo>
+                <a:lnTo>
+                  <a:pt x="3476782" y="1828800"/>
+                </a:lnTo>
+                <a:lnTo>
+                  <a:pt x="3467844" y="1828800"/>
+                </a:lnTo>
+                <a:lnTo>
+                  <a:pt x="3458907" y="1828800"/>
+                </a:lnTo>
+                <a:lnTo>
+                  <a:pt x="3449969" y="1828800"/>
+                </a:lnTo>
+                <a:lnTo>
+                  <a:pt x="3441031" y="1828800"/>
+                </a:lnTo>
+                <a:lnTo>
+                  <a:pt x="3432093" y="1828800"/>
+                </a:lnTo>
+                <a:lnTo>
+                  <a:pt x="3423156" y="1828800"/>
+                </a:lnTo>
+                <a:lnTo>
+                  <a:pt x="3414218" y="1828800"/>
+                </a:lnTo>
+                <a:lnTo>
+                  <a:pt x="3405280" y="1828800"/>
+                </a:lnTo>
+                <a:lnTo>
+                  <a:pt x="3396342" y="1828800"/>
+                </a:lnTo>
+                <a:lnTo>
+                  <a:pt x="3387405" y="1828800"/>
+                </a:lnTo>
+                <a:lnTo>
+                  <a:pt x="3378467" y="1828800"/>
+                </a:lnTo>
+                <a:lnTo>
+                  <a:pt x="3369529" y="1828800"/>
+                </a:lnTo>
+                <a:lnTo>
+                  <a:pt x="3360591" y="1828800"/>
+                </a:lnTo>
+                <a:lnTo>
+                  <a:pt x="3351654" y="1828800"/>
+                </a:lnTo>
+                <a:lnTo>
+                  <a:pt x="3342716" y="1828800"/>
+                </a:lnTo>
+                <a:lnTo>
+                  <a:pt x="3333778" y="1828800"/>
+                </a:lnTo>
+                <a:lnTo>
+                  <a:pt x="3324840" y="1828800"/>
+                </a:lnTo>
+                <a:lnTo>
+                  <a:pt x="3315903" y="1828800"/>
+                </a:lnTo>
+                <a:lnTo>
+                  <a:pt x="3306965" y="1828800"/>
+                </a:lnTo>
+                <a:lnTo>
+                  <a:pt x="3298027" y="1828800"/>
+                </a:lnTo>
+                <a:lnTo>
+                  <a:pt x="3289089" y="1828800"/>
+                </a:lnTo>
+                <a:lnTo>
+                  <a:pt x="3280152" y="1828800"/>
+                </a:lnTo>
+                <a:lnTo>
+                  <a:pt x="3271214" y="1828800"/>
+                </a:lnTo>
+                <a:lnTo>
+                  <a:pt x="3262276" y="1828800"/>
+                </a:lnTo>
+                <a:lnTo>
+                  <a:pt x="3253338" y="1828800"/>
+                </a:lnTo>
+                <a:lnTo>
+                  <a:pt x="3244401" y="1828800"/>
+                </a:lnTo>
+                <a:lnTo>
+                  <a:pt x="3235463" y="1828800"/>
+                </a:lnTo>
+                <a:lnTo>
+                  <a:pt x="3226525" y="1828800"/>
+                </a:lnTo>
+                <a:lnTo>
+                  <a:pt x="3217587" y="1828800"/>
+                </a:lnTo>
+                <a:lnTo>
+                  <a:pt x="3208650" y="1828800"/>
+                </a:lnTo>
+                <a:lnTo>
+                  <a:pt x="3199712" y="1828800"/>
+                </a:lnTo>
+                <a:lnTo>
+                  <a:pt x="3190774" y="1828800"/>
+                </a:lnTo>
+                <a:lnTo>
+                  <a:pt x="3181836" y="1828800"/>
+                </a:lnTo>
+                <a:lnTo>
+                  <a:pt x="3172899" y="1828800"/>
+                </a:lnTo>
+                <a:lnTo>
+                  <a:pt x="3163961" y="1828800"/>
+                </a:lnTo>
+                <a:lnTo>
+                  <a:pt x="3155023" y="1828800"/>
+                </a:lnTo>
+                <a:lnTo>
+                  <a:pt x="3146086" y="1828800"/>
+                </a:lnTo>
+                <a:lnTo>
+                  <a:pt x="3137148" y="1828800"/>
+                </a:lnTo>
+                <a:lnTo>
+                  <a:pt x="3128210" y="1828800"/>
+                </a:lnTo>
+                <a:lnTo>
+                  <a:pt x="3119272" y="1828800"/>
+                </a:lnTo>
+                <a:lnTo>
+                  <a:pt x="3110335" y="1828800"/>
+                </a:lnTo>
+                <a:lnTo>
+                  <a:pt x="3101397" y="1828800"/>
+                </a:lnTo>
+                <a:lnTo>
+                  <a:pt x="3092459" y="1828800"/>
+                </a:lnTo>
+                <a:lnTo>
+                  <a:pt x="3083521" y="1828800"/>
+                </a:lnTo>
+                <a:lnTo>
+                  <a:pt x="3074584" y="1828800"/>
+                </a:lnTo>
+                <a:lnTo>
+                  <a:pt x="3065646" y="1828800"/>
+                </a:lnTo>
+                <a:lnTo>
+                  <a:pt x="3056708" y="1828800"/>
+                </a:lnTo>
+                <a:lnTo>
+                  <a:pt x="3047770" y="1828800"/>
+                </a:lnTo>
+                <a:lnTo>
+                  <a:pt x="3038833" y="1828800"/>
+                </a:lnTo>
+                <a:lnTo>
+                  <a:pt x="3029895" y="1828800"/>
+                </a:lnTo>
+                <a:lnTo>
+                  <a:pt x="3020957" y="1828800"/>
+                </a:lnTo>
+                <a:lnTo>
+                  <a:pt x="3012019" y="1828800"/>
+                </a:lnTo>
+                <a:lnTo>
+                  <a:pt x="3003082" y="1828800"/>
+                </a:lnTo>
+                <a:lnTo>
+                  <a:pt x="2994144" y="1828800"/>
+                </a:lnTo>
+                <a:lnTo>
+                  <a:pt x="2985206" y="1828800"/>
+                </a:lnTo>
+                <a:lnTo>
+                  <a:pt x="2976268" y="1828800"/>
+                </a:lnTo>
+                <a:lnTo>
+                  <a:pt x="2967331" y="1828800"/>
+                </a:lnTo>
+                <a:lnTo>
+                  <a:pt x="2958393" y="1828800"/>
+                </a:lnTo>
+                <a:lnTo>
+                  <a:pt x="2949455" y="1828800"/>
+                </a:lnTo>
+                <a:lnTo>
+                  <a:pt x="2940517" y="1828800"/>
+                </a:lnTo>
+                <a:lnTo>
+                  <a:pt x="2931580" y="1828800"/>
+                </a:lnTo>
+                <a:lnTo>
+                  <a:pt x="2922642" y="1828800"/>
+                </a:lnTo>
+                <a:lnTo>
+                  <a:pt x="2913704" y="1828800"/>
+                </a:lnTo>
+                <a:lnTo>
+                  <a:pt x="2904766" y="1828800"/>
+                </a:lnTo>
+                <a:lnTo>
+                  <a:pt x="2895829" y="1828800"/>
+                </a:lnTo>
+                <a:lnTo>
+                  <a:pt x="2886891" y="1828800"/>
+                </a:lnTo>
+                <a:lnTo>
+                  <a:pt x="2877953" y="1828800"/>
+                </a:lnTo>
+                <a:lnTo>
+                  <a:pt x="2869015" y="1828800"/>
+                </a:lnTo>
+                <a:lnTo>
+                  <a:pt x="2860078" y="1828800"/>
+                </a:lnTo>
+                <a:lnTo>
+                  <a:pt x="2851140" y="1828800"/>
+                </a:lnTo>
+                <a:lnTo>
+                  <a:pt x="2842202" y="1828800"/>
+                </a:lnTo>
+                <a:lnTo>
+                  <a:pt x="2833264" y="1828800"/>
+                </a:lnTo>
+                <a:lnTo>
+                  <a:pt x="2824327" y="1828800"/>
+                </a:lnTo>
+                <a:lnTo>
+                  <a:pt x="2815389" y="1828800"/>
+                </a:lnTo>
+                <a:lnTo>
+                  <a:pt x="2806451" y="1828800"/>
+                </a:lnTo>
+                <a:lnTo>
+                  <a:pt x="2797513" y="1828800"/>
+                </a:lnTo>
+                <a:lnTo>
+                  <a:pt x="2788576" y="1828800"/>
+                </a:lnTo>
+                <a:lnTo>
+                  <a:pt x="2779638" y="1828800"/>
+                </a:lnTo>
+                <a:lnTo>
+                  <a:pt x="2770700" y="1828800"/>
+                </a:lnTo>
+                <a:lnTo>
+                  <a:pt x="2761763" y="1828800"/>
+                </a:lnTo>
+                <a:lnTo>
+                  <a:pt x="2752825" y="1828800"/>
+                </a:lnTo>
+                <a:lnTo>
+                  <a:pt x="2743887" y="1828800"/>
+                </a:lnTo>
+                <a:lnTo>
+                  <a:pt x="2734949" y="1828800"/>
+                </a:lnTo>
+                <a:lnTo>
+                  <a:pt x="2726012" y="1828800"/>
+                </a:lnTo>
+                <a:lnTo>
+                  <a:pt x="2717074" y="1828800"/>
+                </a:lnTo>
+                <a:lnTo>
+                  <a:pt x="2708136" y="1828800"/>
+                </a:lnTo>
+                <a:lnTo>
+                  <a:pt x="2699198" y="1828800"/>
+                </a:lnTo>
+                <a:lnTo>
+                  <a:pt x="2690261" y="1828800"/>
+                </a:lnTo>
+                <a:lnTo>
+                  <a:pt x="2681323" y="1828800"/>
+                </a:lnTo>
+                <a:lnTo>
+                  <a:pt x="2672385" y="1828800"/>
+                </a:lnTo>
+                <a:lnTo>
+                  <a:pt x="2663447" y="1828800"/>
+                </a:lnTo>
+                <a:lnTo>
+                  <a:pt x="2654510" y="1828800"/>
+                </a:lnTo>
+                <a:lnTo>
+                  <a:pt x="2645572" y="1828800"/>
+                </a:lnTo>
+                <a:lnTo>
+                  <a:pt x="2636634" y="1828800"/>
+                </a:lnTo>
+                <a:lnTo>
+                  <a:pt x="2627696" y="1828800"/>
+                </a:lnTo>
+                <a:lnTo>
+                  <a:pt x="2618759" y="1828800"/>
+                </a:lnTo>
+                <a:lnTo>
+                  <a:pt x="2609821" y="1828800"/>
+                </a:lnTo>
+                <a:lnTo>
+                  <a:pt x="2600883" y="1828800"/>
+                </a:lnTo>
+                <a:lnTo>
+                  <a:pt x="2591945" y="1828800"/>
+                </a:lnTo>
+                <a:lnTo>
+                  <a:pt x="2583008" y="1828800"/>
+                </a:lnTo>
+                <a:lnTo>
+                  <a:pt x="2574070" y="1828800"/>
+                </a:lnTo>
+                <a:lnTo>
+                  <a:pt x="2565132" y="1828800"/>
+                </a:lnTo>
+                <a:lnTo>
+                  <a:pt x="2556194" y="1828800"/>
+                </a:lnTo>
+                <a:lnTo>
+                  <a:pt x="2547257" y="1828800"/>
+                </a:lnTo>
+                <a:lnTo>
+                  <a:pt x="2538319" y="1828800"/>
+                </a:lnTo>
+                <a:lnTo>
+                  <a:pt x="2529381" y="1828800"/>
+                </a:lnTo>
+                <a:lnTo>
+                  <a:pt x="2520443" y="1828800"/>
+                </a:lnTo>
+                <a:lnTo>
+                  <a:pt x="2511506" y="1828800"/>
+                </a:lnTo>
+                <a:lnTo>
+                  <a:pt x="2502568" y="1828800"/>
+                </a:lnTo>
+                <a:lnTo>
+                  <a:pt x="2493630" y="1828800"/>
+                </a:lnTo>
+                <a:lnTo>
+                  <a:pt x="2484692" y="1828800"/>
+                </a:lnTo>
+                <a:lnTo>
+                  <a:pt x="2475755" y="1828800"/>
+                </a:lnTo>
+                <a:lnTo>
+                  <a:pt x="2466817" y="1828800"/>
+                </a:lnTo>
+                <a:lnTo>
+                  <a:pt x="2457879" y="1828800"/>
+                </a:lnTo>
+                <a:lnTo>
+                  <a:pt x="2448941" y="1828800"/>
+                </a:lnTo>
+                <a:lnTo>
+                  <a:pt x="2440004" y="1828800"/>
+                </a:lnTo>
+                <a:lnTo>
+                  <a:pt x="2431066" y="1828800"/>
+                </a:lnTo>
+                <a:lnTo>
+                  <a:pt x="2422128" y="1828800"/>
+                </a:lnTo>
+                <a:lnTo>
+                  <a:pt x="2413190" y="1828800"/>
+                </a:lnTo>
+                <a:lnTo>
+                  <a:pt x="2404253" y="1828800"/>
+                </a:lnTo>
+                <a:lnTo>
+                  <a:pt x="2395315" y="1828800"/>
+                </a:lnTo>
+                <a:lnTo>
+                  <a:pt x="2386377" y="1828800"/>
+                </a:lnTo>
+                <a:lnTo>
+                  <a:pt x="2377439" y="1828800"/>
+                </a:lnTo>
+                <a:lnTo>
+                  <a:pt x="2368502" y="1828800"/>
+                </a:lnTo>
+                <a:lnTo>
+                  <a:pt x="2359564" y="1828800"/>
+                </a:lnTo>
+                <a:lnTo>
+                  <a:pt x="2350626" y="1828800"/>
+                </a:lnTo>
+                <a:lnTo>
+                  <a:pt x="2341689" y="1828800"/>
+                </a:lnTo>
+                <a:lnTo>
+                  <a:pt x="2332751" y="1828800"/>
+                </a:lnTo>
+                <a:lnTo>
+                  <a:pt x="2323813" y="1828800"/>
+                </a:lnTo>
+                <a:lnTo>
+                  <a:pt x="2314875" y="1828800"/>
+                </a:lnTo>
+                <a:lnTo>
+                  <a:pt x="2305938" y="1828800"/>
+                </a:lnTo>
+                <a:lnTo>
+                  <a:pt x="2297000" y="1828800"/>
+                </a:lnTo>
+                <a:lnTo>
+                  <a:pt x="2288062" y="1828800"/>
+                </a:lnTo>
+                <a:lnTo>
+                  <a:pt x="2279124" y="1828800"/>
+                </a:lnTo>
+                <a:lnTo>
+                  <a:pt x="2270187" y="1828800"/>
+                </a:lnTo>
+                <a:lnTo>
+                  <a:pt x="2261249" y="1828800"/>
+                </a:lnTo>
+                <a:lnTo>
+                  <a:pt x="2252311" y="1828800"/>
+                </a:lnTo>
+                <a:lnTo>
+                  <a:pt x="2243373" y="1828800"/>
+                </a:lnTo>
+                <a:lnTo>
+                  <a:pt x="2234436" y="1828800"/>
+                </a:lnTo>
+                <a:lnTo>
+                  <a:pt x="2225498" y="1828800"/>
+                </a:lnTo>
+                <a:lnTo>
+                  <a:pt x="2216560" y="1828800"/>
+                </a:lnTo>
+                <a:lnTo>
+                  <a:pt x="2207622" y="1828800"/>
+                </a:lnTo>
+                <a:lnTo>
+                  <a:pt x="2198685" y="1828800"/>
+                </a:lnTo>
+                <a:lnTo>
+                  <a:pt x="2189747" y="1828800"/>
+                </a:lnTo>
+                <a:lnTo>
+                  <a:pt x="2180809" y="1828800"/>
+                </a:lnTo>
+                <a:lnTo>
+                  <a:pt x="2171871" y="1828800"/>
+                </a:lnTo>
+                <a:lnTo>
+                  <a:pt x="2162934" y="1828800"/>
+                </a:lnTo>
+                <a:lnTo>
+                  <a:pt x="2153996" y="1828800"/>
+                </a:lnTo>
+                <a:lnTo>
+                  <a:pt x="2145058" y="1828800"/>
+                </a:lnTo>
+                <a:lnTo>
+                  <a:pt x="2136120" y="1828800"/>
+                </a:lnTo>
+                <a:lnTo>
+                  <a:pt x="2127183" y="1828800"/>
+                </a:lnTo>
+                <a:lnTo>
+                  <a:pt x="2118245" y="1828800"/>
+                </a:lnTo>
+                <a:lnTo>
+                  <a:pt x="2109307" y="1828800"/>
+                </a:lnTo>
+                <a:lnTo>
+                  <a:pt x="2100369" y="1828800"/>
+                </a:lnTo>
+                <a:lnTo>
+                  <a:pt x="2091432" y="1828800"/>
+                </a:lnTo>
+                <a:lnTo>
+                  <a:pt x="2082494" y="1828800"/>
+                </a:lnTo>
+                <a:lnTo>
+                  <a:pt x="2073556" y="1828800"/>
+                </a:lnTo>
+                <a:lnTo>
+                  <a:pt x="2064618" y="1828800"/>
+                </a:lnTo>
+                <a:lnTo>
+                  <a:pt x="2055681" y="1828800"/>
+                </a:lnTo>
+                <a:lnTo>
+                  <a:pt x="2046743" y="1828800"/>
+                </a:lnTo>
+                <a:lnTo>
+                  <a:pt x="2037805" y="1828800"/>
+                </a:lnTo>
+                <a:lnTo>
+                  <a:pt x="2028867" y="1828800"/>
+                </a:lnTo>
+                <a:lnTo>
+                  <a:pt x="2019930" y="1828800"/>
+                </a:lnTo>
+                <a:lnTo>
+                  <a:pt x="2010992" y="1828800"/>
+                </a:lnTo>
+                <a:lnTo>
+                  <a:pt x="2002054" y="1828800"/>
+                </a:lnTo>
+                <a:lnTo>
+                  <a:pt x="1993116" y="1828800"/>
+                </a:lnTo>
+                <a:lnTo>
+                  <a:pt x="1984179" y="1828800"/>
+                </a:lnTo>
+                <a:lnTo>
+                  <a:pt x="1975241" y="1828800"/>
+                </a:lnTo>
+                <a:lnTo>
+                  <a:pt x="1966303" y="1828800"/>
+                </a:lnTo>
+                <a:lnTo>
+                  <a:pt x="1957366" y="1828800"/>
+                </a:lnTo>
+                <a:lnTo>
+                  <a:pt x="1948428" y="1828800"/>
+                </a:lnTo>
+                <a:lnTo>
+                  <a:pt x="1939490" y="1828800"/>
+                </a:lnTo>
+                <a:lnTo>
+                  <a:pt x="1930552" y="1828800"/>
+                </a:lnTo>
+                <a:lnTo>
+                  <a:pt x="1921615" y="1828800"/>
+                </a:lnTo>
+                <a:lnTo>
+                  <a:pt x="1912677" y="1828800"/>
+                </a:lnTo>
+                <a:lnTo>
+                  <a:pt x="1903739" y="1828800"/>
+                </a:lnTo>
+                <a:lnTo>
+                  <a:pt x="1894801" y="1828800"/>
+                </a:lnTo>
+                <a:lnTo>
+                  <a:pt x="1885864" y="1828800"/>
+                </a:lnTo>
+                <a:lnTo>
+                  <a:pt x="1876926" y="1828800"/>
+                </a:lnTo>
+                <a:lnTo>
+                  <a:pt x="1867988" y="1828800"/>
+                </a:lnTo>
+                <a:lnTo>
+                  <a:pt x="1859050" y="1828800"/>
+                </a:lnTo>
+                <a:lnTo>
+                  <a:pt x="1850113" y="1828800"/>
+                </a:lnTo>
+                <a:lnTo>
+                  <a:pt x="1841175" y="1828800"/>
+                </a:lnTo>
+                <a:lnTo>
+                  <a:pt x="1832237" y="1828800"/>
+                </a:lnTo>
+                <a:lnTo>
+                  <a:pt x="1823299" y="1828800"/>
+                </a:lnTo>
+                <a:lnTo>
+                  <a:pt x="1814362" y="1828800"/>
+                </a:lnTo>
+                <a:lnTo>
+                  <a:pt x="1805424" y="1828800"/>
+                </a:lnTo>
+                <a:lnTo>
+                  <a:pt x="1796486" y="1828800"/>
+                </a:lnTo>
+                <a:lnTo>
+                  <a:pt x="1787548" y="1828800"/>
+                </a:lnTo>
+                <a:lnTo>
+                  <a:pt x="1778611" y="1828800"/>
+                </a:lnTo>
+                <a:lnTo>
+                  <a:pt x="1769673" y="1828800"/>
+                </a:lnTo>
+                <a:lnTo>
+                  <a:pt x="1760735" y="1828800"/>
+                </a:lnTo>
+                <a:lnTo>
+                  <a:pt x="1751797" y="1828800"/>
+                </a:lnTo>
+                <a:lnTo>
+                  <a:pt x="1742860" y="1828800"/>
+                </a:lnTo>
+                <a:lnTo>
+                  <a:pt x="1733922" y="1828800"/>
+                </a:lnTo>
+                <a:lnTo>
+                  <a:pt x="1724984" y="1828800"/>
+                </a:lnTo>
+                <a:lnTo>
+                  <a:pt x="1716046" y="1828800"/>
+                </a:lnTo>
+                <a:lnTo>
+                  <a:pt x="1707109" y="1828800"/>
+                </a:lnTo>
+                <a:lnTo>
+                  <a:pt x="1698171" y="1828800"/>
+                </a:lnTo>
+                <a:lnTo>
+                  <a:pt x="1689233" y="1828800"/>
+                </a:lnTo>
+                <a:lnTo>
+                  <a:pt x="1680295" y="1828800"/>
+                </a:lnTo>
+                <a:lnTo>
+                  <a:pt x="1671358" y="1828800"/>
+                </a:lnTo>
+                <a:lnTo>
+                  <a:pt x="1662420" y="1828800"/>
+                </a:lnTo>
+                <a:lnTo>
+                  <a:pt x="1653482" y="1828800"/>
+                </a:lnTo>
+                <a:lnTo>
+                  <a:pt x="1644544" y="1828800"/>
+                </a:lnTo>
+                <a:lnTo>
+                  <a:pt x="1635607" y="1828800"/>
+                </a:lnTo>
+                <a:lnTo>
+                  <a:pt x="1626669" y="1828800"/>
+                </a:lnTo>
+                <a:lnTo>
+                  <a:pt x="1617731" y="1828800"/>
+                </a:lnTo>
+                <a:lnTo>
+                  <a:pt x="1608793" y="1828800"/>
+                </a:lnTo>
+                <a:lnTo>
+                  <a:pt x="1599856" y="1828800"/>
+                </a:lnTo>
+                <a:lnTo>
+                  <a:pt x="1590918" y="1828800"/>
+                </a:lnTo>
+                <a:lnTo>
+                  <a:pt x="1581980" y="1828800"/>
+                </a:lnTo>
+                <a:lnTo>
+                  <a:pt x="1573043" y="1828800"/>
+                </a:lnTo>
+                <a:lnTo>
+                  <a:pt x="1564105" y="1828800"/>
+                </a:lnTo>
+                <a:lnTo>
+                  <a:pt x="1555167" y="1828800"/>
+                </a:lnTo>
+                <a:lnTo>
+                  <a:pt x="1546229" y="1828800"/>
+                </a:lnTo>
+                <a:lnTo>
+                  <a:pt x="1537292" y="1828800"/>
+                </a:lnTo>
+                <a:lnTo>
+                  <a:pt x="1528354" y="1828800"/>
+                </a:lnTo>
+                <a:lnTo>
+                  <a:pt x="1519416" y="1828800"/>
+                </a:lnTo>
+                <a:lnTo>
+                  <a:pt x="1510478" y="1828800"/>
+                </a:lnTo>
+                <a:lnTo>
+                  <a:pt x="1501541" y="1828800"/>
+                </a:lnTo>
+                <a:lnTo>
+                  <a:pt x="1492603" y="1828800"/>
+                </a:lnTo>
+                <a:lnTo>
+                  <a:pt x="1483665" y="1828800"/>
+                </a:lnTo>
+                <a:lnTo>
+                  <a:pt x="1474727" y="1828800"/>
+                </a:lnTo>
+                <a:lnTo>
+                  <a:pt x="1465790" y="1828800"/>
+                </a:lnTo>
+                <a:lnTo>
+                  <a:pt x="1456852" y="1828800"/>
+                </a:lnTo>
+                <a:lnTo>
+                  <a:pt x="1447914" y="1828800"/>
+                </a:lnTo>
+                <a:lnTo>
+                  <a:pt x="1438976" y="1828800"/>
+                </a:lnTo>
+                <a:lnTo>
+                  <a:pt x="1430039" y="1828800"/>
+                </a:lnTo>
+                <a:lnTo>
+                  <a:pt x="1421101" y="1828800"/>
+                </a:lnTo>
+                <a:lnTo>
+                  <a:pt x="1412163" y="1828800"/>
+                </a:lnTo>
+                <a:lnTo>
+                  <a:pt x="1403225" y="1828800"/>
+                </a:lnTo>
+                <a:lnTo>
+                  <a:pt x="1394288" y="1828800"/>
+                </a:lnTo>
+                <a:lnTo>
+                  <a:pt x="1385350" y="1828800"/>
+                </a:lnTo>
+                <a:lnTo>
+                  <a:pt x="1376412" y="1828800"/>
+                </a:lnTo>
+                <a:lnTo>
+                  <a:pt x="1367474" y="1828800"/>
+                </a:lnTo>
+                <a:lnTo>
+                  <a:pt x="1358537" y="1828800"/>
+                </a:lnTo>
+                <a:lnTo>
+                  <a:pt x="1349599" y="1828800"/>
+                </a:lnTo>
+                <a:lnTo>
+                  <a:pt x="1340661" y="1828800"/>
+                </a:lnTo>
+                <a:lnTo>
+                  <a:pt x="1331723" y="1828800"/>
+                </a:lnTo>
+                <a:lnTo>
+                  <a:pt x="1322786" y="1828800"/>
+                </a:lnTo>
+                <a:lnTo>
+                  <a:pt x="1313848" y="1828800"/>
+                </a:lnTo>
+                <a:lnTo>
+                  <a:pt x="1304910" y="1828800"/>
+                </a:lnTo>
+                <a:lnTo>
+                  <a:pt x="1295972" y="1828800"/>
+                </a:lnTo>
+                <a:lnTo>
+                  <a:pt x="1287035" y="1828800"/>
+                </a:lnTo>
+                <a:lnTo>
+                  <a:pt x="1278097" y="1828800"/>
+                </a:lnTo>
+                <a:lnTo>
+                  <a:pt x="1269159" y="1828800"/>
+                </a:lnTo>
+                <a:lnTo>
+                  <a:pt x="1260221" y="1828800"/>
+                </a:lnTo>
+                <a:lnTo>
+                  <a:pt x="1251284" y="1828800"/>
+                </a:lnTo>
+                <a:lnTo>
+                  <a:pt x="1242346" y="1828800"/>
+                </a:lnTo>
+                <a:lnTo>
+                  <a:pt x="1233408" y="1828800"/>
+                </a:lnTo>
+                <a:lnTo>
+                  <a:pt x="1224470" y="1828800"/>
+                </a:lnTo>
+                <a:lnTo>
+                  <a:pt x="1215533" y="1828800"/>
+                </a:lnTo>
+                <a:lnTo>
+                  <a:pt x="1206595" y="1828800"/>
+                </a:lnTo>
+                <a:lnTo>
+                  <a:pt x="1197657" y="1828800"/>
+                </a:lnTo>
+                <a:lnTo>
+                  <a:pt x="1188720" y="1828800"/>
+                </a:lnTo>
+                <a:lnTo>
+                  <a:pt x="1179782" y="1828800"/>
+                </a:lnTo>
+                <a:lnTo>
+                  <a:pt x="1170844" y="1828800"/>
+                </a:lnTo>
+                <a:lnTo>
+                  <a:pt x="1161906" y="1828800"/>
+                </a:lnTo>
+                <a:lnTo>
+                  <a:pt x="1152969" y="1828800"/>
+                </a:lnTo>
+                <a:lnTo>
+                  <a:pt x="1144031" y="1828800"/>
+                </a:lnTo>
+                <a:lnTo>
+                  <a:pt x="1135093" y="1828800"/>
+                </a:lnTo>
+                <a:lnTo>
+                  <a:pt x="1126155" y="1828800"/>
+                </a:lnTo>
+                <a:lnTo>
+                  <a:pt x="1117218" y="1828800"/>
+                </a:lnTo>
+                <a:lnTo>
+                  <a:pt x="1108280" y="1828800"/>
+                </a:lnTo>
+                <a:lnTo>
+                  <a:pt x="1099342" y="1828800"/>
+                </a:lnTo>
+                <a:lnTo>
+                  <a:pt x="1090404" y="1828800"/>
+                </a:lnTo>
+                <a:lnTo>
+                  <a:pt x="1081467" y="1828800"/>
+                </a:lnTo>
+                <a:lnTo>
+                  <a:pt x="1072529" y="1828800"/>
+                </a:lnTo>
+                <a:lnTo>
+                  <a:pt x="1063591" y="1828800"/>
+                </a:lnTo>
+                <a:lnTo>
+                  <a:pt x="1054653" y="1828800"/>
+                </a:lnTo>
+                <a:lnTo>
+                  <a:pt x="1045716" y="1828800"/>
+                </a:lnTo>
+                <a:lnTo>
+                  <a:pt x="1036778" y="1828800"/>
+                </a:lnTo>
+                <a:lnTo>
+                  <a:pt x="1027840" y="1828800"/>
+                </a:lnTo>
+                <a:lnTo>
+                  <a:pt x="1018902" y="1828800"/>
+                </a:lnTo>
+                <a:lnTo>
+                  <a:pt x="1009965" y="1828800"/>
+                </a:lnTo>
+                <a:lnTo>
+                  <a:pt x="1001027" y="1828800"/>
+                </a:lnTo>
+                <a:lnTo>
+                  <a:pt x="992089" y="1828800"/>
+                </a:lnTo>
+                <a:lnTo>
+                  <a:pt x="983151" y="1828800"/>
+                </a:lnTo>
+                <a:lnTo>
+                  <a:pt x="974214" y="1828800"/>
+                </a:lnTo>
+                <a:lnTo>
+                  <a:pt x="965276" y="1828800"/>
+                </a:lnTo>
+                <a:lnTo>
+                  <a:pt x="956338" y="1828800"/>
+                </a:lnTo>
+                <a:lnTo>
+                  <a:pt x="947400" y="1828800"/>
+                </a:lnTo>
+                <a:lnTo>
+                  <a:pt x="938463" y="1828800"/>
+                </a:lnTo>
+                <a:lnTo>
+                  <a:pt x="929525" y="1828800"/>
+                </a:lnTo>
+                <a:lnTo>
+                  <a:pt x="920587" y="1828800"/>
+                </a:lnTo>
+                <a:lnTo>
+                  <a:pt x="911649" y="1828800"/>
+                </a:lnTo>
+                <a:lnTo>
+                  <a:pt x="902712" y="1828800"/>
+                </a:lnTo>
+                <a:lnTo>
+                  <a:pt x="893774" y="1828800"/>
+                </a:lnTo>
+                <a:lnTo>
+                  <a:pt x="884836" y="1828800"/>
+                </a:lnTo>
+                <a:lnTo>
+                  <a:pt x="875898" y="1828800"/>
+                </a:lnTo>
+                <a:lnTo>
+                  <a:pt x="866961" y="1828800"/>
+                </a:lnTo>
+                <a:lnTo>
+                  <a:pt x="858023" y="1828800"/>
+                </a:lnTo>
+                <a:lnTo>
+                  <a:pt x="849085" y="1828800"/>
+                </a:lnTo>
+                <a:lnTo>
+                  <a:pt x="840147" y="1828800"/>
+                </a:lnTo>
+                <a:lnTo>
+                  <a:pt x="831210" y="1828800"/>
+                </a:lnTo>
+                <a:lnTo>
+                  <a:pt x="822272" y="1828800"/>
+                </a:lnTo>
+                <a:lnTo>
+                  <a:pt x="813334" y="1828800"/>
+                </a:lnTo>
+                <a:lnTo>
+                  <a:pt x="804396" y="1828800"/>
+                </a:lnTo>
+                <a:lnTo>
+                  <a:pt x="795459" y="1828800"/>
+                </a:lnTo>
+                <a:lnTo>
+                  <a:pt x="786521" y="1828800"/>
+                </a:lnTo>
+                <a:lnTo>
+                  <a:pt x="777583" y="1828800"/>
+                </a:lnTo>
+                <a:lnTo>
+                  <a:pt x="768646" y="1828800"/>
+                </a:lnTo>
+                <a:lnTo>
+                  <a:pt x="759708" y="1828800"/>
+                </a:lnTo>
+                <a:lnTo>
+                  <a:pt x="750770" y="1828800"/>
+                </a:lnTo>
+                <a:lnTo>
+                  <a:pt x="741832" y="1828800"/>
+                </a:lnTo>
+                <a:lnTo>
+                  <a:pt x="732895" y="1828800"/>
+                </a:lnTo>
+                <a:lnTo>
+                  <a:pt x="723957" y="1828800"/>
+                </a:lnTo>
+                <a:lnTo>
+                  <a:pt x="715019" y="1828800"/>
+                </a:lnTo>
+                <a:lnTo>
+                  <a:pt x="706081" y="1828800"/>
+                </a:lnTo>
+                <a:lnTo>
+                  <a:pt x="697144" y="1828800"/>
+                </a:lnTo>
+                <a:lnTo>
+                  <a:pt x="688206" y="1828800"/>
+                </a:lnTo>
+                <a:lnTo>
+                  <a:pt x="679268" y="1828800"/>
+                </a:lnTo>
+                <a:lnTo>
+                  <a:pt x="670330" y="1828800"/>
+                </a:lnTo>
+                <a:lnTo>
+                  <a:pt x="661393" y="1828800"/>
+                </a:lnTo>
+                <a:lnTo>
+                  <a:pt x="652455" y="1828800"/>
+                </a:lnTo>
+                <a:lnTo>
+                  <a:pt x="643517" y="1828800"/>
+                </a:lnTo>
+                <a:lnTo>
+                  <a:pt x="634579" y="1828800"/>
+                </a:lnTo>
+                <a:lnTo>
+                  <a:pt x="625642" y="1828800"/>
+                </a:lnTo>
+                <a:lnTo>
+                  <a:pt x="616704" y="1828800"/>
+                </a:lnTo>
+                <a:lnTo>
+                  <a:pt x="607766" y="1828800"/>
+                </a:lnTo>
+                <a:lnTo>
+                  <a:pt x="598828" y="1828800"/>
+                </a:lnTo>
+                <a:lnTo>
+                  <a:pt x="589891" y="1828800"/>
+                </a:lnTo>
+                <a:lnTo>
+                  <a:pt x="580953" y="1828800"/>
+                </a:lnTo>
+                <a:lnTo>
+                  <a:pt x="572015" y="1828800"/>
+                </a:lnTo>
+                <a:lnTo>
+                  <a:pt x="563077" y="1828800"/>
+                </a:lnTo>
+                <a:lnTo>
+                  <a:pt x="554140" y="1828800"/>
+                </a:lnTo>
+                <a:lnTo>
+                  <a:pt x="545202" y="1828800"/>
+                </a:lnTo>
+                <a:lnTo>
+                  <a:pt x="536264" y="1828800"/>
+                </a:lnTo>
+                <a:lnTo>
+                  <a:pt x="527326" y="1828800"/>
+                </a:lnTo>
+                <a:lnTo>
+                  <a:pt x="518389" y="1828800"/>
+                </a:lnTo>
+                <a:lnTo>
+                  <a:pt x="509451" y="1828800"/>
+                </a:lnTo>
+                <a:lnTo>
+                  <a:pt x="500513" y="1828800"/>
+                </a:lnTo>
+                <a:lnTo>
+                  <a:pt x="491575" y="1828800"/>
+                </a:lnTo>
+                <a:lnTo>
+                  <a:pt x="482638" y="1828800"/>
+                </a:lnTo>
+                <a:lnTo>
+                  <a:pt x="473700" y="1828800"/>
+                </a:lnTo>
+                <a:lnTo>
+                  <a:pt x="464762" y="1828800"/>
+                </a:lnTo>
+                <a:lnTo>
+                  <a:pt x="455824" y="1828800"/>
+                </a:lnTo>
+                <a:lnTo>
+                  <a:pt x="446887" y="1828800"/>
+                </a:lnTo>
+                <a:lnTo>
+                  <a:pt x="437949" y="1828800"/>
+                </a:lnTo>
+                <a:lnTo>
+                  <a:pt x="429011" y="1828800"/>
+                </a:lnTo>
+                <a:lnTo>
+                  <a:pt x="420073" y="1828800"/>
+                </a:lnTo>
+                <a:lnTo>
+                  <a:pt x="411136" y="1828800"/>
+                </a:lnTo>
+                <a:lnTo>
+                  <a:pt x="402198" y="1828800"/>
+                </a:lnTo>
+                <a:lnTo>
+                  <a:pt x="393260" y="1828800"/>
+                </a:lnTo>
+                <a:lnTo>
+                  <a:pt x="384323" y="1828800"/>
+                </a:lnTo>
+                <a:lnTo>
+                  <a:pt x="375385" y="1828800"/>
+                </a:lnTo>
+                <a:lnTo>
+                  <a:pt x="366447" y="1828800"/>
+                </a:lnTo>
+                <a:lnTo>
+                  <a:pt x="357509" y="1828800"/>
+                </a:lnTo>
+                <a:lnTo>
+                  <a:pt x="348572" y="1828800"/>
+                </a:lnTo>
+                <a:lnTo>
+                  <a:pt x="339634" y="1828800"/>
+                </a:lnTo>
+                <a:lnTo>
+                  <a:pt x="330696" y="1828800"/>
+                </a:lnTo>
+                <a:lnTo>
+                  <a:pt x="321758" y="1828800"/>
+                </a:lnTo>
+                <a:lnTo>
+                  <a:pt x="312821" y="1828800"/>
+                </a:lnTo>
+                <a:lnTo>
+                  <a:pt x="303883" y="1828800"/>
+                </a:lnTo>
+                <a:lnTo>
+                  <a:pt x="294945" y="1828800"/>
+                </a:lnTo>
+                <a:lnTo>
+                  <a:pt x="286007" y="1828800"/>
+                </a:lnTo>
+                <a:lnTo>
+                  <a:pt x="277070" y="1828800"/>
+                </a:lnTo>
+                <a:lnTo>
+                  <a:pt x="268132" y="1828800"/>
+                </a:lnTo>
+                <a:lnTo>
+                  <a:pt x="259194" y="1828800"/>
+                </a:lnTo>
+                <a:lnTo>
+                  <a:pt x="250256" y="1828800"/>
+                </a:lnTo>
+                <a:lnTo>
+                  <a:pt x="241319" y="1828800"/>
+                </a:lnTo>
+                <a:lnTo>
+                  <a:pt x="232381" y="1828800"/>
+                </a:lnTo>
+                <a:lnTo>
+                  <a:pt x="223443" y="1828800"/>
+                </a:lnTo>
+                <a:lnTo>
+                  <a:pt x="214505" y="1828800"/>
+                </a:lnTo>
+                <a:lnTo>
+                  <a:pt x="205568" y="1828800"/>
+                </a:lnTo>
+                <a:lnTo>
+                  <a:pt x="196630" y="1828800"/>
+                </a:lnTo>
+                <a:lnTo>
+                  <a:pt x="187692" y="1828800"/>
+                </a:lnTo>
+                <a:lnTo>
+                  <a:pt x="178754" y="1828800"/>
+                </a:lnTo>
+                <a:lnTo>
+                  <a:pt x="169817" y="1828800"/>
+                </a:lnTo>
+                <a:lnTo>
+                  <a:pt x="160879" y="1828800"/>
+                </a:lnTo>
+                <a:lnTo>
+                  <a:pt x="151941" y="1828800"/>
+                </a:lnTo>
+                <a:lnTo>
+                  <a:pt x="143003" y="1828800"/>
+                </a:lnTo>
+                <a:lnTo>
+                  <a:pt x="134066" y="1828800"/>
+                </a:lnTo>
+                <a:lnTo>
+                  <a:pt x="125128" y="1828800"/>
+                </a:lnTo>
+                <a:lnTo>
+                  <a:pt x="116190" y="1828800"/>
+                </a:lnTo>
+                <a:lnTo>
+                  <a:pt x="107252" y="1828800"/>
+                </a:lnTo>
+                <a:lnTo>
+                  <a:pt x="98315" y="1828800"/>
+                </a:lnTo>
+                <a:lnTo>
+                  <a:pt x="89377" y="1828800"/>
+                </a:lnTo>
+                <a:lnTo>
+                  <a:pt x="80439" y="1828800"/>
+                </a:lnTo>
+                <a:lnTo>
+                  <a:pt x="71501" y="1828800"/>
+                </a:lnTo>
+                <a:lnTo>
+                  <a:pt x="62564" y="1828800"/>
+                </a:lnTo>
+                <a:lnTo>
+                  <a:pt x="53626" y="1828800"/>
+                </a:lnTo>
+                <a:lnTo>
+                  <a:pt x="44688" y="1828800"/>
+                </a:lnTo>
+                <a:lnTo>
+                  <a:pt x="35750" y="1828800"/>
+                </a:lnTo>
+                <a:lnTo>
+                  <a:pt x="26813" y="1828800"/>
+                </a:lnTo>
+                <a:lnTo>
+                  <a:pt x="17875" y="1828800"/>
+                </a:lnTo>
+                <a:lnTo>
+                  <a:pt x="8937" y="1828800"/>
+                </a:lnTo>
+                <a:lnTo>
+                  <a:pt x="0" y="1828800"/>
+                </a:lnTo>
+                <a:close/>
+              </a:path>
+            </a:pathLst>
+          </a:custGeom>
+          <a:solidFill>
+            <a:srgbClr val="8EDBD4">
+              <a:alpha val="45000"/>
+            </a:srgbClr>
+          </a:solidFill>
+          <a:ln w="10160">
+            <a:solidFill>
+              <a:srgbClr val="8EDBD4">
+                <a:alpha val="45000"/>
+              </a:srgbClr>
+            </a:solidFill>
+          </a:ln>
+          <a:effectLst/>
+        </p:spPr>
+        <p:txBody>
+          <a:bodyPr rtlCol="0" anchor="ctr"/>
+          <a:lstStyle/>
+          <a:p>
+            <a:pPr algn="ctr"/>
+          </a:p>
+        </p:txBody>
+      </p:sp>
+      <p:sp>
+        <p:nvSpPr>
+          <p:cNvPr id="24" name="C1-E33 polygon 22" descr="sci-ppt:o022"/>
+          <p:cNvSpPr/>
+          <p:nvPr/>
+        </p:nvSpPr>
+        <p:spPr>
+          <a:xfrm>
+            <a:off x="914400" y="2011680"/>
+            <a:ext cx="3566160" cy="1828800"/>
+          </a:xfrm>
+          <a:custGeom>
+            <a:avLst/>
+            <a:gdLst/>
+            <a:ahLst/>
+            <a:cxnLst/>
+            <a:rect l="l" t="t" r="r" b="b"/>
+            <a:pathLst>
+              <a:path w="3566160" h="1828800">
+                <a:moveTo>
+                  <a:pt x="0" y="1828800"/>
+                </a:moveTo>
+                <a:lnTo>
+                  <a:pt x="0" y="0"/>
+                </a:lnTo>
+                <a:lnTo>
+                  <a:pt x="891540" y="0"/>
+                </a:lnTo>
+                <a:lnTo>
+                  <a:pt x="891540" y="1828800"/>
+                </a:lnTo>
+                <a:lnTo>
+                  <a:pt x="3566160" y="1828800"/>
                 </a:lnTo>
               </a:path>
             </a:pathLst>
@@ -4505,104 +6200,16 @@
           </a:p>
         </p:txBody>
       </p:sp>
-      <p:cxnSp>
-        <p:nvCxnSpPr>
-          <p:cNvPr id="30" name="C1-E33 line 28" descr="sci-ppt:o028"/>
-          <p:cNvCxnSpPr/>
+      <p:sp>
+        <p:nvSpPr>
+          <p:cNvPr id="25" name="C1-E33 text 23" descr="sci-ppt:o023"/>
+          <p:cNvSpPr txBox="1"/>
           <p:nvPr/>
-        </p:nvCxnSpPr>
+        </p:nvSpPr>
         <p:spPr>
           <a:xfrm>
-            <a:off x="4937760" y="4572000"/>
-            <a:ext cx="3291840" cy="0"/>
-          </a:xfrm>
-          <a:prstGeom prst="line">
-            <a:avLst/>
-          </a:prstGeom>
-          <a:ln w="19050">
-            <a:solidFill>
-              <a:srgbClr val="B4C7D2"/>
-            </a:solidFill>
-          </a:ln>
-          <a:effectLst/>
-        </p:spPr>
-      </p:cxnSp>
-      <p:cxnSp>
-        <p:nvCxnSpPr>
-          <p:cNvPr id="31" name="C1-E33 line 29" descr="sci-ppt:o029"/>
-          <p:cNvCxnSpPr/>
-          <p:nvPr/>
-        </p:nvCxnSpPr>
-        <p:spPr>
-          <a:xfrm>
-            <a:off x="4937760" y="1554480"/>
-            <a:ext cx="0" cy="3017520"/>
-          </a:xfrm>
-          <a:prstGeom prst="line">
-            <a:avLst/>
-          </a:prstGeom>
-          <a:ln w="19050">
-            <a:solidFill>
-              <a:srgbClr val="B4C7D2"/>
-            </a:solidFill>
-          </a:ln>
-          <a:effectLst/>
-        </p:spPr>
-      </p:cxnSp>
-      <p:cxnSp>
-        <p:nvCxnSpPr>
-          <p:cNvPr id="32" name="C1-E33 line 30" descr="sci-ppt:o030"/>
-          <p:cNvCxnSpPr/>
-          <p:nvPr/>
-        </p:nvCxnSpPr>
-        <p:spPr>
-          <a:xfrm>
-            <a:off x="4937760" y="4572000"/>
-            <a:ext cx="0" cy="64008"/>
-          </a:xfrm>
-          <a:prstGeom prst="line">
-            <a:avLst/>
-          </a:prstGeom>
-          <a:ln w="12700">
-            <a:solidFill>
-              <a:srgbClr val="B4C7D2"/>
-            </a:solidFill>
-          </a:ln>
-          <a:effectLst/>
-        </p:spPr>
-      </p:cxnSp>
-      <p:cxnSp>
-        <p:nvCxnSpPr>
-          <p:cNvPr id="33" name="C1-E33 line 31" descr="sci-ppt:o031"/>
-          <p:cNvCxnSpPr/>
-          <p:nvPr/>
-        </p:nvCxnSpPr>
-        <p:spPr>
-          <a:xfrm>
-            <a:off x="4937760" y="1554480"/>
-            <a:ext cx="0" cy="3017520"/>
-          </a:xfrm>
-          <a:prstGeom prst="line">
-            <a:avLst/>
-          </a:prstGeom>
-          <a:ln w="7620">
-            <a:solidFill>
-              <a:srgbClr val="2E4756"/>
-            </a:solidFill>
-          </a:ln>
-          <a:effectLst/>
-        </p:spPr>
-      </p:cxnSp>
-      <p:sp>
-        <p:nvSpPr>
-          <p:cNvPr id="34" name="C1-E33 text 32" descr="sci-ppt:o032"/>
-          <p:cNvSpPr txBox="1"/>
-          <p:nvPr/>
-        </p:nvSpPr>
-        <p:spPr>
-          <a:xfrm>
-            <a:off x="4480560" y="4654296"/>
-            <a:ext cx="914400" cy="208407"/>
+            <a:off x="1986534" y="1874520"/>
+            <a:ext cx="2194560" cy="223900"/>
           </a:xfrm>
           <a:prstGeom prst="rect">
             <a:avLst/>
@@ -4616,77 +6223,33 @@
           </a:bodyPr>
           <a:lstStyle/>
           <a:p>
-            <a:pPr algn="ctr">
+            <a:pPr algn="l">
               <a:spcAft>
                 <a:spcPts val="0"/>
               </a:spcAft>
             </a:pPr>
             <a:r>
-              <a:rPr sz="1050" b="0" i="0">
+              <a:rPr sz="1150" b="0" i="0">
                 <a:solidFill>
-                  <a:srgbClr val="B4C7D2"/>
+                  <a:srgbClr val="8EDBD4"/>
                 </a:solidFill>
                 <a:latin typeface="Arial"/>
               </a:rPr>
-              <a:t>0</a:t>
-            </a:r>
-          </a:p>
-        </p:txBody>
-      </p:sp>
-      <p:cxnSp>
-        <p:nvCxnSpPr>
-          <p:cNvPr id="35" name="C1-E33 line 33" descr="sci-ppt:o033"/>
-          <p:cNvCxnSpPr/>
+              <a:t>Π = ∫(p − p_ref)dt</a:t>
+            </a:r>
+          </a:p>
+        </p:txBody>
+      </p:sp>
+      <p:sp>
+        <p:nvSpPr>
+          <p:cNvPr id="26" name="C1-E33 text 24" descr="sci-ppt:o024"/>
+          <p:cNvSpPr txBox="1"/>
           <p:nvPr/>
-        </p:nvCxnSpPr>
+        </p:nvSpPr>
         <p:spPr>
           <a:xfrm>
-            <a:off x="6035040" y="4572000"/>
-            <a:ext cx="0" cy="64008"/>
-          </a:xfrm>
-          <a:prstGeom prst="line">
-            <a:avLst/>
-          </a:prstGeom>
-          <a:ln w="12700">
-            <a:solidFill>
-              <a:srgbClr val="B4C7D2"/>
-            </a:solidFill>
-          </a:ln>
-          <a:effectLst/>
-        </p:spPr>
-      </p:cxnSp>
-      <p:cxnSp>
-        <p:nvCxnSpPr>
-          <p:cNvPr id="36" name="C1-E33 line 34" descr="sci-ppt:o034"/>
-          <p:cNvCxnSpPr/>
-          <p:nvPr/>
-        </p:nvCxnSpPr>
-        <p:spPr>
-          <a:xfrm>
-            <a:off x="6035040" y="1554480"/>
-            <a:ext cx="0" cy="3017520"/>
-          </a:xfrm>
-          <a:prstGeom prst="line">
-            <a:avLst/>
-          </a:prstGeom>
-          <a:ln w="7620">
-            <a:solidFill>
-              <a:srgbClr val="2E4756"/>
-            </a:solidFill>
-          </a:ln>
-          <a:effectLst/>
-        </p:spPr>
-      </p:cxnSp>
-      <p:sp>
-        <p:nvSpPr>
-          <p:cNvPr id="37" name="C1-E33 text 35" descr="sci-ppt:o035"/>
-          <p:cNvSpPr txBox="1"/>
-          <p:nvPr/>
-        </p:nvSpPr>
-        <p:spPr>
-          <a:xfrm>
-            <a:off x="5577840" y="4654296"/>
-            <a:ext cx="914400" cy="208407"/>
+            <a:off x="914400" y="960120"/>
+            <a:ext cx="3566160" cy="262636"/>
           </a:xfrm>
           <a:prstGeom prst="rect">
             <a:avLst/>
@@ -4700,77 +6263,33 @@
           </a:bodyPr>
           <a:lstStyle/>
           <a:p>
-            <a:pPr algn="ctr">
+            <a:pPr algn="l">
               <a:spcAft>
                 <a:spcPts val="0"/>
               </a:spcAft>
             </a:pPr>
             <a:r>
-              <a:rPr sz="1050" b="0" i="0">
+              <a:rPr sz="1400" b="1" i="0">
                 <a:solidFill>
-                  <a:srgbClr val="B4C7D2"/>
+                  <a:srgbClr val="8EDBD4"/>
                 </a:solidFill>
                 <a:latin typeface="Arial"/>
               </a:rPr>
-              <a:t>1</a:t>
-            </a:r>
-          </a:p>
-        </p:txBody>
-      </p:sp>
-      <p:cxnSp>
-        <p:nvCxnSpPr>
-          <p:cNvPr id="38" name="C1-E33 line 36" descr="sci-ppt:o036"/>
-          <p:cNvCxnSpPr/>
+              <a:t>1  Pulse → impulse</a:t>
+            </a:r>
+          </a:p>
+        </p:txBody>
+      </p:sp>
+      <p:sp>
+        <p:nvSpPr>
+          <p:cNvPr id="27" name="C1-E33 text 25" descr="sci-ppt:o025"/>
+          <p:cNvSpPr txBox="1"/>
           <p:nvPr/>
-        </p:nvCxnSpPr>
+        </p:nvSpPr>
         <p:spPr>
           <a:xfrm>
-            <a:off x="7132320" y="4572000"/>
-            <a:ext cx="0" cy="64008"/>
-          </a:xfrm>
-          <a:prstGeom prst="line">
-            <a:avLst/>
-          </a:prstGeom>
-          <a:ln w="12700">
-            <a:solidFill>
-              <a:srgbClr val="B4C7D2"/>
-            </a:solidFill>
-          </a:ln>
-          <a:effectLst/>
-        </p:spPr>
-      </p:cxnSp>
-      <p:cxnSp>
-        <p:nvCxnSpPr>
-          <p:cNvPr id="39" name="C1-E33 line 37" descr="sci-ppt:o037"/>
-          <p:cNvCxnSpPr/>
-          <p:nvPr/>
-        </p:nvCxnSpPr>
-        <p:spPr>
-          <a:xfrm>
-            <a:off x="7132320" y="1554480"/>
-            <a:ext cx="0" cy="3017520"/>
-          </a:xfrm>
-          <a:prstGeom prst="line">
-            <a:avLst/>
-          </a:prstGeom>
-          <a:ln w="7620">
-            <a:solidFill>
-              <a:srgbClr val="2E4756"/>
-            </a:solidFill>
-          </a:ln>
-          <a:effectLst/>
-        </p:spPr>
-      </p:cxnSp>
-      <p:sp>
-        <p:nvSpPr>
-          <p:cNvPr id="40" name="C1-E33 text 38" descr="sci-ppt:o038"/>
-          <p:cNvSpPr txBox="1"/>
-          <p:nvPr/>
-        </p:nvSpPr>
-        <p:spPr>
-          <a:xfrm>
-            <a:off x="6675120" y="4654296"/>
-            <a:ext cx="914400" cy="208407"/>
+            <a:off x="4937760" y="960120"/>
+            <a:ext cx="3566160" cy="262636"/>
           </a:xfrm>
           <a:prstGeom prst="rect">
             <a:avLst/>
@@ -4784,77 +6303,169 @@
           </a:bodyPr>
           <a:lstStyle/>
           <a:p>
-            <a:pPr algn="ctr">
+            <a:pPr algn="l">
               <a:spcAft>
                 <a:spcPts val="0"/>
               </a:spcAft>
             </a:pPr>
             <a:r>
-              <a:rPr sz="1050" b="0" i="0">
+              <a:rPr sz="1400" b="1" i="0">
                 <a:solidFill>
-                  <a:srgbClr val="B4C7D2"/>
+                  <a:srgbClr val="F2B880"/>
                 </a:solidFill>
                 <a:latin typeface="Arial"/>
               </a:rPr>
-              <a:t>2</a:t>
-            </a:r>
-          </a:p>
-        </p:txBody>
-      </p:sp>
-      <p:cxnSp>
-        <p:nvCxnSpPr>
-          <p:cNvPr id="41" name="C1-E33 line 39" descr="sci-ppt:o039"/>
-          <p:cNvCxnSpPr/>
+              <a:t>2  Impulse → velocity</a:t>
+            </a:r>
+          </a:p>
+        </p:txBody>
+      </p:sp>
+      <p:sp>
+        <p:nvSpPr>
+          <p:cNvPr id="28" name="C1-E33 rect 26" descr="sci-ppt:o026"/>
+          <p:cNvSpPr/>
           <p:nvPr/>
-        </p:nvCxnSpPr>
+        </p:nvSpPr>
         <p:spPr>
           <a:xfrm>
-            <a:off x="8229600" y="4572000"/>
-            <a:ext cx="0" cy="64008"/>
+            <a:off x="5029200" y="2194560"/>
+            <a:ext cx="3017520" cy="731520"/>
           </a:xfrm>
-          <a:prstGeom prst="line">
+          <a:prstGeom prst="rect">
             <a:avLst/>
           </a:prstGeom>
-          <a:ln w="12700">
+          <a:solidFill>
+            <a:srgbClr val="1E4A5A"/>
+          </a:solidFill>
+          <a:ln w="17780">
+            <a:solidFill>
+              <a:srgbClr val="2B6678"/>
+            </a:solidFill>
+          </a:ln>
+          <a:effectLst/>
+        </p:spPr>
+        <p:txBody>
+          <a:bodyPr rtlCol="0" anchor="ctr"/>
+          <a:lstStyle/>
+          <a:p>
+            <a:pPr algn="ctr"/>
+          </a:p>
+        </p:txBody>
+      </p:sp>
+      <p:sp>
+        <p:nvSpPr>
+          <p:cNvPr id="29" name="C1-E33 rect 27" descr="sci-ppt:o027"/>
+          <p:cNvSpPr/>
+          <p:nvPr/>
+        </p:nvSpPr>
+        <p:spPr>
+          <a:xfrm>
+            <a:off x="4892040" y="2103120"/>
+            <a:ext cx="137160" cy="914400"/>
+          </a:xfrm>
+          <a:prstGeom prst="rect">
+            <a:avLst/>
+          </a:prstGeom>
+          <a:solidFill>
+            <a:srgbClr val="3A5362"/>
+          </a:solidFill>
+          <a:ln w="15240">
             <a:solidFill>
               <a:srgbClr val="B4C7D2"/>
             </a:solidFill>
           </a:ln>
           <a:effectLst/>
         </p:spPr>
-      </p:cxnSp>
+        <p:txBody>
+          <a:bodyPr rtlCol="0" anchor="ctr"/>
+          <a:lstStyle/>
+          <a:p>
+            <a:pPr algn="ctr"/>
+          </a:p>
+        </p:txBody>
+      </p:sp>
       <p:cxnSp>
         <p:nvCxnSpPr>
-          <p:cNvPr id="42" name="C1-E33 line 40" descr="sci-ppt:o040"/>
+          <p:cNvPr id="30" name="C1-E33 arrow 28" descr="sci-ppt:o028"/>
           <p:cNvCxnSpPr/>
           <p:nvPr/>
         </p:nvCxnSpPr>
         <p:spPr>
           <a:xfrm>
-            <a:off x="8229600" y="1554480"/>
-            <a:ext cx="0" cy="3017520"/>
+            <a:off x="5257800" y="2560320"/>
+            <a:ext cx="594360" cy="0"/>
           </a:xfrm>
           <a:prstGeom prst="line">
             <a:avLst/>
           </a:prstGeom>
-          <a:ln w="7620">
+          <a:ln w="38100">
             <a:solidFill>
-              <a:srgbClr val="2E4756"/>
+              <a:srgbClr val="F2B880"/>
             </a:solidFill>
+            <a:headEnd type="none" w="med" len="med"/>
+            <a:tailEnd type="triangle" w="med" len="med"/>
           </a:ln>
           <a:effectLst/>
         </p:spPr>
       </p:cxnSp>
-      <p:sp>
-        <p:nvSpPr>
-          <p:cNvPr id="43" name="C1-E33 text 41" descr="sci-ppt:o041"/>
+      <p:cxnSp>
+        <p:nvCxnSpPr>
+          <p:cNvPr id="31" name="C1-E33 arrow 29" descr="sci-ppt:o029"/>
+          <p:cNvCxnSpPr/>
+          <p:nvPr/>
+        </p:nvCxnSpPr>
+        <p:spPr>
+          <a:xfrm>
+            <a:off x="6172200" y="2560320"/>
+            <a:ext cx="594360" cy="0"/>
+          </a:xfrm>
+          <a:prstGeom prst="line">
+            <a:avLst/>
+          </a:prstGeom>
+          <a:ln w="38100">
+            <a:solidFill>
+              <a:srgbClr val="F2B880"/>
+            </a:solidFill>
+            <a:headEnd type="none" w="med" len="med"/>
+            <a:tailEnd type="triangle" w="med" len="med"/>
+          </a:ln>
+          <a:effectLst/>
+        </p:spPr>
+      </p:cxnSp>
+      <p:cxnSp>
+        <p:nvCxnSpPr>
+          <p:cNvPr id="32" name="C1-E33 arrow 30" descr="sci-ppt:o030"/>
+          <p:cNvCxnSpPr/>
+          <p:nvPr/>
+        </p:nvCxnSpPr>
+        <p:spPr>
+          <a:xfrm>
+            <a:off x="7086600" y="2560320"/>
+            <a:ext cx="594360" cy="0"/>
+          </a:xfrm>
+          <a:prstGeom prst="line">
+            <a:avLst/>
+          </a:prstGeom>
+          <a:ln w="38100">
+            <a:solidFill>
+              <a:srgbClr val="F2B880"/>
+            </a:solidFill>
+            <a:headEnd type="none" w="med" len="med"/>
+            <a:tailEnd type="triangle" w="med" len="med"/>
+          </a:ln>
+          <a:effectLst/>
+        </p:spPr>
+      </p:cxnSp>
+      <p:sp>
+        <p:nvSpPr>
+          <p:cNvPr id="33" name="C1-E33 text 31" descr="sci-ppt:o031"/>
           <p:cNvSpPr txBox="1"/>
           <p:nvPr/>
         </p:nvSpPr>
         <p:spPr>
           <a:xfrm>
-            <a:off x="7772400" y="4654296"/>
-            <a:ext cx="914400" cy="208407"/>
+            <a:off x="5029200" y="3063240"/>
+            <a:ext cx="3017520" cy="239395"/>
           </a:xfrm>
           <a:prstGeom prst="rect">
             <a:avLst/>
@@ -4868,99 +6479,33 @@
           </a:bodyPr>
           <a:lstStyle/>
           <a:p>
-            <a:pPr algn="ctr">
+            <a:pPr algn="l">
               <a:spcAft>
                 <a:spcPts val="0"/>
               </a:spcAft>
             </a:pPr>
             <a:r>
-              <a:rPr sz="1050" b="0" i="0">
+              <a:rPr sz="1250" b="1" i="0">
                 <a:solidFill>
-                  <a:srgbClr val="B4C7D2"/>
+                  <a:srgbClr val="E7F0F3"/>
                 </a:solidFill>
                 <a:latin typeface="Arial"/>
               </a:rPr>
-              <a:t>3</a:t>
-            </a:r>
-          </a:p>
-        </p:txBody>
-      </p:sp>
-      <p:cxnSp>
-        <p:nvCxnSpPr>
-          <p:cNvPr id="44" name="C1-E33 line 42" descr="sci-ppt:o042"/>
-          <p:cNvCxnSpPr/>
+              <a:t>Δu ≃ −∇Π/ρ,   ∇²Π = 0</a:t>
+            </a:r>
+          </a:p>
+        </p:txBody>
+      </p:sp>
+      <p:sp>
+        <p:nvSpPr>
+          <p:cNvPr id="34" name="C1-E33 text 32" descr="sci-ppt:o032"/>
+          <p:cNvSpPr txBox="1"/>
           <p:nvPr/>
-        </p:nvCxnSpPr>
+        </p:nvSpPr>
         <p:spPr>
           <a:xfrm>
-            <a:off x="4873752" y="4572000"/>
-            <a:ext cx="64008" cy="0"/>
-          </a:xfrm>
-          <a:prstGeom prst="line">
-            <a:avLst/>
-          </a:prstGeom>
-          <a:ln w="12700">
-            <a:solidFill>
-              <a:srgbClr val="B4C7D2"/>
-            </a:solidFill>
-          </a:ln>
-          <a:effectLst/>
-        </p:spPr>
-      </p:cxnSp>
-      <p:cxnSp>
-        <p:nvCxnSpPr>
-          <p:cNvPr id="45" name="C1-E33 line 43" descr="sci-ppt:o043"/>
-          <p:cNvCxnSpPr/>
-          <p:nvPr/>
-        </p:nvCxnSpPr>
-        <p:spPr>
-          <a:xfrm>
-            <a:off x="4873752" y="3598606"/>
-            <a:ext cx="64008" cy="0"/>
-          </a:xfrm>
-          <a:prstGeom prst="line">
-            <a:avLst/>
-          </a:prstGeom>
-          <a:ln w="12700">
-            <a:solidFill>
-              <a:srgbClr val="B4C7D2"/>
-            </a:solidFill>
-          </a:ln>
-          <a:effectLst/>
-        </p:spPr>
-      </p:cxnSp>
-      <p:cxnSp>
-        <p:nvCxnSpPr>
-          <p:cNvPr id="46" name="C1-E33 line 44" descr="sci-ppt:o044"/>
-          <p:cNvCxnSpPr/>
-          <p:nvPr/>
-        </p:nvCxnSpPr>
-        <p:spPr>
-          <a:xfrm>
-            <a:off x="4937760" y="3598606"/>
-            <a:ext cx="3291840" cy="0"/>
-          </a:xfrm>
-          <a:prstGeom prst="line">
-            <a:avLst/>
-          </a:prstGeom>
-          <a:ln w="7620">
-            <a:solidFill>
-              <a:srgbClr val="2E4756"/>
-            </a:solidFill>
-          </a:ln>
-          <a:effectLst/>
-        </p:spPr>
-      </p:cxnSp>
-      <p:sp>
-        <p:nvSpPr>
-          <p:cNvPr id="47" name="C1-E33 text 45" descr="sci-ppt:o045"/>
-          <p:cNvSpPr txBox="1"/>
-          <p:nvPr/>
-        </p:nvSpPr>
-        <p:spPr>
-          <a:xfrm>
-            <a:off x="4069080" y="3516310"/>
-            <a:ext cx="777240" cy="208407"/>
+            <a:off x="5029200" y="3520440"/>
+            <a:ext cx="3017520" cy="239395"/>
           </a:xfrm>
           <a:prstGeom prst="rect">
             <a:avLst/>
@@ -4974,77 +6519,33 @@
           </a:bodyPr>
           <a:lstStyle/>
           <a:p>
-            <a:pPr algn="r">
+            <a:pPr algn="l">
               <a:spcAft>
                 <a:spcPts val="0"/>
               </a:spcAft>
             </a:pPr>
             <a:r>
-              <a:rPr sz="1050" b="0" i="0">
+              <a:rPr sz="1250" b="1" i="0">
                 <a:solidFill>
-                  <a:srgbClr val="B4C7D2"/>
+                  <a:srgbClr val="F2B880"/>
                 </a:solidFill>
                 <a:latin typeface="Arial"/>
               </a:rPr>
-              <a:t>10</a:t>
-            </a:r>
-          </a:p>
-        </p:txBody>
-      </p:sp>
-      <p:cxnSp>
-        <p:nvCxnSpPr>
-          <p:cNvPr id="48" name="C1-E33 line 46" descr="sci-ppt:o046"/>
-          <p:cNvCxnSpPr/>
+              <a:t>U_column = Π₀/(ρL) = 3.0 m/s</a:t>
+            </a:r>
+          </a:p>
+        </p:txBody>
+      </p:sp>
+      <p:sp>
+        <p:nvSpPr>
+          <p:cNvPr id="35" name="C1-E33 text 33" descr="sci-ppt:o033"/>
+          <p:cNvSpPr txBox="1"/>
           <p:nvPr/>
-        </p:nvCxnSpPr>
+        </p:nvSpPr>
         <p:spPr>
           <a:xfrm>
-            <a:off x="4873752" y="2625212"/>
-            <a:ext cx="64008" cy="0"/>
-          </a:xfrm>
-          <a:prstGeom prst="line">
-            <a:avLst/>
-          </a:prstGeom>
-          <a:ln w="12700">
-            <a:solidFill>
-              <a:srgbClr val="B4C7D2"/>
-            </a:solidFill>
-          </a:ln>
-          <a:effectLst/>
-        </p:spPr>
-      </p:cxnSp>
-      <p:cxnSp>
-        <p:nvCxnSpPr>
-          <p:cNvPr id="49" name="C1-E33 line 47" descr="sci-ppt:o047"/>
-          <p:cNvCxnSpPr/>
-          <p:nvPr/>
-        </p:nvCxnSpPr>
-        <p:spPr>
-          <a:xfrm>
-            <a:off x="4937760" y="2625212"/>
-            <a:ext cx="3291840" cy="0"/>
-          </a:xfrm>
-          <a:prstGeom prst="line">
-            <a:avLst/>
-          </a:prstGeom>
-          <a:ln w="7620">
-            <a:solidFill>
-              <a:srgbClr val="2E4756"/>
-            </a:solidFill>
-          </a:ln>
-          <a:effectLst/>
-        </p:spPr>
-      </p:cxnSp>
-      <p:sp>
-        <p:nvSpPr>
-          <p:cNvPr id="50" name="C1-E33 text 48" descr="sci-ppt:o048"/>
-          <p:cNvSpPr txBox="1"/>
-          <p:nvPr/>
-        </p:nvSpPr>
-        <p:spPr>
-          <a:xfrm>
-            <a:off x="4069080" y="2542916"/>
-            <a:ext cx="777240" cy="208407"/>
+            <a:off x="8686800" y="960120"/>
+            <a:ext cx="3108960" cy="262636"/>
           </a:xfrm>
           <a:prstGeom prst="rect">
             <a:avLst/>
@@ -5058,77 +6559,33 @@
           </a:bodyPr>
           <a:lstStyle/>
           <a:p>
-            <a:pPr algn="r">
+            <a:pPr algn="l">
               <a:spcAft>
                 <a:spcPts val="0"/>
               </a:spcAft>
             </a:pPr>
             <a:r>
-              <a:rPr sz="1050" b="0" i="0">
+              <a:rPr sz="1400" b="1" i="0">
                 <a:solidFill>
-                  <a:srgbClr val="B4C7D2"/>
+                  <a:srgbClr val="F28BA0"/>
                 </a:solidFill>
                 <a:latin typeface="Arial"/>
               </a:rPr>
-              <a:t>20</a:t>
-            </a:r>
-          </a:p>
-        </p:txBody>
-      </p:sp>
-      <p:cxnSp>
-        <p:nvCxnSpPr>
-          <p:cNvPr id="51" name="C1-E33 line 49" descr="sci-ppt:o049"/>
-          <p:cNvCxnSpPr/>
+              <a:t>3  Check the limits</a:t>
+            </a:r>
+          </a:p>
+        </p:txBody>
+      </p:sp>
+      <p:sp>
+        <p:nvSpPr>
+          <p:cNvPr id="36" name="C1-E33 text 34" descr="sci-ppt:o034"/>
+          <p:cNvSpPr txBox="1"/>
           <p:nvPr/>
-        </p:nvCxnSpPr>
+        </p:nvSpPr>
         <p:spPr>
           <a:xfrm>
-            <a:off x="4873752" y="1651819"/>
-            <a:ext cx="64008" cy="0"/>
-          </a:xfrm>
-          <a:prstGeom prst="line">
-            <a:avLst/>
-          </a:prstGeom>
-          <a:ln w="12700">
-            <a:solidFill>
-              <a:srgbClr val="B4C7D2"/>
-            </a:solidFill>
-          </a:ln>
-          <a:effectLst/>
-        </p:spPr>
-      </p:cxnSp>
-      <p:cxnSp>
-        <p:nvCxnSpPr>
-          <p:cNvPr id="52" name="C1-E33 line 50" descr="sci-ppt:o050"/>
-          <p:cNvCxnSpPr/>
-          <p:nvPr/>
-        </p:nvCxnSpPr>
-        <p:spPr>
-          <a:xfrm>
-            <a:off x="4937760" y="1651819"/>
-            <a:ext cx="3291840" cy="0"/>
-          </a:xfrm>
-          <a:prstGeom prst="line">
-            <a:avLst/>
-          </a:prstGeom>
-          <a:ln w="7620">
-            <a:solidFill>
-              <a:srgbClr val="2E4756"/>
-            </a:solidFill>
-          </a:ln>
-          <a:effectLst/>
-        </p:spPr>
-      </p:cxnSp>
-      <p:sp>
-        <p:nvSpPr>
-          <p:cNvPr id="53" name="C1-E33 text 51" descr="sci-ppt:o051"/>
-          <p:cNvSpPr txBox="1"/>
-          <p:nvPr/>
-        </p:nvSpPr>
-        <p:spPr>
-          <a:xfrm>
-            <a:off x="4069080" y="1569523"/>
-            <a:ext cx="777240" cy="208407"/>
+            <a:off x="8887968" y="1463040"/>
+            <a:ext cx="2907791" cy="231648"/>
           </a:xfrm>
           <a:prstGeom prst="rect">
             <a:avLst/>
@@ -5142,33 +6599,65 @@
           </a:bodyPr>
           <a:lstStyle/>
           <a:p>
-            <a:pPr algn="r">
+            <a:pPr algn="l">
               <a:spcAft>
                 <a:spcPts val="0"/>
               </a:spcAft>
             </a:pPr>
             <a:r>
-              <a:rPr sz="1050" b="0" i="0">
+              <a:rPr sz="1200" b="0" i="0">
                 <a:solidFill>
-                  <a:srgbClr val="B4C7D2"/>
+                  <a:srgbClr val="E7F0F3"/>
                 </a:solidFill>
                 <a:latin typeface="Arial"/>
               </a:rPr>
-              <a:t>30</a:t>
-            </a:r>
-          </a:p>
-        </p:txBody>
-      </p:sp>
-      <p:sp>
-        <p:nvSpPr>
-          <p:cNvPr id="54" name="C1-E33 text 52" descr="sci-ppt:o052"/>
+              <a:t>Uτ/L = 0.015 ≪ 1</a:t>
+            </a:r>
+          </a:p>
+        </p:txBody>
+      </p:sp>
+      <p:sp>
+        <p:nvSpPr>
+          <p:cNvPr id="37" name="C1-E33 ellipse 35" descr="sci-ppt:o035"/>
+          <p:cNvSpPr/>
+          <p:nvPr/>
+        </p:nvSpPr>
+        <p:spPr>
+          <a:xfrm>
+            <a:off x="8718804" y="1516380"/>
+            <a:ext cx="82296" cy="82296"/>
+          </a:xfrm>
+          <a:prstGeom prst="ellipse">
+            <a:avLst/>
+          </a:prstGeom>
+          <a:solidFill>
+            <a:srgbClr val="8EDBD4"/>
+          </a:solidFill>
+          <a:ln w="12700">
+            <a:solidFill>
+              <a:srgbClr val="8EDBD4"/>
+            </a:solidFill>
+          </a:ln>
+          <a:effectLst/>
+        </p:spPr>
+        <p:txBody>
+          <a:bodyPr rtlCol="0" anchor="ctr"/>
+          <a:lstStyle/>
+          <a:p>
+            <a:pPr algn="ctr"/>
+          </a:p>
+        </p:txBody>
+      </p:sp>
+      <p:sp>
+        <p:nvSpPr>
+          <p:cNvPr id="38" name="C1-E33 text 36" descr="sci-ppt:o036"/>
           <p:cNvSpPr txBox="1"/>
           <p:nvPr/>
         </p:nvSpPr>
         <p:spPr>
           <a:xfrm>
-            <a:off x="4937760" y="4855464"/>
-            <a:ext cx="3291840" cy="231648"/>
+            <a:off x="8887968" y="1740408"/>
+            <a:ext cx="2907791" cy="231648"/>
           </a:xfrm>
           <a:prstGeom prst="rect">
             <a:avLst/>
@@ -5182,7 +6671,7 @@
           </a:bodyPr>
           <a:lstStyle/>
           <a:p>
-            <a:pPr algn="ctr">
+            <a:pPr algn="l">
               <a:spcAft>
                 <a:spcPts val="0"/>
               </a:spcAft>
@@ -5194,21 +6683,53 @@
                 </a:solidFill>
                 <a:latin typeface="Arial"/>
               </a:rPr>
-              <a:t>t (µs)</a:t>
-            </a:r>
-          </a:p>
-        </p:txBody>
-      </p:sp>
-      <p:sp>
-        <p:nvSpPr>
-          <p:cNvPr id="55" name="C1-E33 text 53" descr="sci-ppt:o053"/>
+              <a:t>ντ/L² = 5×10⁻⁵ ≪ 1</a:t>
+            </a:r>
+          </a:p>
+        </p:txBody>
+      </p:sp>
+      <p:sp>
+        <p:nvSpPr>
+          <p:cNvPr id="39" name="C1-E33 ellipse 37" descr="sci-ppt:o037"/>
+          <p:cNvSpPr/>
+          <p:nvPr/>
+        </p:nvSpPr>
+        <p:spPr>
+          <a:xfrm>
+            <a:off x="8718804" y="1793748"/>
+            <a:ext cx="82296" cy="82296"/>
+          </a:xfrm>
+          <a:prstGeom prst="ellipse">
+            <a:avLst/>
+          </a:prstGeom>
+          <a:solidFill>
+            <a:srgbClr val="8EDBD4"/>
+          </a:solidFill>
+          <a:ln w="12700">
+            <a:solidFill>
+              <a:srgbClr val="8EDBD4"/>
+            </a:solidFill>
+          </a:ln>
+          <a:effectLst/>
+        </p:spPr>
+        <p:txBody>
+          <a:bodyPr rtlCol="0" anchor="ctr"/>
+          <a:lstStyle/>
+          <a:p>
+            <a:pPr algn="ctr"/>
+          </a:p>
+        </p:txBody>
+      </p:sp>
+      <p:sp>
+        <p:nvSpPr>
+          <p:cNvPr id="40" name="C1-E33 text 38" descr="sci-ppt:o038"/>
           <p:cNvSpPr txBox="1"/>
           <p:nvPr/>
         </p:nvSpPr>
         <p:spPr>
           <a:xfrm>
-            <a:off x="4389120" y="1207007"/>
-            <a:ext cx="3291840" cy="231648"/>
+            <a:off x="8887968" y="2017776"/>
+            <a:ext cx="2907791" cy="417576"/>
           </a:xfrm>
           <a:prstGeom prst="rect">
             <a:avLst/>
@@ -5234,490 +6755,47 @@
                 </a:solidFill>
                 <a:latin typeface="Arial"/>
               </a:rPr>
-              <a:t>R (µm)</a:t>
-            </a:r>
-          </a:p>
-        </p:txBody>
-      </p:sp>
-      <p:sp>
-        <p:nvSpPr>
-          <p:cNvPr id="56" name="C1-E33 polygon 54" descr="sci-ppt:o054"/>
+              <a:t>tₐ = L/c = 0.067 µs: acoustic time,</a:t>
+            </a:r>
+          </a:p>
+          <a:p>
+            <a:pPr algn="l">
+              <a:spcAft>
+                <a:spcPts val="0"/>
+              </a:spcAft>
+            </a:pPr>
+            <a:r>
+              <a:rPr sz="1200" b="0" i="0">
+                <a:solidFill>
+                  <a:srgbClr val="E7F0F3"/>
+                </a:solidFill>
+                <a:latin typeface="Arial"/>
+              </a:rPr>
+              <a:t>not the impulse</a:t>
+            </a:r>
+          </a:p>
+        </p:txBody>
+      </p:sp>
+      <p:sp>
+        <p:nvSpPr>
+          <p:cNvPr id="41" name="C1-E33 ellipse 39" descr="sci-ppt:o039"/>
           <p:cNvSpPr/>
           <p:nvPr/>
         </p:nvSpPr>
         <p:spPr>
           <a:xfrm>
-            <a:off x="4937760" y="1651819"/>
-            <a:ext cx="3010984" cy="2919596"/>
+            <a:off x="8718804" y="2071116"/>
+            <a:ext cx="82296" cy="82296"/>
           </a:xfrm>
-          <a:custGeom>
+          <a:prstGeom prst="ellipse">
             <a:avLst/>
-            <a:gdLst/>
-            <a:ahLst/>
-            <a:cxnLst/>
-            <a:rect l="l" t="t" r="r" b="b"/>
-            <a:pathLst>
-              <a:path w="3010984" h="2919596">
-                <a:moveTo>
-                  <a:pt x="0" y="0"/>
-                </a:moveTo>
-                <a:lnTo>
-                  <a:pt x="31083" y="130"/>
-                </a:lnTo>
-                <a:lnTo>
-                  <a:pt x="62165" y="521"/>
-                </a:lnTo>
-                <a:lnTo>
-                  <a:pt x="93240" y="1172"/>
-                </a:lnTo>
-                <a:lnTo>
-                  <a:pt x="124308" y="2083"/>
-                </a:lnTo>
-                <a:lnTo>
-                  <a:pt x="155364" y="3255"/>
-                </a:lnTo>
-                <a:lnTo>
-                  <a:pt x="186406" y="4687"/>
-                </a:lnTo>
-                <a:lnTo>
-                  <a:pt x="217432" y="6379"/>
-                </a:lnTo>
-                <a:lnTo>
-                  <a:pt x="248439" y="8332"/>
-                </a:lnTo>
-                <a:lnTo>
-                  <a:pt x="279423" y="10546"/>
-                </a:lnTo>
-                <a:lnTo>
-                  <a:pt x="310382" y="13019"/>
-                </a:lnTo>
-                <a:lnTo>
-                  <a:pt x="341313" y="15753"/>
-                </a:lnTo>
-                <a:lnTo>
-                  <a:pt x="372214" y="18748"/>
-                </a:lnTo>
-                <a:lnTo>
-                  <a:pt x="403082" y="22003"/>
-                </a:lnTo>
-                <a:lnTo>
-                  <a:pt x="433913" y="25518"/>
-                </a:lnTo>
-                <a:lnTo>
-                  <a:pt x="464706" y="29293"/>
-                </a:lnTo>
-                <a:lnTo>
-                  <a:pt x="495456" y="33329"/>
-                </a:lnTo>
-                <a:lnTo>
-                  <a:pt x="526163" y="37626"/>
-                </a:lnTo>
-                <a:lnTo>
-                  <a:pt x="556822" y="42183"/>
-                </a:lnTo>
-                <a:lnTo>
-                  <a:pt x="587430" y="47000"/>
-                </a:lnTo>
-                <a:lnTo>
-                  <a:pt x="617986" y="52077"/>
-                </a:lnTo>
-                <a:lnTo>
-                  <a:pt x="648486" y="57415"/>
-                </a:lnTo>
-                <a:lnTo>
-                  <a:pt x="678928" y="63013"/>
-                </a:lnTo>
-                <a:lnTo>
-                  <a:pt x="709308" y="68872"/>
-                </a:lnTo>
-                <a:lnTo>
-                  <a:pt x="739624" y="74991"/>
-                </a:lnTo>
-                <a:lnTo>
-                  <a:pt x="769873" y="81371"/>
-                </a:lnTo>
-                <a:lnTo>
-                  <a:pt x="800051" y="88011"/>
-                </a:lnTo>
-                <a:lnTo>
-                  <a:pt x="830158" y="94911"/>
-                </a:lnTo>
-                <a:lnTo>
-                  <a:pt x="860188" y="102072"/>
-                </a:lnTo>
-                <a:lnTo>
-                  <a:pt x="890140" y="109493"/>
-                </a:lnTo>
-                <a:lnTo>
-                  <a:pt x="920010" y="117174"/>
-                </a:lnTo>
-                <a:lnTo>
-                  <a:pt x="949796" y="125116"/>
-                </a:lnTo>
-                <a:lnTo>
-                  <a:pt x="979496" y="133318"/>
-                </a:lnTo>
-                <a:lnTo>
-                  <a:pt x="1009105" y="141781"/>
-                </a:lnTo>
-                <a:lnTo>
-                  <a:pt x="1038621" y="150504"/>
-                </a:lnTo>
-                <a:lnTo>
-                  <a:pt x="1068041" y="159487"/>
-                </a:lnTo>
-                <a:lnTo>
-                  <a:pt x="1097362" y="168731"/>
-                </a:lnTo>
-                <a:lnTo>
-                  <a:pt x="1126582" y="178235"/>
-                </a:lnTo>
-                <a:lnTo>
-                  <a:pt x="1155697" y="187999"/>
-                </a:lnTo>
-                <a:lnTo>
-                  <a:pt x="1184705" y="198024"/>
-                </a:lnTo>
-                <a:lnTo>
-                  <a:pt x="1213602" y="208309"/>
-                </a:lnTo>
-                <a:lnTo>
-                  <a:pt x="1242385" y="218855"/>
-                </a:lnTo>
-                <a:lnTo>
-                  <a:pt x="1271052" y="229661"/>
-                </a:lnTo>
-                <a:lnTo>
-                  <a:pt x="1299600" y="240728"/>
-                </a:lnTo>
-                <a:lnTo>
-                  <a:pt x="1328025" y="252054"/>
-                </a:lnTo>
-                <a:lnTo>
-                  <a:pt x="1356325" y="263642"/>
-                </a:lnTo>
-                <a:lnTo>
-                  <a:pt x="1384496" y="275489"/>
-                </a:lnTo>
-                <a:lnTo>
-                  <a:pt x="1412535" y="287597"/>
-                </a:lnTo>
-                <a:lnTo>
-                  <a:pt x="1440441" y="299966"/>
-                </a:lnTo>
-                <a:lnTo>
-                  <a:pt x="1468208" y="312594"/>
-                </a:lnTo>
-                <a:lnTo>
-                  <a:pt x="1495835" y="325484"/>
-                </a:lnTo>
-                <a:lnTo>
-                  <a:pt x="1523318" y="338633"/>
-                </a:lnTo>
-                <a:lnTo>
-                  <a:pt x="1550655" y="352043"/>
-                </a:lnTo>
-                <a:lnTo>
-                  <a:pt x="1577842" y="365713"/>
-                </a:lnTo>
-                <a:lnTo>
-                  <a:pt x="1604875" y="379644"/>
-                </a:lnTo>
-                <a:lnTo>
-                  <a:pt x="1631753" y="393835"/>
-                </a:lnTo>
-                <a:lnTo>
-                  <a:pt x="1658471" y="408287"/>
-                </a:lnTo>
-                <a:lnTo>
-                  <a:pt x="1685027" y="422998"/>
-                </a:lnTo>
-                <a:lnTo>
-                  <a:pt x="1711417" y="437971"/>
-                </a:lnTo>
-                <a:lnTo>
-                  <a:pt x="1737639" y="453203"/>
-                </a:lnTo>
-                <a:lnTo>
-                  <a:pt x="1763689" y="468696"/>
-                </a:lnTo>
-                <a:lnTo>
-                  <a:pt x="1789564" y="484450"/>
-                </a:lnTo>
-                <a:lnTo>
-                  <a:pt x="1815260" y="500464"/>
-                </a:lnTo>
-                <a:lnTo>
-                  <a:pt x="1840775" y="516738"/>
-                </a:lnTo>
-                <a:lnTo>
-                  <a:pt x="1866106" y="533272"/>
-                </a:lnTo>
-                <a:lnTo>
-                  <a:pt x="1891248" y="550067"/>
-                </a:lnTo>
-                <a:lnTo>
-                  <a:pt x="1916199" y="567123"/>
-                </a:lnTo>
-                <a:lnTo>
-                  <a:pt x="1940956" y="584438"/>
-                </a:lnTo>
-                <a:lnTo>
-                  <a:pt x="1965515" y="602014"/>
-                </a:lnTo>
-                <a:lnTo>
-                  <a:pt x="1989873" y="619851"/>
-                </a:lnTo>
-                <a:lnTo>
-                  <a:pt x="2014026" y="637948"/>
-                </a:lnTo>
-                <a:lnTo>
-                  <a:pt x="2037972" y="656305"/>
-                </a:lnTo>
-                <a:lnTo>
-                  <a:pt x="2061706" y="674923"/>
-                </a:lnTo>
-                <a:lnTo>
-                  <a:pt x="2085227" y="693801"/>
-                </a:lnTo>
-                <a:lnTo>
-                  <a:pt x="2108529" y="712939"/>
-                </a:lnTo>
-                <a:lnTo>
-                  <a:pt x="2131611" y="732338"/>
-                </a:lnTo>
-                <a:lnTo>
-                  <a:pt x="2154468" y="751997"/>
-                </a:lnTo>
-                <a:lnTo>
-                  <a:pt x="2177097" y="771917"/>
-                </a:lnTo>
-                <a:lnTo>
-                  <a:pt x="2199495" y="792097"/>
-                </a:lnTo>
-                <a:lnTo>
-                  <a:pt x="2221658" y="812537"/>
-                </a:lnTo>
-                <a:lnTo>
-                  <a:pt x="2243583" y="833238"/>
-                </a:lnTo>
-                <a:lnTo>
-                  <a:pt x="2265266" y="854199"/>
-                </a:lnTo>
-                <a:lnTo>
-                  <a:pt x="2286704" y="875421"/>
-                </a:lnTo>
-                <a:lnTo>
-                  <a:pt x="2307894" y="896903"/>
-                </a:lnTo>
-                <a:lnTo>
-                  <a:pt x="2328832" y="918645"/>
-                </a:lnTo>
-                <a:lnTo>
-                  <a:pt x="2349515" y="940648"/>
-                </a:lnTo>
-                <a:lnTo>
-                  <a:pt x="2369938" y="962911"/>
-                </a:lnTo>
-                <a:lnTo>
-                  <a:pt x="2390100" y="985434"/>
-                </a:lnTo>
-                <a:lnTo>
-                  <a:pt x="2409995" y="1008218"/>
-                </a:lnTo>
-                <a:lnTo>
-                  <a:pt x="2429622" y="1031262"/>
-                </a:lnTo>
-                <a:lnTo>
-                  <a:pt x="2448975" y="1054567"/>
-                </a:lnTo>
-                <a:lnTo>
-                  <a:pt x="2468052" y="1078132"/>
-                </a:lnTo>
-                <a:lnTo>
-                  <a:pt x="2486850" y="1101957"/>
-                </a:lnTo>
-                <a:lnTo>
-                  <a:pt x="2505364" y="1126043"/>
-                </a:lnTo>
-                <a:lnTo>
-                  <a:pt x="2523591" y="1150389"/>
-                </a:lnTo>
-                <a:lnTo>
-                  <a:pt x="2541528" y="1174996"/>
-                </a:lnTo>
-                <a:lnTo>
-                  <a:pt x="2559172" y="1199863"/>
-                </a:lnTo>
-                <a:lnTo>
-                  <a:pt x="2576519" y="1224990"/>
-                </a:lnTo>
-                <a:lnTo>
-                  <a:pt x="2593565" y="1250378"/>
-                </a:lnTo>
-                <a:lnTo>
-                  <a:pt x="2610307" y="1276026"/>
-                </a:lnTo>
-                <a:lnTo>
-                  <a:pt x="2626741" y="1301935"/>
-                </a:lnTo>
-                <a:lnTo>
-                  <a:pt x="2642866" y="1328103"/>
-                </a:lnTo>
-                <a:lnTo>
-                  <a:pt x="2658675" y="1354533"/>
-                </a:lnTo>
-                <a:lnTo>
-                  <a:pt x="2674168" y="1381222"/>
-                </a:lnTo>
-                <a:lnTo>
-                  <a:pt x="2689340" y="1408172"/>
-                </a:lnTo>
-                <a:lnTo>
-                  <a:pt x="2704188" y="1435383"/>
-                </a:lnTo>
-                <a:lnTo>
-                  <a:pt x="2718709" y="1462854"/>
-                </a:lnTo>
-                <a:lnTo>
-                  <a:pt x="2732899" y="1490585"/>
-                </a:lnTo>
-                <a:lnTo>
-                  <a:pt x="2746757" y="1518576"/>
-                </a:lnTo>
-                <a:lnTo>
-                  <a:pt x="2760277" y="1546828"/>
-                </a:lnTo>
-                <a:lnTo>
-                  <a:pt x="2773458" y="1575341"/>
-                </a:lnTo>
-                <a:lnTo>
-                  <a:pt x="2786297" y="1604114"/>
-                </a:lnTo>
-                <a:lnTo>
-                  <a:pt x="2798791" y="1633147"/>
-                </a:lnTo>
-                <a:lnTo>
-                  <a:pt x="2810937" y="1662440"/>
-                </a:lnTo>
-                <a:lnTo>
-                  <a:pt x="2822732" y="1691994"/>
-                </a:lnTo>
-                <a:lnTo>
-                  <a:pt x="2834174" y="1721808"/>
-                </a:lnTo>
-                <a:lnTo>
-                  <a:pt x="2845260" y="1751883"/>
-                </a:lnTo>
-                <a:lnTo>
-                  <a:pt x="2855989" y="1782218"/>
-                </a:lnTo>
-                <a:lnTo>
-                  <a:pt x="2866357" y="1812814"/>
-                </a:lnTo>
-                <a:lnTo>
-                  <a:pt x="2876363" y="1843670"/>
-                </a:lnTo>
-                <a:lnTo>
-                  <a:pt x="2886006" y="1874786"/>
-                </a:lnTo>
-                <a:lnTo>
-                  <a:pt x="2895282" y="1906162"/>
-                </a:lnTo>
-                <a:lnTo>
-                  <a:pt x="2904192" y="1937799"/>
-                </a:lnTo>
-                <a:lnTo>
-                  <a:pt x="2912733" y="1969697"/>
-                </a:lnTo>
-                <a:lnTo>
-                  <a:pt x="2920904" y="2001855"/>
-                </a:lnTo>
-                <a:lnTo>
-                  <a:pt x="2928706" y="2034273"/>
-                </a:lnTo>
-                <a:lnTo>
-                  <a:pt x="2936136" y="2066951"/>
-                </a:lnTo>
-                <a:lnTo>
-                  <a:pt x="2943195" y="2099890"/>
-                </a:lnTo>
-                <a:lnTo>
-                  <a:pt x="2949884" y="2133090"/>
-                </a:lnTo>
-                <a:lnTo>
-                  <a:pt x="2956202" y="2166549"/>
-                </a:lnTo>
-                <a:lnTo>
-                  <a:pt x="2962150" y="2200269"/>
-                </a:lnTo>
-                <a:lnTo>
-                  <a:pt x="2967730" y="2234250"/>
-                </a:lnTo>
-                <a:lnTo>
-                  <a:pt x="2972944" y="2268491"/>
-                </a:lnTo>
-                <a:lnTo>
-                  <a:pt x="2977793" y="2302992"/>
-                </a:lnTo>
-                <a:lnTo>
-                  <a:pt x="2982281" y="2337754"/>
-                </a:lnTo>
-                <a:lnTo>
-                  <a:pt x="2986410" y="2372776"/>
-                </a:lnTo>
-                <a:lnTo>
-                  <a:pt x="2990186" y="2408058"/>
-                </a:lnTo>
-                <a:lnTo>
-                  <a:pt x="2993613" y="2443601"/>
-                </a:lnTo>
-                <a:lnTo>
-                  <a:pt x="2996697" y="2479404"/>
-                </a:lnTo>
-                <a:lnTo>
-                  <a:pt x="2999444" y="2515468"/>
-                </a:lnTo>
-                <a:lnTo>
-                  <a:pt x="3001863" y="2551792"/>
-                </a:lnTo>
-                <a:lnTo>
-                  <a:pt x="3003962" y="2588376"/>
-                </a:lnTo>
-                <a:lnTo>
-                  <a:pt x="3005752" y="2625221"/>
-                </a:lnTo>
-                <a:lnTo>
-                  <a:pt x="3007246" y="2662326"/>
-                </a:lnTo>
-                <a:lnTo>
-                  <a:pt x="3008456" y="2699692"/>
-                </a:lnTo>
-                <a:lnTo>
-                  <a:pt x="3009400" y="2737318"/>
-                </a:lnTo>
-                <a:lnTo>
-                  <a:pt x="3010097" y="2775204"/>
-                </a:lnTo>
-                <a:lnTo>
-                  <a:pt x="3010570" y="2813350"/>
-                </a:lnTo>
-                <a:lnTo>
-                  <a:pt x="3010848" y="2851758"/>
-                </a:lnTo>
-                <a:lnTo>
-                  <a:pt x="3010967" y="2890425"/>
-                </a:lnTo>
-                <a:lnTo>
-                  <a:pt x="3010984" y="2919596"/>
-                </a:lnTo>
-              </a:path>
-            </a:pathLst>
-          </a:custGeom>
-          <a:noFill/>
-          <a:ln w="38100">
+          </a:prstGeom>
+          <a:solidFill>
+            <a:srgbClr val="8EDBD4"/>
+          </a:solidFill>
+          <a:ln w="12700">
             <a:solidFill>
-              <a:srgbClr val="F2B880"/>
+              <a:srgbClr val="8EDBD4"/>
             </a:solidFill>
           </a:ln>
           <a:effectLst/>
@@ -5730,127 +6808,48 @@
           </a:p>
         </p:txBody>
       </p:sp>
-      <p:cxnSp>
-        <p:nvCxnSpPr>
-          <p:cNvPr id="57" name="C1-E33 line 55" descr="sci-ppt:o055"/>
-          <p:cNvCxnSpPr/>
+      <p:sp>
+        <p:nvSpPr>
+          <p:cNvPr id="42" name="C1-E33 round_rect 40" descr="sci-ppt:o040"/>
+          <p:cNvSpPr/>
           <p:nvPr/>
-        </p:nvCxnSpPr>
+        </p:nvSpPr>
         <p:spPr>
           <a:xfrm>
-            <a:off x="7948744" y="1554480"/>
-            <a:ext cx="0" cy="3017520"/>
+            <a:off x="457200" y="4160520"/>
+            <a:ext cx="11247120" cy="1417320"/>
           </a:xfrm>
-          <a:prstGeom prst="line">
+          <a:prstGeom prst="roundRect">
             <a:avLst/>
           </a:prstGeom>
-          <a:ln w="16510">
-            <a:solidFill>
-              <a:srgbClr val="F28BA0"/>
-            </a:solidFill>
-            <a:prstDash val="dash"/>
-          </a:ln>
-          <a:effectLst/>
-        </p:spPr>
-      </p:cxnSp>
-      <p:cxnSp>
-        <p:nvCxnSpPr>
-          <p:cNvPr id="58" name="C1-E33 line 56" descr="sci-ppt:o056"/>
-          <p:cNvCxnSpPr/>
-          <p:nvPr/>
-        </p:nvCxnSpPr>
-        <p:spPr>
-          <a:xfrm>
-            <a:off x="8961120" y="4572000"/>
-            <a:ext cx="2834640" cy="0"/>
-          </a:xfrm>
-          <a:prstGeom prst="line">
-            <a:avLst/>
-          </a:prstGeom>
-          <a:ln w="19050">
+          <a:solidFill>
+            <a:srgbClr val="213E4B"/>
+          </a:solidFill>
+          <a:ln w="20320">
             <a:solidFill>
               <a:srgbClr val="B4C7D2"/>
             </a:solidFill>
           </a:ln>
           <a:effectLst/>
         </p:spPr>
-      </p:cxnSp>
-      <p:cxnSp>
-        <p:nvCxnSpPr>
-          <p:cNvPr id="59" name="C1-E33 line 57" descr="sci-ppt:o057"/>
-          <p:cNvCxnSpPr/>
+        <p:txBody>
+          <a:bodyPr rtlCol="0" anchor="ctr"/>
+          <a:lstStyle/>
+          <a:p>
+            <a:pPr algn="ctr"/>
+          </a:p>
+        </p:txBody>
+      </p:sp>
+      <p:sp>
+        <p:nvSpPr>
+          <p:cNvPr id="43" name="C1-E33 text 41" descr="sci-ppt:o041"/>
+          <p:cNvSpPr txBox="1"/>
           <p:nvPr/>
-        </p:nvCxnSpPr>
+        </p:nvSpPr>
         <p:spPr>
           <a:xfrm>
-            <a:off x="8961120" y="1554480"/>
-            <a:ext cx="0" cy="3017520"/>
-          </a:xfrm>
-          <a:prstGeom prst="line">
-            <a:avLst/>
-          </a:prstGeom>
-          <a:ln w="19050">
-            <a:solidFill>
-              <a:srgbClr val="B4C7D2"/>
-            </a:solidFill>
-          </a:ln>
-          <a:effectLst/>
-        </p:spPr>
-      </p:cxnSp>
-      <p:cxnSp>
-        <p:nvCxnSpPr>
-          <p:cNvPr id="60" name="C1-E33 line 58" descr="sci-ppt:o058"/>
-          <p:cNvCxnSpPr/>
-          <p:nvPr/>
-        </p:nvCxnSpPr>
-        <p:spPr>
-          <a:xfrm>
-            <a:off x="8961120" y="4572000"/>
-            <a:ext cx="0" cy="64008"/>
-          </a:xfrm>
-          <a:prstGeom prst="line">
-            <a:avLst/>
-          </a:prstGeom>
-          <a:ln w="12700">
-            <a:solidFill>
-              <a:srgbClr val="B4C7D2"/>
-            </a:solidFill>
-          </a:ln>
-          <a:effectLst/>
-        </p:spPr>
-      </p:cxnSp>
-      <p:cxnSp>
-        <p:nvCxnSpPr>
-          <p:cNvPr id="61" name="C1-E33 line 59" descr="sci-ppt:o059"/>
-          <p:cNvCxnSpPr/>
-          <p:nvPr/>
-        </p:nvCxnSpPr>
-        <p:spPr>
-          <a:xfrm>
-            <a:off x="8961120" y="1554480"/>
-            <a:ext cx="0" cy="3017520"/>
-          </a:xfrm>
-          <a:prstGeom prst="line">
-            <a:avLst/>
-          </a:prstGeom>
-          <a:ln w="7620">
-            <a:solidFill>
-              <a:srgbClr val="2E4756"/>
-            </a:solidFill>
-          </a:ln>
-          <a:effectLst/>
-        </p:spPr>
-      </p:cxnSp>
-      <p:sp>
-        <p:nvSpPr>
-          <p:cNvPr id="62" name="C1-E33 text 60" descr="sci-ppt:o060"/>
-          <p:cNvSpPr txBox="1"/>
-          <p:nvPr/>
-        </p:nvSpPr>
-        <p:spPr>
-          <a:xfrm>
-            <a:off x="8503920" y="4654296"/>
-            <a:ext cx="914400" cy="208407"/>
+            <a:off x="594360" y="4233672"/>
+            <a:ext cx="10972800" cy="254889"/>
           </a:xfrm>
           <a:prstGeom prst="rect">
             <a:avLst/>
@@ -5864,77 +6863,33 @@
           </a:bodyPr>
           <a:lstStyle/>
           <a:p>
-            <a:pPr algn="ctr">
+            <a:pPr algn="l">
               <a:spcAft>
                 <a:spcPts val="0"/>
               </a:spcAft>
             </a:pPr>
             <a:r>
-              <a:rPr sz="1050" b="0" i="0">
+              <a:rPr sz="1350" b="1" i="0">
                 <a:solidFill>
-                  <a:srgbClr val="B4C7D2"/>
+                  <a:srgbClr val="8EDBD4"/>
                 </a:solidFill>
                 <a:latin typeface="Arial"/>
               </a:rPr>
-              <a:t>0</a:t>
-            </a:r>
-          </a:p>
-        </p:txBody>
-      </p:sp>
-      <p:cxnSp>
-        <p:nvCxnSpPr>
-          <p:cNvPr id="63" name="C1-E33 line 61" descr="sci-ppt:o061"/>
-          <p:cNvCxnSpPr/>
+              <a:t>Reference formulas</a:t>
+            </a:r>
+          </a:p>
+        </p:txBody>
+      </p:sp>
+      <p:sp>
+        <p:nvSpPr>
+          <p:cNvPr id="44" name="C1-E33 text 42" descr="sci-ppt:o042"/>
+          <p:cNvSpPr txBox="1"/>
           <p:nvPr/>
-        </p:nvCxnSpPr>
+        </p:nvSpPr>
         <p:spPr>
           <a:xfrm>
-            <a:off x="10378440" y="4572000"/>
-            <a:ext cx="0" cy="64008"/>
-          </a:xfrm>
-          <a:prstGeom prst="line">
-            <a:avLst/>
-          </a:prstGeom>
-          <a:ln w="12700">
-            <a:solidFill>
-              <a:srgbClr val="B4C7D2"/>
-            </a:solidFill>
-          </a:ln>
-          <a:effectLst/>
-        </p:spPr>
-      </p:cxnSp>
-      <p:cxnSp>
-        <p:nvCxnSpPr>
-          <p:cNvPr id="64" name="C1-E33 line 62" descr="sci-ppt:o062"/>
-          <p:cNvCxnSpPr/>
-          <p:nvPr/>
-        </p:nvCxnSpPr>
-        <p:spPr>
-          <a:xfrm>
-            <a:off x="10378440" y="1554480"/>
-            <a:ext cx="0" cy="3017520"/>
-          </a:xfrm>
-          <a:prstGeom prst="line">
-            <a:avLst/>
-          </a:prstGeom>
-          <a:ln w="7620">
-            <a:solidFill>
-              <a:srgbClr val="2E4756"/>
-            </a:solidFill>
-          </a:ln>
-          <a:effectLst/>
-        </p:spPr>
-      </p:cxnSp>
-      <p:sp>
-        <p:nvSpPr>
-          <p:cNvPr id="65" name="C1-E33 text 63" descr="sci-ppt:o063"/>
-          <p:cNvSpPr txBox="1"/>
-          <p:nvPr/>
-        </p:nvSpPr>
-        <p:spPr>
-          <a:xfrm>
-            <a:off x="9921240" y="4654296"/>
-            <a:ext cx="914400" cy="208407"/>
+            <a:off x="594360" y="4572000"/>
+            <a:ext cx="10972800" cy="479551"/>
           </a:xfrm>
           <a:prstGeom prst="rect">
             <a:avLst/>
@@ -5948,77 +6903,49 @@
           </a:bodyPr>
           <a:lstStyle/>
           <a:p>
-            <a:pPr algn="ctr">
+            <a:pPr algn="l">
               <a:spcAft>
                 <a:spcPts val="0"/>
               </a:spcAft>
             </a:pPr>
             <a:r>
-              <a:rPr sz="1050" b="0" i="0">
+              <a:rPr sz="1400" b="1" i="0">
                 <a:solidFill>
-                  <a:srgbClr val="B4C7D2"/>
+                  <a:srgbClr val="E7F0F3"/>
                 </a:solidFill>
                 <a:latin typeface="Arial"/>
               </a:rPr>
-              <a:t>0.5</a:t>
-            </a:r>
-          </a:p>
-        </p:txBody>
-      </p:sp>
-      <p:cxnSp>
-        <p:nvCxnSpPr>
-          <p:cNvPr id="66" name="C1-E33 line 64" descr="sci-ppt:o064"/>
-          <p:cNvCxnSpPr/>
+              <a:t>Π(x) = ∫(p − p_ref)dt;   Δu ≃ −∇Π/ρ,  ∇²Π = 0</a:t>
+            </a:r>
+          </a:p>
+          <a:p>
+            <a:pPr algn="l">
+              <a:spcAft>
+                <a:spcPts val="0"/>
+              </a:spcAft>
+            </a:pPr>
+            <a:r>
+              <a:rPr sz="1400" b="1" i="0">
+                <a:solidFill>
+                  <a:srgbClr val="E7F0F3"/>
+                </a:solidFill>
+                <a:latin typeface="Arial"/>
+              </a:rPr>
+              <a:t>U_column = Π₀/(ρL);   tₐ = L/c</a:t>
+            </a:r>
+          </a:p>
+        </p:txBody>
+      </p:sp>
+      <p:sp>
+        <p:nvSpPr>
+          <p:cNvPr id="45" name="C1-E33 text 43" descr="sci-ppt:o043"/>
+          <p:cNvSpPr txBox="1"/>
           <p:nvPr/>
-        </p:nvCxnSpPr>
+        </p:nvSpPr>
         <p:spPr>
           <a:xfrm>
-            <a:off x="11795760" y="4572000"/>
-            <a:ext cx="0" cy="64008"/>
-          </a:xfrm>
-          <a:prstGeom prst="line">
-            <a:avLst/>
-          </a:prstGeom>
-          <a:ln w="12700">
-            <a:solidFill>
-              <a:srgbClr val="B4C7D2"/>
-            </a:solidFill>
-          </a:ln>
-          <a:effectLst/>
-        </p:spPr>
-      </p:cxnSp>
-      <p:cxnSp>
-        <p:nvCxnSpPr>
-          <p:cNvPr id="67" name="C1-E33 line 65" descr="sci-ppt:o065"/>
-          <p:cNvCxnSpPr/>
-          <p:nvPr/>
-        </p:nvCxnSpPr>
-        <p:spPr>
-          <a:xfrm>
-            <a:off x="11795760" y="1554480"/>
-            <a:ext cx="0" cy="3017520"/>
-          </a:xfrm>
-          <a:prstGeom prst="line">
-            <a:avLst/>
-          </a:prstGeom>
-          <a:ln w="7620">
-            <a:solidFill>
-              <a:srgbClr val="2E4756"/>
-            </a:solidFill>
-          </a:ln>
-          <a:effectLst/>
-        </p:spPr>
-      </p:cxnSp>
-      <p:sp>
-        <p:nvSpPr>
-          <p:cNvPr id="68" name="C1-E33 text 66" descr="sci-ppt:o066"/>
-          <p:cNvSpPr txBox="1"/>
-          <p:nvPr/>
-        </p:nvSpPr>
-        <p:spPr>
-          <a:xfrm>
-            <a:off x="11338560" y="4654296"/>
-            <a:ext cx="914400" cy="208407"/>
+            <a:off x="457200" y="5760720"/>
+            <a:ext cx="11338560" cy="247142"/>
           </a:xfrm>
           <a:prstGeom prst="rect">
             <a:avLst/>
@@ -6032,946 +6959,26 @@
           </a:bodyPr>
           <a:lstStyle/>
           <a:p>
-            <a:pPr algn="ctr">
-              <a:spcAft>
-                <a:spcPts val="0"/>
-              </a:spcAft>
-            </a:pPr>
-            <a:r>
-              <a:rPr sz="1050" b="0" i="0">
-                <a:solidFill>
-                  <a:srgbClr val="B4C7D2"/>
-                </a:solidFill>
-                <a:latin typeface="Arial"/>
-              </a:rPr>
-              <a:t>1</a:t>
-            </a:r>
-          </a:p>
-        </p:txBody>
-      </p:sp>
-      <p:cxnSp>
-        <p:nvCxnSpPr>
-          <p:cNvPr id="69" name="C1-E33 line 67" descr="sci-ppt:o067"/>
-          <p:cNvCxnSpPr/>
-          <p:nvPr/>
-        </p:nvCxnSpPr>
-        <p:spPr>
-          <a:xfrm>
-            <a:off x="8897112" y="4572000"/>
-            <a:ext cx="64008" cy="0"/>
-          </a:xfrm>
-          <a:prstGeom prst="line">
-            <a:avLst/>
-          </a:prstGeom>
-          <a:ln w="12700">
-            <a:solidFill>
-              <a:srgbClr val="B4C7D2"/>
-            </a:solidFill>
-          </a:ln>
-          <a:effectLst/>
-        </p:spPr>
-      </p:cxnSp>
-      <p:cxnSp>
-        <p:nvCxnSpPr>
-          <p:cNvPr id="70" name="C1-E33 line 68" descr="sci-ppt:o068"/>
-          <p:cNvCxnSpPr/>
-          <p:nvPr/>
-        </p:nvCxnSpPr>
-        <p:spPr>
-          <a:xfrm>
-            <a:off x="8897112" y="3135085"/>
-            <a:ext cx="64008" cy="0"/>
-          </a:xfrm>
-          <a:prstGeom prst="line">
-            <a:avLst/>
-          </a:prstGeom>
-          <a:ln w="12700">
-            <a:solidFill>
-              <a:srgbClr val="B4C7D2"/>
-            </a:solidFill>
-          </a:ln>
-          <a:effectLst/>
-        </p:spPr>
-      </p:cxnSp>
-      <p:cxnSp>
-        <p:nvCxnSpPr>
-          <p:cNvPr id="71" name="C1-E33 line 69" descr="sci-ppt:o069"/>
-          <p:cNvCxnSpPr/>
-          <p:nvPr/>
-        </p:nvCxnSpPr>
-        <p:spPr>
-          <a:xfrm>
-            <a:off x="8961120" y="3135085"/>
-            <a:ext cx="2834640" cy="0"/>
-          </a:xfrm>
-          <a:prstGeom prst="line">
-            <a:avLst/>
-          </a:prstGeom>
-          <a:ln w="7620">
-            <a:solidFill>
-              <a:srgbClr val="2E4756"/>
-            </a:solidFill>
-          </a:ln>
-          <a:effectLst/>
-        </p:spPr>
-      </p:cxnSp>
-      <p:sp>
-        <p:nvSpPr>
-          <p:cNvPr id="72" name="C1-E33 text 70" descr="sci-ppt:o070"/>
-          <p:cNvSpPr txBox="1"/>
-          <p:nvPr/>
-        </p:nvSpPr>
-        <p:spPr>
-          <a:xfrm>
-            <a:off x="8092440" y="3052789"/>
-            <a:ext cx="777240" cy="208407"/>
-          </a:xfrm>
-          <a:prstGeom prst="rect">
-            <a:avLst/>
-          </a:prstGeom>
-          <a:noFill/>
-          <a:effectLst/>
-        </p:spPr>
-        <p:txBody>
-          <a:bodyPr wrap="none" lIns="18288" rIns="18288" tIns="18288" bIns="18288" anchor="t">
-            <a:spAutoFit/>
-          </a:bodyPr>
-          <a:lstStyle/>
-          <a:p>
-            <a:pPr algn="r">
-              <a:spcAft>
-                <a:spcPts val="0"/>
-              </a:spcAft>
-            </a:pPr>
-            <a:r>
-              <a:rPr sz="1050" b="0" i="0">
-                <a:solidFill>
-                  <a:srgbClr val="B4C7D2"/>
-                </a:solidFill>
-                <a:latin typeface="Arial"/>
-              </a:rPr>
-              <a:t>0.5</a:t>
-            </a:r>
-          </a:p>
-        </p:txBody>
-      </p:sp>
-      <p:cxnSp>
-        <p:nvCxnSpPr>
-          <p:cNvPr id="73" name="C1-E33 line 71" descr="sci-ppt:o071"/>
-          <p:cNvCxnSpPr/>
-          <p:nvPr/>
-        </p:nvCxnSpPr>
-        <p:spPr>
-          <a:xfrm>
-            <a:off x="8897112" y="1698171"/>
-            <a:ext cx="64008" cy="0"/>
-          </a:xfrm>
-          <a:prstGeom prst="line">
-            <a:avLst/>
-          </a:prstGeom>
-          <a:ln w="12700">
-            <a:solidFill>
-              <a:srgbClr val="B4C7D2"/>
-            </a:solidFill>
-          </a:ln>
-          <a:effectLst/>
-        </p:spPr>
-      </p:cxnSp>
-      <p:cxnSp>
-        <p:nvCxnSpPr>
-          <p:cNvPr id="74" name="C1-E33 line 72" descr="sci-ppt:o072"/>
-          <p:cNvCxnSpPr/>
-          <p:nvPr/>
-        </p:nvCxnSpPr>
-        <p:spPr>
-          <a:xfrm>
-            <a:off x="8961120" y="1698171"/>
-            <a:ext cx="2834640" cy="0"/>
-          </a:xfrm>
-          <a:prstGeom prst="line">
-            <a:avLst/>
-          </a:prstGeom>
-          <a:ln w="7620">
-            <a:solidFill>
-              <a:srgbClr val="2E4756"/>
-            </a:solidFill>
-          </a:ln>
-          <a:effectLst/>
-        </p:spPr>
-      </p:cxnSp>
-      <p:sp>
-        <p:nvSpPr>
-          <p:cNvPr id="75" name="C1-E33 text 73" descr="sci-ppt:o073"/>
-          <p:cNvSpPr txBox="1"/>
-          <p:nvPr/>
-        </p:nvSpPr>
-        <p:spPr>
-          <a:xfrm>
-            <a:off x="8092440" y="1615875"/>
-            <a:ext cx="777240" cy="208407"/>
-          </a:xfrm>
-          <a:prstGeom prst="rect">
-            <a:avLst/>
-          </a:prstGeom>
-          <a:noFill/>
-          <a:effectLst/>
-        </p:spPr>
-        <p:txBody>
-          <a:bodyPr wrap="none" lIns="18288" rIns="18288" tIns="18288" bIns="18288" anchor="t">
-            <a:spAutoFit/>
-          </a:bodyPr>
-          <a:lstStyle/>
-          <a:p>
-            <a:pPr algn="r">
-              <a:spcAft>
-                <a:spcPts val="0"/>
-              </a:spcAft>
-            </a:pPr>
-            <a:r>
-              <a:rPr sz="1050" b="0" i="0">
-                <a:solidFill>
-                  <a:srgbClr val="B4C7D2"/>
-                </a:solidFill>
-                <a:latin typeface="Arial"/>
-              </a:rPr>
-              <a:t>1</a:t>
-            </a:r>
-          </a:p>
-        </p:txBody>
-      </p:sp>
-      <p:sp>
-        <p:nvSpPr>
-          <p:cNvPr id="76" name="C1-E33 text 74" descr="sci-ppt:o074"/>
-          <p:cNvSpPr txBox="1"/>
-          <p:nvPr/>
-        </p:nvSpPr>
-        <p:spPr>
-          <a:xfrm>
-            <a:off x="8961120" y="4855464"/>
-            <a:ext cx="2834640" cy="231648"/>
-          </a:xfrm>
-          <a:prstGeom prst="rect">
-            <a:avLst/>
-          </a:prstGeom>
-          <a:noFill/>
-          <a:effectLst/>
-        </p:spPr>
-        <p:txBody>
-          <a:bodyPr wrap="none" lIns="18288" rIns="18288" tIns="18288" bIns="18288" anchor="t">
-            <a:spAutoFit/>
-          </a:bodyPr>
-          <a:lstStyle/>
-          <a:p>
-            <a:pPr algn="ctr">
-              <a:spcAft>
-                <a:spcPts val="0"/>
-              </a:spcAft>
-            </a:pPr>
-            <a:r>
-              <a:rPr sz="1200" b="0" i="0">
-                <a:solidFill>
-                  <a:srgbClr val="E7F0F3"/>
-                </a:solidFill>
-                <a:latin typeface="Arial"/>
-              </a:rPr>
-              <a:t>R / Rₘₐₓ</a:t>
-            </a:r>
-          </a:p>
-        </p:txBody>
-      </p:sp>
-      <p:sp>
-        <p:nvSpPr>
-          <p:cNvPr id="77" name="C1-E33 text 75" descr="sci-ppt:o075"/>
-          <p:cNvSpPr txBox="1"/>
-          <p:nvPr/>
-        </p:nvSpPr>
-        <p:spPr>
-          <a:xfrm>
-            <a:off x="8412480" y="1207007"/>
-            <a:ext cx="2834640" cy="231648"/>
-          </a:xfrm>
-          <a:prstGeom prst="rect">
-            <a:avLst/>
-          </a:prstGeom>
-          <a:noFill/>
-          <a:effectLst/>
-        </p:spPr>
-        <p:txBody>
-          <a:bodyPr wrap="none" lIns="18288" rIns="18288" tIns="18288" bIns="18288" anchor="t">
-            <a:spAutoFit/>
-          </a:bodyPr>
-          <a:lstStyle/>
-          <a:p>
             <a:pPr algn="l">
               <a:spcAft>
                 <a:spcPts val="0"/>
               </a:spcAft>
             </a:pPr>
             <a:r>
-              <a:rPr sz="1200" b="0" i="0">
-                <a:solidFill>
-                  <a:srgbClr val="E7F0F3"/>
-                </a:solidFill>
-                <a:latin typeface="Arial"/>
-              </a:rPr>
-              <a:t>Kₗ / E_B</a:t>
-            </a:r>
-          </a:p>
-        </p:txBody>
-      </p:sp>
-      <p:sp>
-        <p:nvSpPr>
-          <p:cNvPr id="78" name="C1-E33 polygon 76" descr="sci-ppt:o076"/>
-          <p:cNvSpPr/>
-          <p:nvPr/>
-        </p:nvSpPr>
-        <p:spPr>
-          <a:xfrm>
-            <a:off x="8961120" y="1698171"/>
-            <a:ext cx="2834640" cy="2873829"/>
-          </a:xfrm>
-          <a:custGeom>
-            <a:avLst/>
-            <a:gdLst/>
-            <a:ahLst/>
-            <a:cxnLst/>
-            <a:rect l="l" t="t" r="r" b="b"/>
-            <a:pathLst>
-              <a:path w="2834640" h="2873829">
-                <a:moveTo>
-                  <a:pt x="0" y="0"/>
-                </a:moveTo>
-                <a:lnTo>
-                  <a:pt x="28632" y="3"/>
-                </a:lnTo>
-                <a:lnTo>
-                  <a:pt x="57265" y="24"/>
-                </a:lnTo>
-                <a:lnTo>
-                  <a:pt x="85898" y="80"/>
-                </a:lnTo>
-                <a:lnTo>
-                  <a:pt x="114530" y="189"/>
-                </a:lnTo>
-                <a:lnTo>
-                  <a:pt x="143163" y="370"/>
-                </a:lnTo>
-                <a:lnTo>
-                  <a:pt x="171796" y="640"/>
-                </a:lnTo>
-                <a:lnTo>
-                  <a:pt x="200429" y="1016"/>
-                </a:lnTo>
-                <a:lnTo>
-                  <a:pt x="229061" y="1516"/>
-                </a:lnTo>
-                <a:lnTo>
-                  <a:pt x="257694" y="2159"/>
-                </a:lnTo>
-                <a:lnTo>
-                  <a:pt x="286327" y="2962"/>
-                </a:lnTo>
-                <a:lnTo>
-                  <a:pt x="314960" y="3942"/>
-                </a:lnTo>
-                <a:lnTo>
-                  <a:pt x="343592" y="5118"/>
-                </a:lnTo>
-                <a:lnTo>
-                  <a:pt x="372225" y="6507"/>
-                </a:lnTo>
-                <a:lnTo>
-                  <a:pt x="400858" y="8127"/>
-                </a:lnTo>
-                <a:lnTo>
-                  <a:pt x="429490" y="9996"/>
-                </a:lnTo>
-                <a:lnTo>
-                  <a:pt x="458123" y="12131"/>
-                </a:lnTo>
-                <a:lnTo>
-                  <a:pt x="486756" y="14551"/>
-                </a:lnTo>
-                <a:lnTo>
-                  <a:pt x="515389" y="17273"/>
-                </a:lnTo>
-                <a:lnTo>
-                  <a:pt x="544021" y="20315"/>
-                </a:lnTo>
-                <a:lnTo>
-                  <a:pt x="572654" y="23694"/>
-                </a:lnTo>
-                <a:lnTo>
-                  <a:pt x="601287" y="27429"/>
-                </a:lnTo>
-                <a:lnTo>
-                  <a:pt x="629920" y="31537"/>
-                </a:lnTo>
-                <a:lnTo>
-                  <a:pt x="658552" y="36036"/>
-                </a:lnTo>
-                <a:lnTo>
-                  <a:pt x="687185" y="40944"/>
-                </a:lnTo>
-                <a:lnTo>
-                  <a:pt x="715818" y="46278"/>
-                </a:lnTo>
-                <a:lnTo>
-                  <a:pt x="744450" y="52056"/>
-                </a:lnTo>
-                <a:lnTo>
-                  <a:pt x="773083" y="58297"/>
-                </a:lnTo>
-                <a:lnTo>
-                  <a:pt x="801716" y="65017"/>
-                </a:lnTo>
-                <a:lnTo>
-                  <a:pt x="830349" y="72235"/>
-                </a:lnTo>
-                <a:lnTo>
-                  <a:pt x="858981" y="79968"/>
-                </a:lnTo>
-                <a:lnTo>
-                  <a:pt x="887614" y="88235"/>
-                </a:lnTo>
-                <a:lnTo>
-                  <a:pt x="916247" y="97052"/>
-                </a:lnTo>
-                <a:lnTo>
-                  <a:pt x="944880" y="106438"/>
-                </a:lnTo>
-                <a:lnTo>
-                  <a:pt x="973512" y="116410"/>
-                </a:lnTo>
-                <a:lnTo>
-                  <a:pt x="1002145" y="126987"/>
-                </a:lnTo>
-                <a:lnTo>
-                  <a:pt x="1030778" y="138186"/>
-                </a:lnTo>
-                <a:lnTo>
-                  <a:pt x="1059410" y="150024"/>
-                </a:lnTo>
-                <a:lnTo>
-                  <a:pt x="1088043" y="162520"/>
-                </a:lnTo>
-                <a:lnTo>
-                  <a:pt x="1116676" y="175691"/>
-                </a:lnTo>
-                <a:lnTo>
-                  <a:pt x="1145309" y="189555"/>
-                </a:lnTo>
-                <a:lnTo>
-                  <a:pt x="1173941" y="204130"/>
-                </a:lnTo>
-                <a:lnTo>
-                  <a:pt x="1202574" y="219434"/>
-                </a:lnTo>
-                <a:lnTo>
-                  <a:pt x="1231207" y="235484"/>
-                </a:lnTo>
-                <a:lnTo>
-                  <a:pt x="1259840" y="252298"/>
-                </a:lnTo>
-                <a:lnTo>
-                  <a:pt x="1288472" y="269894"/>
-                </a:lnTo>
-                <a:lnTo>
-                  <a:pt x="1317105" y="288289"/>
-                </a:lnTo>
-                <a:lnTo>
-                  <a:pt x="1345738" y="307503"/>
-                </a:lnTo>
-                <a:lnTo>
-                  <a:pt x="1374370" y="327551"/>
-                </a:lnTo>
-                <a:lnTo>
-                  <a:pt x="1403003" y="348452"/>
-                </a:lnTo>
-                <a:lnTo>
-                  <a:pt x="1431636" y="370225"/>
-                </a:lnTo>
-                <a:lnTo>
-                  <a:pt x="1460269" y="392885"/>
-                </a:lnTo>
-                <a:lnTo>
-                  <a:pt x="1488901" y="416452"/>
-                </a:lnTo>
-                <a:lnTo>
-                  <a:pt x="1517534" y="440943"/>
-                </a:lnTo>
-                <a:lnTo>
-                  <a:pt x="1546167" y="466376"/>
-                </a:lnTo>
-                <a:lnTo>
-                  <a:pt x="1574800" y="492769"/>
-                </a:lnTo>
-                <a:lnTo>
-                  <a:pt x="1603432" y="520139"/>
-                </a:lnTo>
-                <a:lnTo>
-                  <a:pt x="1632065" y="548504"/>
-                </a:lnTo>
-                <a:lnTo>
-                  <a:pt x="1660698" y="577882"/>
-                </a:lnTo>
-                <a:lnTo>
-                  <a:pt x="1689330" y="608291"/>
-                </a:lnTo>
-                <a:lnTo>
-                  <a:pt x="1717963" y="639748"/>
-                </a:lnTo>
-                <a:lnTo>
-                  <a:pt x="1746596" y="672272"/>
-                </a:lnTo>
-                <a:lnTo>
-                  <a:pt x="1775229" y="705879"/>
-                </a:lnTo>
-                <a:lnTo>
-                  <a:pt x="1803861" y="740588"/>
-                </a:lnTo>
-                <a:lnTo>
-                  <a:pt x="1832494" y="776417"/>
-                </a:lnTo>
-                <a:lnTo>
-                  <a:pt x="1861127" y="813383"/>
-                </a:lnTo>
-                <a:lnTo>
-                  <a:pt x="1889760" y="851505"/>
-                </a:lnTo>
-                <a:lnTo>
-                  <a:pt x="1918392" y="890799"/>
-                </a:lnTo>
-                <a:lnTo>
-                  <a:pt x="1947025" y="931284"/>
-                </a:lnTo>
-                <a:lnTo>
-                  <a:pt x="1975658" y="972977"/>
-                </a:lnTo>
-                <a:lnTo>
-                  <a:pt x="2004290" y="1015896"/>
-                </a:lnTo>
-                <a:lnTo>
-                  <a:pt x="2032923" y="1060060"/>
-                </a:lnTo>
-                <a:lnTo>
-                  <a:pt x="2061556" y="1105485"/>
-                </a:lnTo>
-                <a:lnTo>
-                  <a:pt x="2090189" y="1152189"/>
-                </a:lnTo>
-                <a:lnTo>
-                  <a:pt x="2118821" y="1200191"/>
-                </a:lnTo>
-                <a:lnTo>
-                  <a:pt x="2147454" y="1249508"/>
-                </a:lnTo>
-                <a:lnTo>
-                  <a:pt x="2176087" y="1300158"/>
-                </a:lnTo>
-                <a:lnTo>
-                  <a:pt x="2204720" y="1352158"/>
-                </a:lnTo>
-                <a:lnTo>
-                  <a:pt x="2233352" y="1405527"/>
-                </a:lnTo>
-                <a:lnTo>
-                  <a:pt x="2261985" y="1460281"/>
-                </a:lnTo>
-                <a:lnTo>
-                  <a:pt x="2290618" y="1516440"/>
-                </a:lnTo>
-                <a:lnTo>
-                  <a:pt x="2319250" y="1574020"/>
-                </a:lnTo>
-                <a:lnTo>
-                  <a:pt x="2347883" y="1633040"/>
-                </a:lnTo>
-                <a:lnTo>
-                  <a:pt x="2376516" y="1693517"/>
-                </a:lnTo>
-                <a:lnTo>
-                  <a:pt x="2405149" y="1755469"/>
-                </a:lnTo>
-                <a:lnTo>
-                  <a:pt x="2433781" y="1818913"/>
-                </a:lnTo>
-                <a:lnTo>
-                  <a:pt x="2462414" y="1883869"/>
-                </a:lnTo>
-                <a:lnTo>
-                  <a:pt x="2491047" y="1950352"/>
-                </a:lnTo>
-                <a:lnTo>
-                  <a:pt x="2519680" y="2018382"/>
-                </a:lnTo>
-                <a:lnTo>
-                  <a:pt x="2548312" y="2087975"/>
-                </a:lnTo>
-                <a:lnTo>
-                  <a:pt x="2576945" y="2159150"/>
-                </a:lnTo>
-                <a:lnTo>
-                  <a:pt x="2605578" y="2231924"/>
-                </a:lnTo>
-                <a:lnTo>
-                  <a:pt x="2634210" y="2306316"/>
-                </a:lnTo>
-                <a:lnTo>
-                  <a:pt x="2662843" y="2382342"/>
-                </a:lnTo>
-                <a:lnTo>
-                  <a:pt x="2691476" y="2460021"/>
-                </a:lnTo>
-                <a:lnTo>
-                  <a:pt x="2720109" y="2539371"/>
-                </a:lnTo>
-                <a:lnTo>
-                  <a:pt x="2748741" y="2620408"/>
-                </a:lnTo>
-                <a:lnTo>
-                  <a:pt x="2777374" y="2703152"/>
-                </a:lnTo>
-                <a:lnTo>
-                  <a:pt x="2806007" y="2787619"/>
-                </a:lnTo>
-                <a:lnTo>
-                  <a:pt x="2834640" y="2873829"/>
-                </a:lnTo>
-              </a:path>
-            </a:pathLst>
-          </a:custGeom>
-          <a:noFill/>
-          <a:ln w="38100">
-            <a:solidFill>
-              <a:srgbClr val="7FC8F8"/>
-            </a:solidFill>
-          </a:ln>
-          <a:effectLst/>
-        </p:spPr>
-        <p:txBody>
-          <a:bodyPr rtlCol="0" anchor="ctr"/>
-          <a:lstStyle/>
-          <a:p>
-            <a:pPr algn="ctr"/>
-          </a:p>
-        </p:txBody>
-      </p:sp>
-      <p:sp>
-        <p:nvSpPr>
-          <p:cNvPr id="79" name="C1-E33 text 77" descr="sci-ppt:o077"/>
-          <p:cNvSpPr txBox="1"/>
-          <p:nvPr/>
-        </p:nvSpPr>
-        <p:spPr>
-          <a:xfrm>
-            <a:off x="822960" y="960120"/>
-            <a:ext cx="3200400" cy="270383"/>
-          </a:xfrm>
-          <a:prstGeom prst="rect">
-            <a:avLst/>
-          </a:prstGeom>
-          <a:noFill/>
-          <a:effectLst/>
-        </p:spPr>
-        <p:txBody>
-          <a:bodyPr wrap="none" lIns="18288" rIns="18288" tIns="18288" bIns="18288" anchor="t">
-            <a:spAutoFit/>
-          </a:bodyPr>
-          <a:lstStyle/>
-          <a:p>
-            <a:pPr algn="l">
-              <a:spcAft>
-                <a:spcPts val="0"/>
-              </a:spcAft>
-            </a:pPr>
-            <a:r>
-              <a:rPr sz="1450" b="1" i="0">
-                <a:solidFill>
-                  <a:srgbClr val="8EDBD4"/>
-                </a:solidFill>
-                <a:latin typeface="Arial"/>
-              </a:rPr>
-              <a:t>Speed</a:t>
-            </a:r>
-          </a:p>
-        </p:txBody>
-      </p:sp>
-      <p:sp>
-        <p:nvSpPr>
-          <p:cNvPr id="80" name="C1-E33 text 78" descr="sci-ppt:o078"/>
-          <p:cNvSpPr txBox="1"/>
-          <p:nvPr/>
-        </p:nvSpPr>
-        <p:spPr>
-          <a:xfrm>
-            <a:off x="822960" y="5257800"/>
-            <a:ext cx="3383280" cy="223900"/>
-          </a:xfrm>
-          <a:prstGeom prst="rect">
-            <a:avLst/>
-          </a:prstGeom>
-          <a:noFill/>
-          <a:effectLst/>
-        </p:spPr>
-        <p:txBody>
-          <a:bodyPr wrap="none" lIns="18288" rIns="18288" tIns="18288" bIns="18288" anchor="t">
-            <a:spAutoFit/>
-          </a:bodyPr>
-          <a:lstStyle/>
-          <a:p>
-            <a:pPr algn="l">
-              <a:spcAft>
-                <a:spcPts val="0"/>
-              </a:spcAft>
-            </a:pPr>
-            <a:r>
-              <a:rPr sz="1150" b="0" i="0">
-                <a:solidFill>
-                  <a:srgbClr val="E7F0F3"/>
-                </a:solidFill>
-                <a:latin typeface="Arial"/>
-              </a:rPr>
-              <a:t>Ṙ = −√{(2Δp_c/3ρ)[(Rₘₐₓ/R)³ − 1]}</a:t>
-            </a:r>
-          </a:p>
-        </p:txBody>
-      </p:sp>
-      <p:sp>
-        <p:nvSpPr>
-          <p:cNvPr id="81" name="C1-E33 text 79" descr="sci-ppt:o079"/>
-          <p:cNvSpPr txBox="1"/>
-          <p:nvPr/>
-        </p:nvSpPr>
-        <p:spPr>
-          <a:xfrm>
-            <a:off x="4937760" y="960120"/>
-            <a:ext cx="3200400" cy="270383"/>
-          </a:xfrm>
-          <a:prstGeom prst="rect">
-            <a:avLst/>
-          </a:prstGeom>
-          <a:noFill/>
-          <a:effectLst/>
-        </p:spPr>
-        <p:txBody>
-          <a:bodyPr wrap="none" lIns="18288" rIns="18288" tIns="18288" bIns="18288" anchor="t">
-            <a:spAutoFit/>
-          </a:bodyPr>
-          <a:lstStyle/>
-          <a:p>
-            <a:pPr algn="l">
-              <a:spcAft>
-                <a:spcPts val="0"/>
-              </a:spcAft>
-            </a:pPr>
-            <a:r>
-              <a:rPr sz="1450" b="1" i="0">
+              <a:rPr sz="1300" b="0" i="0">
                 <a:solidFill>
                   <a:srgbClr val="F2B880"/>
                 </a:solidFill>
                 <a:latin typeface="Arial"/>
               </a:rPr>
-              <a:t>Time</a:t>
-            </a:r>
-          </a:p>
-        </p:txBody>
-      </p:sp>
-      <p:sp>
-        <p:nvSpPr>
-          <p:cNvPr id="82" name="C1-E33 text 80" descr="sci-ppt:o080"/>
-          <p:cNvSpPr txBox="1"/>
-          <p:nvPr/>
-        </p:nvSpPr>
-        <p:spPr>
-          <a:xfrm>
-            <a:off x="4937760" y="5257800"/>
-            <a:ext cx="3383280" cy="402081"/>
-          </a:xfrm>
-          <a:prstGeom prst="rect">
-            <a:avLst/>
-          </a:prstGeom>
-          <a:noFill/>
-          <a:effectLst/>
-        </p:spPr>
-        <p:txBody>
-          <a:bodyPr wrap="none" lIns="18288" rIns="18288" tIns="18288" bIns="18288" anchor="t">
-            <a:spAutoFit/>
-          </a:bodyPr>
-          <a:lstStyle/>
-          <a:p>
-            <a:pPr algn="l">
-              <a:spcAft>
-                <a:spcPts val="0"/>
-              </a:spcAft>
-            </a:pPr>
-            <a:r>
-              <a:rPr sz="1150" b="0" i="0">
-                <a:solidFill>
-                  <a:srgbClr val="E7F0F3"/>
-                </a:solidFill>
-                <a:latin typeface="Arial"/>
-              </a:rPr>
-              <a:t>t_c = B(5/6,1/2)/√6 · Rₘₐₓ√(ρ/Δp_c) = 2.744</a:t>
-            </a:r>
-          </a:p>
-          <a:p>
-            <a:pPr algn="l">
-              <a:spcAft>
-                <a:spcPts val="0"/>
-              </a:spcAft>
-            </a:pPr>
-            <a:r>
-              <a:rPr sz="1150" b="0" i="0">
-                <a:solidFill>
-                  <a:srgbClr val="E7F0F3"/>
-                </a:solidFill>
-                <a:latin typeface="Arial"/>
-              </a:rPr>
-              <a:t>µs</a:t>
-            </a:r>
-          </a:p>
-        </p:txBody>
-      </p:sp>
-      <p:sp>
-        <p:nvSpPr>
-          <p:cNvPr id="83" name="C1-E33 text 81" descr="sci-ppt:o081"/>
-          <p:cNvSpPr txBox="1"/>
-          <p:nvPr/>
-        </p:nvSpPr>
-        <p:spPr>
-          <a:xfrm>
-            <a:off x="8961120" y="960120"/>
-            <a:ext cx="3200400" cy="270383"/>
-          </a:xfrm>
-          <a:prstGeom prst="rect">
-            <a:avLst/>
-          </a:prstGeom>
-          <a:noFill/>
-          <a:effectLst/>
-        </p:spPr>
-        <p:txBody>
-          <a:bodyPr wrap="none" lIns="18288" rIns="18288" tIns="18288" bIns="18288" anchor="t">
-            <a:spAutoFit/>
-          </a:bodyPr>
-          <a:lstStyle/>
-          <a:p>
-            <a:pPr algn="l">
-              <a:spcAft>
-                <a:spcPts val="0"/>
-              </a:spcAft>
-            </a:pPr>
-            <a:r>
-              <a:rPr sz="1450" b="1" i="0">
-                <a:solidFill>
-                  <a:srgbClr val="7FC8F8"/>
-                </a:solidFill>
-                <a:latin typeface="Arial"/>
-              </a:rPr>
-              <a:t>Energy</a:t>
-            </a:r>
-          </a:p>
-        </p:txBody>
-      </p:sp>
-      <p:sp>
-        <p:nvSpPr>
-          <p:cNvPr id="84" name="C1-E33 text 82" descr="sci-ppt:o082"/>
-          <p:cNvSpPr txBox="1"/>
-          <p:nvPr/>
-        </p:nvSpPr>
-        <p:spPr>
-          <a:xfrm>
-            <a:off x="8961120" y="5257800"/>
-            <a:ext cx="3383280" cy="223900"/>
-          </a:xfrm>
-          <a:prstGeom prst="rect">
-            <a:avLst/>
-          </a:prstGeom>
-          <a:noFill/>
-          <a:effectLst/>
-        </p:spPr>
-        <p:txBody>
-          <a:bodyPr wrap="none" lIns="18288" rIns="18288" tIns="18288" bIns="18288" anchor="t">
-            <a:spAutoFit/>
-          </a:bodyPr>
-          <a:lstStyle/>
-          <a:p>
-            <a:pPr algn="l">
-              <a:spcAft>
-                <a:spcPts val="0"/>
-              </a:spcAft>
-            </a:pPr>
-            <a:r>
-              <a:rPr sz="1150" b="0" i="0">
-                <a:solidFill>
-                  <a:srgbClr val="E7F0F3"/>
-                </a:solidFill>
-                <a:latin typeface="Arial"/>
-              </a:rPr>
-              <a:t>Kₗ = (4π/3)Δp_c(Rₘₐₓ³ − R³)</a:t>
-            </a:r>
-          </a:p>
-        </p:txBody>
-      </p:sp>
-      <p:sp>
-        <p:nvSpPr>
-          <p:cNvPr id="85" name="C1-E33 text 83" descr="sci-ppt:o083"/>
-          <p:cNvSpPr txBox="1"/>
-          <p:nvPr/>
-        </p:nvSpPr>
-        <p:spPr>
-          <a:xfrm>
-            <a:off x="457200" y="5897880"/>
-            <a:ext cx="11338560" cy="433070"/>
-          </a:xfrm>
-          <a:prstGeom prst="rect">
-            <a:avLst/>
-          </a:prstGeom>
-          <a:noFill/>
-          <a:effectLst/>
-        </p:spPr>
-        <p:txBody>
-          <a:bodyPr wrap="none" lIns="18288" rIns="18288" tIns="18288" bIns="18288" anchor="t">
-            <a:spAutoFit/>
-          </a:bodyPr>
-          <a:lstStyle/>
-          <a:p>
-            <a:pPr algn="l">
-              <a:spcAft>
-                <a:spcPts val="0"/>
-              </a:spcAft>
-            </a:pPr>
-            <a:r>
-              <a:rPr sz="1250" b="0" i="0">
-                <a:solidFill>
-                  <a:srgbClr val="F2B880"/>
-                </a:solidFill>
-                <a:latin typeface="Arial"/>
-              </a:rPr>
-              <a:t>The singular speed belongs to an ideal radial trajectory (no gas, viscosity, tension or compressibility), not to a validated physical</a:t>
-            </a:r>
-          </a:p>
-          <a:p>
-            <a:pPr algn="l">
-              <a:spcAft>
-                <a:spcPts val="0"/>
-              </a:spcAft>
-            </a:pPr>
-            <a:r>
-              <a:rPr sz="1250" b="0" i="0">
-                <a:solidFill>
-                  <a:srgbClr val="F2B880"/>
-                </a:solidFill>
-                <a:latin typeface="Arial"/>
-              </a:rPr>
-              <a:t>maximum.</a:t>
-            </a:r>
-          </a:p>
-        </p:txBody>
-      </p:sp>
-      <p:sp>
-        <p:nvSpPr>
-          <p:cNvPr id="86" name="C1-E33 text 84" descr="sci-ppt:o084"/>
+              <a:t>The impulse benchmark gives the early velocity field; the moving-interface problem that follows is a separate calculation.</a:t>
+            </a:r>
+          </a:p>
+        </p:txBody>
+      </p:sp>
+      <p:sp>
+        <p:nvSpPr>
+          <p:cNvPr id="46" name="C1-E33 text 44" descr="sci-ppt:o044"/>
           <p:cNvSpPr txBox="1"/>
           <p:nvPr/>
         </p:nvSpPr>
@@ -7004,7 +7011,7 @@
                 </a:solidFill>
                 <a:latin typeface="Arial"/>
               </a:rPr>
-              <a:t>Teaching inputs Rₘₐₓ = 30 µm, ρ = 1000 kg/m³, Δp_c = 100 kPa (Eqs. C1-E15, E16, E18).</a:t>
+              <a:t>Summary of Eqs. C1-E20 to C1-E24 for the declared case.</a:t>
             </a:r>
           </a:p>
         </p:txBody>
